--- a/assets/build-your-own-donna.pptx
+++ b/assets/build-your-own-donna.pptx
@@ -810,7 +810,7 @@
                 <a:cs typeface="Arial"/>
                 <a:sym typeface="Arial"/>
               </a:rPr>
-              <a:t>COLD OPEN — let the room settle on the quote before you speak. Opening line: “She ran the best closer in New York City. Today she comes to work for you.” Housekeeping in one breath: laptops out, Claude desktop installed, workspace invite accepted — anyone missing a piece, flag me now, we fix it while we talk. Set the promise: by 3 PM every one of you owns a working Donna — not a demo, yours, on your own inbox.</a:t>
+              <a:t>COLD OPEN — let the room settle on the quote before you speak. Opening line: “She ran the best closer in New York City. Today she comes to work for you.” Housekeeping in one breath: laptops out, Claude desktop installed, workspace invite accepted — anyone missing a piece, flag me now, we fix it while we talk. Set the promise: by 4 PM every one of you owns a working Donna — not a demo, yours, on your own inbox.</a:t>
             </a:r>
             <a:endParaRPr/>
           </a:p>
@@ -2218,7 +2218,7 @@
                 <a:cs typeface="Arial"/>
                 <a:sym typeface="Arial"/>
               </a:rPr>
-              <a:t>COLD OPEN — let the room settle on the quote before you speak. Opening line: “She ran the best closer in New York City. Today she comes to work for you.” Housekeeping in one breath: laptops out, Claude desktop installed, workspace invite accepted — anyone missing a piece, flag me now, we fix it while we talk. Set the promise: by 3 PM every one of you owns a working Donna — not a demo, yours, on your own inbox.</a:t>
+              <a:t>COLD OPEN — let the room settle on the quote before you speak. Opening line: “She ran the best closer in New York City. Today she comes to work for you.” Housekeeping in one breath: laptops out, Claude desktop installed, workspace invite accepted — anyone missing a piece, flag me now, we fix it while we talk. Set the promise: by 4 PM every one of you owns a working Donna — not a demo, yours, on your own inbox.</a:t>
             </a:r>
             <a:endParaRPr/>
           </a:p>
@@ -2578,7 +2578,7 @@
                 <a:cs typeface="Arial"/>
                 <a:sym typeface="Arial"/>
               </a:rPr>
-              <a:t>The want-ad quote is the thesis: the job you’re hiring for isn’t phones and dry cleaning — filters and rules and a tidier inbox are the want-ad version. You’re hiring judgment: something that knows who matters, drafts in your voice, and briefs you once a day. Land the fiction-to-real line and pause — that’s the hook for the next two hours.</a:t>
+              <a:t>The want-ad quote is the thesis: the job you’re hiring for isn’t phones and dry cleaning — filters and rules and a tidier inbox are the want-ad version. You’re hiring judgment: something that knows who matters, drafts in your voice, and briefs you once a day. Land the fiction-to-real line and pause — that’s the hook for the next 90 minutes.</a:t>
             </a:r>
             <a:endParaRPr/>
           </a:p>

--- a/assets/build-your-own-donna.pptx
+++ b/assets/build-your-own-donna.pptx
@@ -10,8 +10,11 @@
   <p:sldIdLst>
     <p:sldId id="256" r:id="rId5"/>
     <p:sldId id="257" r:id="rId6"/>
+    <p:sldId id="272" r:id="rId29"/>
     <p:sldId id="258" r:id="rId7"/>
     <p:sldId id="259" r:id="rId8"/>
+    <p:sldId id="273" r:id="rId30"/>
+    <p:sldId id="275" r:id="rId32"/>
     <p:sldId id="260" r:id="rId9"/>
     <p:sldId id="261" r:id="rId10"/>
     <p:sldId id="262" r:id="rId11"/>
@@ -23,6 +26,9 @@
     <p:sldId id="268" r:id="rId17"/>
     <p:sldId id="269" r:id="rId18"/>
     <p:sldId id="270" r:id="rId19"/>
+    <p:sldId id="276" r:id="rId33"/>
+    <p:sldId id="274" r:id="rId31"/>
+    <p:sldId id="277" r:id="rId34"/>
     <p:sldId id="271" r:id="rId20"/>
   </p:sldIdLst>
   <p:sldSz cy="6858000" cx="12192000"/>
@@ -810,7 +816,7 @@
                 <a:cs typeface="Arial"/>
                 <a:sym typeface="Arial"/>
               </a:rPr>
-              <a:t>COLD OPEN — let the room settle on the quote before you speak. Opening line: “She ran the best closer in New York City. Today she comes to work for you.” Housekeeping in one breath: laptops out, Claude desktop installed, workspace invite accepted — anyone missing a piece, flag me now, we fix it while we talk. Set the promise: by 4 PM every one of you owns a working Donna — not a demo, yours, on your own inbox.</a:t>
+              <a:t>COLD OPEN — let the room settle on the quote before you speak. Opening line: “She ran the best closer in New York City. Today she comes to work for you.” Housekeeping in one breath: laptops out, Claude desktop installed, workspace invite accepted — anyone missing a piece, flag me now, we fix it while we talk. Set the promise: by 4 PM every one of you owns a working Donna — not a demo, yours, on your own inbox.  WIFI lines on this slide are placeholders: drop in the venue network and password before presenting.</a:t>
             </a:r>
             <a:endParaRPr/>
           </a:p>
@@ -986,7 +992,7 @@
                 <a:cs typeface="Arial"/>
                 <a:sym typeface="Arial"/>
               </a:rPr>
-              <a:t>Projects → New project → name it Inbox Triage → Set project instructions → paste. Give them 6–8 quiet minutes to fill the three blanks — names, the deal, three words. Circulate. The blanks are where this stops being a demo and becomes THEIR assistant. Then everyone types: Triage my inbox.</a:t>
+              <a:t>Four blanks now, not three: VIPs, the number-one deal, DELEGATES with their lanes, and voice. The delegates blank is the one the pilot group left empty, so call it out: yellow only works if Donna knows who owns what. Give them 6 to 8 quiet minutes to fill blanks, circulate, then everyone runs: Triage my inbox. Then the green light: yes, draft the reds and the yellow handoffs.</a:t>
             </a:r>
             <a:endParaRPr/>
           </a:p>
@@ -1338,7 +1344,7 @@
                 <a:cs typeface="Arial"/>
                 <a:sym typeface="Arial"/>
               </a:rPr>
-              <a:t>This is the workshop’s one moment of real magic — Claude building its own tooling. Let them watch it fetch and install. The interview takes 5–10 minutes; encourage real answers (actual VIP names, the true banned phrases). Fallbacks are on the site under small print: the zip upload via Settings → Capabilities, or git clone for the terminal-inclined. Then the test drive — and everyone opens their drafts folder.</a:t>
+              <a:t>The step the pilot missed lives here, so go slow and demo on screen. Beat one: she writes SKILL.md from the project. Beat two: DOWNLOAD it (the file card has a download arrow). Beat three: open Cowork, then Skills, then Add skill, and UPLOAD the file. Say it plainly: a skill written in chat does not exist in Cowork until you upload it. Wait until every screen shows donna-replies in the skills list before anyone touches Scheduled tasks.</a:t>
             </a:r>
             <a:endParaRPr/>
           </a:p>
@@ -1690,7 +1696,7 @@
                 <a:cs typeface="Arial"/>
                 <a:sym typeface="Arial"/>
               </a:rPr>
-              <a:t>Grab the exact prompt from the site — Gmail and Outlook tabs differ on purpose. Gmail: Google Calendar attaches a true EMAIL reminder, so the 4:54 nudge is an email. Outlook: Microsoft’s API only allows pop-up reminders, so the nudge is a calendar notification on laptop and phone — the site’s small print has the one-time Power Automate upgrade for a true email. The last line of the prompt is the finale: a dry run, right now.</a:t>
+              <a:t>Scheduled tasks moved areas in a recent update; if someone cannot find it, use the site's trick: ask Claude where. Grab the prompt from the site, not from memory. Gmail attaches a true EMAIL reminder; Outlook gets a calendar notification instead, with upgrades in the site's small print. The last line of the prompt is the finale: a dry run, right now.</a:t>
             </a:r>
             <a:endParaRPr/>
           </a:p>
@@ -1866,7 +1872,7 @@
                 <a:cs typeface="Arial"/>
                 <a:sym typeface="Arial"/>
               </a:rPr>
-              <a:t>The closing moment — everyone watches the dry run land: doc in the Donna Briefings folder, event on today’s calendar, drafts waiting. Hold the silence while phones buzz. Then the reframe: that notification is the only email they now need — email comes to YOU, once a day, pre-digested. You didn’t just use an assistant today; you hired one.</a:t>
+              <a:t>The closing moment of the build: everyone watches the dry run land. Doc in the Donna Briefings folder, event on today's calendar, drafts waiting. Hold the silence while laptops ping. Then the reframe: that 4:54 notification is the only email they now need. Email comes to YOU now, once a day, pre-digested.</a:t>
             </a:r>
             <a:endParaRPr/>
           </a:p>
@@ -2116,12 +2122,12 @@
 </p:notes>
 </file>
 
-<file path=ppt/notesSlides/notesSlide2.xml><?xml version="1.0" encoding="utf-8"?>
+<file path=ppt/notesSlides/notesSlide17.xml><?xml version="1.0" encoding="utf-8"?>
 <p:notes xmlns:a="http://schemas.openxmlformats.org/drawingml/2006/main" xmlns:r="http://schemas.openxmlformats.org/officeDocument/2006/relationships" xmlns:mc="http://schemas.openxmlformats.org/markup-compatibility/2006" xmlns:mv="urn:schemas-microsoft-com:mac:vml" xmlns:p="http://schemas.openxmlformats.org/presentationml/2006/main" xmlns:c="http://schemas.openxmlformats.org/drawingml/2006/chart" xmlns:dgm="http://schemas.openxmlformats.org/drawingml/2006/diagram" xmlns:o="urn:schemas-microsoft-com:office:office" xmlns:v="urn:schemas-microsoft-com:vml" xmlns:pvml="urn:schemas-microsoft-com:office:powerpoint" xmlns:com="http://schemas.openxmlformats.org/drawingml/2006/compatibility" xmlns:p14="http://schemas.microsoft.com/office/powerpoint/2010/main" xmlns:p15="http://schemas.microsoft.com/office/powerpoint/2012/main" xmlns:ahyp="http://schemas.microsoft.com/office/drawing/2018/hyperlinkcolor" showMasterPhAnim="0" showMasterSp="0">
   <p:cSld>
     <p:spTree>
       <p:nvGrpSpPr>
-        <p:cNvPr id="18" name="Shape 18"/>
+        <p:cNvPr id="163" name="Shape 163"/>
         <p:cNvGrpSpPr/>
         <p:nvPr/>
       </p:nvGrpSpPr>
@@ -2135,7 +2141,7 @@
       </p:grpSpPr>
       <p:sp>
         <p:nvSpPr>
-          <p:cNvPr id="19" name="Google Shape;19;p2:notes"/>
+          <p:cNvPr id="164" name="Google Shape;164;p12:notes"/>
           <p:cNvSpPr/>
           <p:nvPr>
             <p:ph idx="2" type="sldImg"/>
@@ -2174,6 +2180,534 @@
       </p:sp>
       <p:sp>
         <p:nvSpPr>
+          <p:cNvPr id="165" name="Google Shape;165;p12:notes"/>
+          <p:cNvSpPr txBox="1"/>
+          <p:nvPr>
+            <p:ph idx="1" type="body"/>
+          </p:nvPr>
+        </p:nvSpPr>
+        <p:spPr>
+          <a:xfrm>
+            <a:off x="0" y="0"/>
+            <a:ext cx="3000000" cy="3000000"/>
+          </a:xfrm>
+          <a:prstGeom prst="rect">
+            <a:avLst/>
+          </a:prstGeom>
+          <a:noFill/>
+          <a:ln>
+            <a:noFill/>
+          </a:ln>
+        </p:spPr>
+        <p:txBody>
+          <a:bodyPr anchorCtr="0" anchor="t" bIns="45700" lIns="91425" spcFirstLastPara="1" rIns="91425" wrap="square" tIns="45700">
+            <a:noAutofit/>
+          </a:bodyPr>
+          <a:lstStyle/>
+          <a:p>
+            <a:pPr indent="0" lvl="0" marL="0" marR="0" rtl="0" algn="l">
+              <a:spcBef>
+                <a:spcPts val="0"/>
+              </a:spcBef>
+              <a:spcAft>
+                <a:spcPts val="0"/>
+              </a:spcAft>
+              <a:buNone/>
+            </a:pPr>
+            <a:r>
+              <a:rPr lang="en-US" sz="1200">
+                <a:solidFill>
+                  <a:schemeClr val="dk1"/>
+                </a:solidFill>
+                <a:latin typeface="Arial"/>
+                <a:ea typeface="Arial"/>
+                <a:cs typeface="Arial"/>
+                <a:sym typeface="Arial"/>
+              </a:rPr>
+              <a:t>Thirty seconds, not a resume. Two beats: you have run data systems at nine-figure scale, and you build with these exact tools every day (Donna is your actual assistant, not a demo). Then the two-hats line: they will also see you wearing the cooperative-data-system hat this offsite; today is the AI-workflows hat.</a:t>
+            </a:r>
+            <a:endParaRPr/>
+          </a:p>
+        </p:txBody>
+      </p:sp>
+      <p:sp>
+        <p:nvSpPr>
+          <p:cNvPr id="166" name="Google Shape;166;p12:notes"/>
+          <p:cNvSpPr txBox="1"/>
+          <p:nvPr>
+            <p:ph idx="12" type="sldNum"/>
+          </p:nvPr>
+        </p:nvSpPr>
+        <p:spPr>
+          <a:xfrm>
+            <a:off x="0" y="0"/>
+            <a:ext cx="3000000" cy="3000000"/>
+          </a:xfrm>
+          <a:prstGeom prst="rect">
+            <a:avLst/>
+          </a:prstGeom>
+          <a:noFill/>
+          <a:ln>
+            <a:noFill/>
+          </a:ln>
+        </p:spPr>
+        <p:txBody>
+          <a:bodyPr anchorCtr="0" anchor="t" bIns="45700" lIns="91425" spcFirstLastPara="1" rIns="91425" wrap="square" tIns="45700">
+            <a:noAutofit/>
+          </a:bodyPr>
+          <a:lstStyle/>
+          <a:p>
+            <a:pPr indent="0" lvl="0" marL="0" marR="0" rtl="0" algn="l">
+              <a:spcBef>
+                <a:spcPts val="0"/>
+              </a:spcBef>
+              <a:spcAft>
+                <a:spcPts val="0"/>
+              </a:spcAft>
+              <a:buNone/>
+            </a:pPr>
+            <a:fld id="{00000000-1234-1234-1234-123412341234}" type="slidenum">
+              <a:rPr lang="en-US" sz="1800">
+                <a:solidFill>
+                  <a:schemeClr val="dk1"/>
+                </a:solidFill>
+                <a:latin typeface="Arial"/>
+                <a:ea typeface="Arial"/>
+                <a:cs typeface="Arial"/>
+                <a:sym typeface="Arial"/>
+              </a:rPr>
+              <a:t>‹#›</a:t>
+            </a:fld>
+            <a:endParaRPr sz="1800">
+              <a:solidFill>
+                <a:schemeClr val="dk1"/>
+              </a:solidFill>
+              <a:latin typeface="Arial"/>
+              <a:ea typeface="Arial"/>
+              <a:cs typeface="Arial"/>
+              <a:sym typeface="Arial"/>
+            </a:endParaRPr>
+          </a:p>
+        </p:txBody>
+      </p:sp>
+    </p:spTree>
+  </p:cSld>
+  <p:clrMapOvr>
+    <a:masterClrMapping/>
+  </p:clrMapOvr>
+</p:notes>
+</file>
+
+<file path=ppt/notesSlides/notesSlide18.xml><?xml version="1.0" encoding="utf-8"?>
+<p:notes xmlns:a="http://schemas.openxmlformats.org/drawingml/2006/main" xmlns:r="http://schemas.openxmlformats.org/officeDocument/2006/relationships" xmlns:mc="http://schemas.openxmlformats.org/markup-compatibility/2006" xmlns:mv="urn:schemas-microsoft-com:mac:vml" xmlns:p="http://schemas.openxmlformats.org/presentationml/2006/main" xmlns:c="http://schemas.openxmlformats.org/drawingml/2006/chart" xmlns:dgm="http://schemas.openxmlformats.org/drawingml/2006/diagram" xmlns:o="urn:schemas-microsoft-com:office:office" xmlns:v="urn:schemas-microsoft-com:vml" xmlns:pvml="urn:schemas-microsoft-com:office:powerpoint" xmlns:com="http://schemas.openxmlformats.org/drawingml/2006/compatibility" xmlns:p14="http://schemas.microsoft.com/office/powerpoint/2010/main" xmlns:p15="http://schemas.microsoft.com/office/powerpoint/2012/main" xmlns:ahyp="http://schemas.microsoft.com/office/drawing/2018/hyperlinkcolor" showMasterPhAnim="0" showMasterSp="0">
+  <p:cSld>
+    <p:spTree>
+      <p:nvGrpSpPr>
+        <p:cNvPr id="163" name="Shape 163"/>
+        <p:cNvGrpSpPr/>
+        <p:nvPr/>
+      </p:nvGrpSpPr>
+      <p:grpSpPr>
+        <a:xfrm>
+          <a:off x="0" y="0"/>
+          <a:ext cx="0" cy="0"/>
+          <a:chOff x="0" y="0"/>
+          <a:chExt cx="0" cy="0"/>
+        </a:xfrm>
+      </p:grpSpPr>
+      <p:sp>
+        <p:nvSpPr>
+          <p:cNvPr id="164" name="Google Shape;164;p12:notes"/>
+          <p:cNvSpPr/>
+          <p:nvPr>
+            <p:ph idx="2" type="sldImg"/>
+          </p:nvPr>
+        </p:nvSpPr>
+        <p:spPr>
+          <a:xfrm>
+            <a:off x="0" y="0"/>
+            <a:ext cx="3000000" cy="3000000"/>
+          </a:xfrm>
+          <a:custGeom>
+            <a:rect b="b" l="l" r="r" t="t"/>
+            <a:pathLst>
+              <a:path extrusionOk="0" h="120000" w="120000">
+                <a:moveTo>
+                  <a:pt x="0" y="0"/>
+                </a:moveTo>
+                <a:lnTo>
+                  <a:pt x="120000" y="0"/>
+                </a:lnTo>
+                <a:lnTo>
+                  <a:pt x="120000" y="120000"/>
+                </a:lnTo>
+                <a:lnTo>
+                  <a:pt x="0" y="120000"/>
+                </a:lnTo>
+                <a:close/>
+              </a:path>
+            </a:pathLst>
+          </a:custGeom>
+          <a:noFill/>
+          <a:ln>
+            <a:noFill/>
+          </a:ln>
+        </p:spPr>
+      </p:sp>
+      <p:sp>
+        <p:nvSpPr>
+          <p:cNvPr id="165" name="Google Shape;165;p12:notes"/>
+          <p:cNvSpPr txBox="1"/>
+          <p:nvPr>
+            <p:ph idx="1" type="body"/>
+          </p:nvPr>
+        </p:nvSpPr>
+        <p:spPr>
+          <a:xfrm>
+            <a:off x="0" y="0"/>
+            <a:ext cx="3000000" cy="3000000"/>
+          </a:xfrm>
+          <a:prstGeom prst="rect">
+            <a:avLst/>
+          </a:prstGeom>
+          <a:noFill/>
+          <a:ln>
+            <a:noFill/>
+          </a:ln>
+        </p:spPr>
+        <p:txBody>
+          <a:bodyPr anchorCtr="0" anchor="t" bIns="45700" lIns="91425" spcFirstLastPara="1" rIns="91425" wrap="square" tIns="45700">
+            <a:noAutofit/>
+          </a:bodyPr>
+          <a:lstStyle/>
+          <a:p>
+            <a:pPr indent="0" lvl="0" marL="0" marR="0" rtl="0" algn="l">
+              <a:spcBef>
+                <a:spcPts val="0"/>
+              </a:spcBef>
+              <a:spcAft>
+                <a:spcPts val="0"/>
+              </a:spcAft>
+              <a:buNone/>
+            </a:pPr>
+            <a:r>
+              <a:rPr lang="en-US" sz="1200">
+                <a:solidFill>
+                  <a:schemeClr val="dk1"/>
+                </a:solidFill>
+                <a:latin typeface="Arial"/>
+                <a:ea typeface="Arial"/>
+                <a:cs typeface="Arial"/>
+                <a:sym typeface="Arial"/>
+              </a:rPr>
+              <a:t>This is the context slide the pilot was missing. The ladder is the mental model for the whole afternoon: say it, write it down, make it portable, put it on the clock. Everything they build today maps onto a rung, and you will name the rung as you enter each case file. Land the bottom line: this is what automating a workflow with natural language means.</a:t>
+            </a:r>
+            <a:endParaRPr/>
+          </a:p>
+        </p:txBody>
+      </p:sp>
+      <p:sp>
+        <p:nvSpPr>
+          <p:cNvPr id="166" name="Google Shape;166;p12:notes"/>
+          <p:cNvSpPr txBox="1"/>
+          <p:nvPr>
+            <p:ph idx="12" type="sldNum"/>
+          </p:nvPr>
+        </p:nvSpPr>
+        <p:spPr>
+          <a:xfrm>
+            <a:off x="0" y="0"/>
+            <a:ext cx="3000000" cy="3000000"/>
+          </a:xfrm>
+          <a:prstGeom prst="rect">
+            <a:avLst/>
+          </a:prstGeom>
+          <a:noFill/>
+          <a:ln>
+            <a:noFill/>
+          </a:ln>
+        </p:spPr>
+        <p:txBody>
+          <a:bodyPr anchorCtr="0" anchor="t" bIns="45700" lIns="91425" spcFirstLastPara="1" rIns="91425" wrap="square" tIns="45700">
+            <a:noAutofit/>
+          </a:bodyPr>
+          <a:lstStyle/>
+          <a:p>
+            <a:pPr indent="0" lvl="0" marL="0" marR="0" rtl="0" algn="l">
+              <a:spcBef>
+                <a:spcPts val="0"/>
+              </a:spcBef>
+              <a:spcAft>
+                <a:spcPts val="0"/>
+              </a:spcAft>
+              <a:buNone/>
+            </a:pPr>
+            <a:fld id="{00000000-1234-1234-1234-123412341234}" type="slidenum">
+              <a:rPr lang="en-US" sz="1800">
+                <a:solidFill>
+                  <a:schemeClr val="dk1"/>
+                </a:solidFill>
+                <a:latin typeface="Arial"/>
+                <a:ea typeface="Arial"/>
+                <a:cs typeface="Arial"/>
+                <a:sym typeface="Arial"/>
+              </a:rPr>
+              <a:t>‹#›</a:t>
+            </a:fld>
+            <a:endParaRPr sz="1800">
+              <a:solidFill>
+                <a:schemeClr val="dk1"/>
+              </a:solidFill>
+              <a:latin typeface="Arial"/>
+              <a:ea typeface="Arial"/>
+              <a:cs typeface="Arial"/>
+              <a:sym typeface="Arial"/>
+            </a:endParaRPr>
+          </a:p>
+        </p:txBody>
+      </p:sp>
+    </p:spTree>
+  </p:cSld>
+  <p:clrMapOvr>
+    <a:masterClrMapping/>
+  </p:clrMapOvr>
+</p:notes>
+</file>
+
+<file path=ppt/notesSlides/notesSlide19.xml><?xml version="1.0" encoding="utf-8"?>
+<p:notes xmlns:a="http://schemas.openxmlformats.org/drawingml/2006/main" xmlns:r="http://schemas.openxmlformats.org/officeDocument/2006/relationships" xmlns:mc="http://schemas.openxmlformats.org/markup-compatibility/2006" xmlns:mv="urn:schemas-microsoft-com:mac:vml" xmlns:p="http://schemas.openxmlformats.org/presentationml/2006/main" xmlns:c="http://schemas.openxmlformats.org/drawingml/2006/chart" xmlns:dgm="http://schemas.openxmlformats.org/drawingml/2006/diagram" xmlns:o="urn:schemas-microsoft-com:office:office" xmlns:v="urn:schemas-microsoft-com:vml" xmlns:pvml="urn:schemas-microsoft-com:office:powerpoint" xmlns:com="http://schemas.openxmlformats.org/drawingml/2006/compatibility" xmlns:p14="http://schemas.microsoft.com/office/powerpoint/2010/main" xmlns:p15="http://schemas.microsoft.com/office/powerpoint/2012/main" xmlns:ahyp="http://schemas.microsoft.com/office/drawing/2018/hyperlinkcolor" showMasterPhAnim="0" showMasterSp="0">
+  <p:cSld>
+    <p:spTree>
+      <p:nvGrpSpPr>
+        <p:cNvPr id="163" name="Shape 163"/>
+        <p:cNvGrpSpPr/>
+        <p:nvPr/>
+      </p:nvGrpSpPr>
+      <p:grpSpPr>
+        <a:xfrm>
+          <a:off x="0" y="0"/>
+          <a:ext cx="0" cy="0"/>
+          <a:chOff x="0" y="0"/>
+          <a:chExt cx="0" cy="0"/>
+        </a:xfrm>
+      </p:grpSpPr>
+      <p:sp>
+        <p:nvSpPr>
+          <p:cNvPr id="164" name="Google Shape;164;p12:notes"/>
+          <p:cNvSpPr/>
+          <p:nvPr>
+            <p:ph idx="2" type="sldImg"/>
+          </p:nvPr>
+        </p:nvSpPr>
+        <p:spPr>
+          <a:xfrm>
+            <a:off x="0" y="0"/>
+            <a:ext cx="3000000" cy="3000000"/>
+          </a:xfrm>
+          <a:custGeom>
+            <a:rect b="b" l="l" r="r" t="t"/>
+            <a:pathLst>
+              <a:path extrusionOk="0" h="120000" w="120000">
+                <a:moveTo>
+                  <a:pt x="0" y="0"/>
+                </a:moveTo>
+                <a:lnTo>
+                  <a:pt x="120000" y="0"/>
+                </a:lnTo>
+                <a:lnTo>
+                  <a:pt x="120000" y="120000"/>
+                </a:lnTo>
+                <a:lnTo>
+                  <a:pt x="0" y="120000"/>
+                </a:lnTo>
+                <a:close/>
+              </a:path>
+            </a:pathLst>
+          </a:custGeom>
+          <a:noFill/>
+          <a:ln>
+            <a:noFill/>
+          </a:ln>
+        </p:spPr>
+      </p:sp>
+      <p:sp>
+        <p:nvSpPr>
+          <p:cNvPr id="165" name="Google Shape;165;p12:notes"/>
+          <p:cNvSpPr txBox="1"/>
+          <p:nvPr>
+            <p:ph idx="1" type="body"/>
+          </p:nvPr>
+        </p:nvSpPr>
+        <p:spPr>
+          <a:xfrm>
+            <a:off x="0" y="0"/>
+            <a:ext cx="3000000" cy="3000000"/>
+          </a:xfrm>
+          <a:prstGeom prst="rect">
+            <a:avLst/>
+          </a:prstGeom>
+          <a:noFill/>
+          <a:ln>
+            <a:noFill/>
+          </a:ln>
+        </p:spPr>
+        <p:txBody>
+          <a:bodyPr anchorCtr="0" anchor="t" bIns="45700" lIns="91425" spcFirstLastPara="1" rIns="91425" wrap="square" tIns="45700">
+            <a:noAutofit/>
+          </a:bodyPr>
+          <a:lstStyle/>
+          <a:p>
+            <a:pPr indent="0" lvl="0" marL="0" marR="0" rtl="0" algn="l">
+              <a:spcBef>
+                <a:spcPts val="0"/>
+              </a:spcBef>
+              <a:spcAft>
+                <a:spcPts val="0"/>
+              </a:spcAft>
+              <a:buNone/>
+            </a:pPr>
+            <a:r>
+              <a:rPr lang="en-US" sz="1200">
+                <a:solidFill>
+                  <a:schemeClr val="dk1"/>
+                </a:solidFill>
+                <a:latin typeface="Arial"/>
+                <a:ea typeface="Arial"/>
+                <a:cs typeface="Arial"/>
+                <a:sym typeface="Arial"/>
+              </a:rPr>
+              <a:t>Give one personal story per card; the two-calendar morning shift is your own daily driver, say so. These four are travel-shaped on purpose: calendars, meeting prep, client follow-ups, supplier noise. Plant workshop number two (the calendar edition) without selling it: if the room wants it, we will do it.</a:t>
+            </a:r>
+            <a:endParaRPr/>
+          </a:p>
+        </p:txBody>
+      </p:sp>
+      <p:sp>
+        <p:nvSpPr>
+          <p:cNvPr id="166" name="Google Shape;166;p12:notes"/>
+          <p:cNvSpPr txBox="1"/>
+          <p:nvPr>
+            <p:ph idx="12" type="sldNum"/>
+          </p:nvPr>
+        </p:nvSpPr>
+        <p:spPr>
+          <a:xfrm>
+            <a:off x="0" y="0"/>
+            <a:ext cx="3000000" cy="3000000"/>
+          </a:xfrm>
+          <a:prstGeom prst="rect">
+            <a:avLst/>
+          </a:prstGeom>
+          <a:noFill/>
+          <a:ln>
+            <a:noFill/>
+          </a:ln>
+        </p:spPr>
+        <p:txBody>
+          <a:bodyPr anchorCtr="0" anchor="t" bIns="45700" lIns="91425" spcFirstLastPara="1" rIns="91425" wrap="square" tIns="45700">
+            <a:noAutofit/>
+          </a:bodyPr>
+          <a:lstStyle/>
+          <a:p>
+            <a:pPr indent="0" lvl="0" marL="0" marR="0" rtl="0" algn="l">
+              <a:spcBef>
+                <a:spcPts val="0"/>
+              </a:spcBef>
+              <a:spcAft>
+                <a:spcPts val="0"/>
+              </a:spcAft>
+              <a:buNone/>
+            </a:pPr>
+            <a:fld id="{00000000-1234-1234-1234-123412341234}" type="slidenum">
+              <a:rPr lang="en-US" sz="1800">
+                <a:solidFill>
+                  <a:schemeClr val="dk1"/>
+                </a:solidFill>
+                <a:latin typeface="Arial"/>
+                <a:ea typeface="Arial"/>
+                <a:cs typeface="Arial"/>
+                <a:sym typeface="Arial"/>
+              </a:rPr>
+              <a:t>‹#›</a:t>
+            </a:fld>
+            <a:endParaRPr sz="1800">
+              <a:solidFill>
+                <a:schemeClr val="dk1"/>
+              </a:solidFill>
+              <a:latin typeface="Arial"/>
+              <a:ea typeface="Arial"/>
+              <a:cs typeface="Arial"/>
+              <a:sym typeface="Arial"/>
+            </a:endParaRPr>
+          </a:p>
+        </p:txBody>
+      </p:sp>
+    </p:spTree>
+  </p:cSld>
+  <p:clrMapOvr>
+    <a:masterClrMapping/>
+  </p:clrMapOvr>
+</p:notes>
+</file>
+
+<file path=ppt/notesSlides/notesSlide2.xml><?xml version="1.0" encoding="utf-8"?>
+<p:notes xmlns:a="http://schemas.openxmlformats.org/drawingml/2006/main" xmlns:r="http://schemas.openxmlformats.org/officeDocument/2006/relationships" xmlns:mc="http://schemas.openxmlformats.org/markup-compatibility/2006" xmlns:mv="urn:schemas-microsoft-com:mac:vml" xmlns:p="http://schemas.openxmlformats.org/presentationml/2006/main" xmlns:c="http://schemas.openxmlformats.org/drawingml/2006/chart" xmlns:dgm="http://schemas.openxmlformats.org/drawingml/2006/diagram" xmlns:o="urn:schemas-microsoft-com:office:office" xmlns:v="urn:schemas-microsoft-com:vml" xmlns:pvml="urn:schemas-microsoft-com:office:powerpoint" xmlns:com="http://schemas.openxmlformats.org/drawingml/2006/compatibility" xmlns:p14="http://schemas.microsoft.com/office/powerpoint/2010/main" xmlns:p15="http://schemas.microsoft.com/office/powerpoint/2012/main" xmlns:ahyp="http://schemas.microsoft.com/office/drawing/2018/hyperlinkcolor" showMasterPhAnim="0" showMasterSp="0">
+  <p:cSld>
+    <p:spTree>
+      <p:nvGrpSpPr>
+        <p:cNvPr id="18" name="Shape 18"/>
+        <p:cNvGrpSpPr/>
+        <p:nvPr/>
+      </p:nvGrpSpPr>
+      <p:grpSpPr>
+        <a:xfrm>
+          <a:off x="0" y="0"/>
+          <a:ext cx="0" cy="0"/>
+          <a:chOff x="0" y="0"/>
+          <a:chExt cx="0" cy="0"/>
+        </a:xfrm>
+      </p:grpSpPr>
+      <p:sp>
+        <p:nvSpPr>
+          <p:cNvPr id="19" name="Google Shape;19;p2:notes"/>
+          <p:cNvSpPr/>
+          <p:nvPr>
+            <p:ph idx="2" type="sldImg"/>
+          </p:nvPr>
+        </p:nvSpPr>
+        <p:spPr>
+          <a:xfrm>
+            <a:off x="0" y="0"/>
+            <a:ext cx="3000000" cy="3000000"/>
+          </a:xfrm>
+          <a:custGeom>
+            <a:rect b="b" l="l" r="r" t="t"/>
+            <a:pathLst>
+              <a:path extrusionOk="0" h="120000" w="120000">
+                <a:moveTo>
+                  <a:pt x="0" y="0"/>
+                </a:moveTo>
+                <a:lnTo>
+                  <a:pt x="120000" y="0"/>
+                </a:lnTo>
+                <a:lnTo>
+                  <a:pt x="120000" y="120000"/>
+                </a:lnTo>
+                <a:lnTo>
+                  <a:pt x="0" y="120000"/>
+                </a:lnTo>
+                <a:close/>
+              </a:path>
+            </a:pathLst>
+          </a:custGeom>
+          <a:noFill/>
+          <a:ln>
+            <a:noFill/>
+          </a:ln>
+        </p:spPr>
+      </p:sp>
+      <p:sp>
+        <p:nvSpPr>
           <p:cNvPr id="20" name="Google Shape;20;p2:notes"/>
           <p:cNvSpPr txBox="1"/>
           <p:nvPr>
@@ -2283,6 +2817,534 @@
             <a:endParaRPr b="0" i="0" sz="1800" u="none" cap="none" strike="noStrike">
               <a:solidFill>
                 <a:srgbClr val="000000"/>
+              </a:solidFill>
+              <a:latin typeface="Arial"/>
+              <a:ea typeface="Arial"/>
+              <a:cs typeface="Arial"/>
+              <a:sym typeface="Arial"/>
+            </a:endParaRPr>
+          </a:p>
+        </p:txBody>
+      </p:sp>
+    </p:spTree>
+  </p:cSld>
+  <p:clrMapOvr>
+    <a:masterClrMapping/>
+  </p:clrMapOvr>
+</p:notes>
+</file>
+
+<file path=ppt/notesSlides/notesSlide20.xml><?xml version="1.0" encoding="utf-8"?>
+<p:notes xmlns:a="http://schemas.openxmlformats.org/drawingml/2006/main" xmlns:r="http://schemas.openxmlformats.org/officeDocument/2006/relationships" xmlns:mc="http://schemas.openxmlformats.org/markup-compatibility/2006" xmlns:mv="urn:schemas-microsoft-com:mac:vml" xmlns:p="http://schemas.openxmlformats.org/presentationml/2006/main" xmlns:c="http://schemas.openxmlformats.org/drawingml/2006/chart" xmlns:dgm="http://schemas.openxmlformats.org/drawingml/2006/diagram" xmlns:o="urn:schemas-microsoft-com:office:office" xmlns:v="urn:schemas-microsoft-com:vml" xmlns:pvml="urn:schemas-microsoft-com:office:powerpoint" xmlns:com="http://schemas.openxmlformats.org/drawingml/2006/compatibility" xmlns:p14="http://schemas.microsoft.com/office/powerpoint/2010/main" xmlns:p15="http://schemas.microsoft.com/office/powerpoint/2012/main" xmlns:ahyp="http://schemas.microsoft.com/office/drawing/2018/hyperlinkcolor" showMasterPhAnim="0" showMasterSp="0">
+  <p:cSld>
+    <p:spTree>
+      <p:nvGrpSpPr>
+        <p:cNvPr id="163" name="Shape 163"/>
+        <p:cNvGrpSpPr/>
+        <p:nvPr/>
+      </p:nvGrpSpPr>
+      <p:grpSpPr>
+        <a:xfrm>
+          <a:off x="0" y="0"/>
+          <a:ext cx="0" cy="0"/>
+          <a:chOff x="0" y="0"/>
+          <a:chExt cx="0" cy="0"/>
+        </a:xfrm>
+      </p:grpSpPr>
+      <p:sp>
+        <p:nvSpPr>
+          <p:cNvPr id="164" name="Google Shape;164;p12:notes"/>
+          <p:cNvSpPr/>
+          <p:nvPr>
+            <p:ph idx="2" type="sldImg"/>
+          </p:nvPr>
+        </p:nvSpPr>
+        <p:spPr>
+          <a:xfrm>
+            <a:off x="0" y="0"/>
+            <a:ext cx="3000000" cy="3000000"/>
+          </a:xfrm>
+          <a:custGeom>
+            <a:rect b="b" l="l" r="r" t="t"/>
+            <a:pathLst>
+              <a:path extrusionOk="0" h="120000" w="120000">
+                <a:moveTo>
+                  <a:pt x="0" y="0"/>
+                </a:moveTo>
+                <a:lnTo>
+                  <a:pt x="120000" y="0"/>
+                </a:lnTo>
+                <a:lnTo>
+                  <a:pt x="120000" y="120000"/>
+                </a:lnTo>
+                <a:lnTo>
+                  <a:pt x="0" y="120000"/>
+                </a:lnTo>
+                <a:close/>
+              </a:path>
+            </a:pathLst>
+          </a:custGeom>
+          <a:noFill/>
+          <a:ln>
+            <a:noFill/>
+          </a:ln>
+        </p:spPr>
+      </p:sp>
+      <p:sp>
+        <p:nvSpPr>
+          <p:cNvPr id="165" name="Google Shape;165;p12:notes"/>
+          <p:cNvSpPr txBox="1"/>
+          <p:nvPr>
+            <p:ph idx="1" type="body"/>
+          </p:nvPr>
+        </p:nvSpPr>
+        <p:spPr>
+          <a:xfrm>
+            <a:off x="0" y="0"/>
+            <a:ext cx="3000000" cy="3000000"/>
+          </a:xfrm>
+          <a:prstGeom prst="rect">
+            <a:avLst/>
+          </a:prstGeom>
+          <a:noFill/>
+          <a:ln>
+            <a:noFill/>
+          </a:ln>
+        </p:spPr>
+        <p:txBody>
+          <a:bodyPr anchorCtr="0" anchor="t" bIns="45700" lIns="91425" spcFirstLastPara="1" rIns="91425" wrap="square" tIns="45700">
+            <a:noAutofit/>
+          </a:bodyPr>
+          <a:lstStyle/>
+          <a:p>
+            <a:pPr indent="0" lvl="0" marL="0" marR="0" rtl="0" algn="l">
+              <a:spcBef>
+                <a:spcPts val="0"/>
+              </a:spcBef>
+              <a:spcAft>
+                <a:spcPts val="0"/>
+              </a:spcAft>
+              <a:buNone/>
+            </a:pPr>
+            <a:r>
+              <a:rPr lang="en-US" sz="1200">
+                <a:solidFill>
+                  <a:schemeClr val="dk1"/>
+                </a:solidFill>
+                <a:latin typeface="Arial"/>
+                <a:ea typeface="Arial"/>
+                <a:cs typeface="Arial"/>
+                <a:sym typeface="Arial"/>
+              </a:rPr>
+              <a:t>Read all five slowly; this slide buys calm for the next hour. Rules 1 and 2 kill the unspoken fear (nothing sends, nothing deletes). Rule 3 sets pacing so the fast people help instead of racing ahead. After rule 5, say: if anything I just said did not compute, perfect, you are exactly who this workshop is for.</a:t>
+            </a:r>
+            <a:endParaRPr/>
+          </a:p>
+        </p:txBody>
+      </p:sp>
+      <p:sp>
+        <p:nvSpPr>
+          <p:cNvPr id="166" name="Google Shape;166;p12:notes"/>
+          <p:cNvSpPr txBox="1"/>
+          <p:nvPr>
+            <p:ph idx="12" type="sldNum"/>
+          </p:nvPr>
+        </p:nvSpPr>
+        <p:spPr>
+          <a:xfrm>
+            <a:off x="0" y="0"/>
+            <a:ext cx="3000000" cy="3000000"/>
+          </a:xfrm>
+          <a:prstGeom prst="rect">
+            <a:avLst/>
+          </a:prstGeom>
+          <a:noFill/>
+          <a:ln>
+            <a:noFill/>
+          </a:ln>
+        </p:spPr>
+        <p:txBody>
+          <a:bodyPr anchorCtr="0" anchor="t" bIns="45700" lIns="91425" spcFirstLastPara="1" rIns="91425" wrap="square" tIns="45700">
+            <a:noAutofit/>
+          </a:bodyPr>
+          <a:lstStyle/>
+          <a:p>
+            <a:pPr indent="0" lvl="0" marL="0" marR="0" rtl="0" algn="l">
+              <a:spcBef>
+                <a:spcPts val="0"/>
+              </a:spcBef>
+              <a:spcAft>
+                <a:spcPts val="0"/>
+              </a:spcAft>
+              <a:buNone/>
+            </a:pPr>
+            <a:fld id="{00000000-1234-1234-1234-123412341234}" type="slidenum">
+              <a:rPr lang="en-US" sz="1800">
+                <a:solidFill>
+                  <a:schemeClr val="dk1"/>
+                </a:solidFill>
+                <a:latin typeface="Arial"/>
+                <a:ea typeface="Arial"/>
+                <a:cs typeface="Arial"/>
+                <a:sym typeface="Arial"/>
+              </a:rPr>
+              <a:t>‹#›</a:t>
+            </a:fld>
+            <a:endParaRPr sz="1800">
+              <a:solidFill>
+                <a:schemeClr val="dk1"/>
+              </a:solidFill>
+              <a:latin typeface="Arial"/>
+              <a:ea typeface="Arial"/>
+              <a:cs typeface="Arial"/>
+              <a:sym typeface="Arial"/>
+            </a:endParaRPr>
+          </a:p>
+        </p:txBody>
+      </p:sp>
+    </p:spTree>
+  </p:cSld>
+  <p:clrMapOvr>
+    <a:masterClrMapping/>
+  </p:clrMapOvr>
+</p:notes>
+</file>
+
+<file path=ppt/notesSlides/notesSlide21.xml><?xml version="1.0" encoding="utf-8"?>
+<p:notes xmlns:a="http://schemas.openxmlformats.org/drawingml/2006/main" xmlns:r="http://schemas.openxmlformats.org/officeDocument/2006/relationships" xmlns:mc="http://schemas.openxmlformats.org/markup-compatibility/2006" xmlns:mv="urn:schemas-microsoft-com:mac:vml" xmlns:p="http://schemas.openxmlformats.org/presentationml/2006/main" xmlns:c="http://schemas.openxmlformats.org/drawingml/2006/chart" xmlns:dgm="http://schemas.openxmlformats.org/drawingml/2006/diagram" xmlns:o="urn:schemas-microsoft-com:office:office" xmlns:v="urn:schemas-microsoft-com:vml" xmlns:pvml="urn:schemas-microsoft-com:office:powerpoint" xmlns:com="http://schemas.openxmlformats.org/drawingml/2006/compatibility" xmlns:p14="http://schemas.microsoft.com/office/powerpoint/2010/main" xmlns:p15="http://schemas.microsoft.com/office/powerpoint/2012/main" xmlns:ahyp="http://schemas.microsoft.com/office/drawing/2018/hyperlinkcolor" showMasterPhAnim="0" showMasterSp="0">
+  <p:cSld>
+    <p:spTree>
+      <p:nvGrpSpPr>
+        <p:cNvPr id="163" name="Shape 163"/>
+        <p:cNvGrpSpPr/>
+        <p:nvPr/>
+      </p:nvGrpSpPr>
+      <p:grpSpPr>
+        <a:xfrm>
+          <a:off x="0" y="0"/>
+          <a:ext cx="0" cy="0"/>
+          <a:chOff x="0" y="0"/>
+          <a:chExt cx="0" cy="0"/>
+        </a:xfrm>
+      </p:grpSpPr>
+      <p:sp>
+        <p:nvSpPr>
+          <p:cNvPr id="164" name="Google Shape;164;p12:notes"/>
+          <p:cNvSpPr/>
+          <p:nvPr>
+            <p:ph idx="2" type="sldImg"/>
+          </p:nvPr>
+        </p:nvSpPr>
+        <p:spPr>
+          <a:xfrm>
+            <a:off x="0" y="0"/>
+            <a:ext cx="3000000" cy="3000000"/>
+          </a:xfrm>
+          <a:custGeom>
+            <a:rect b="b" l="l" r="r" t="t"/>
+            <a:pathLst>
+              <a:path extrusionOk="0" h="120000" w="120000">
+                <a:moveTo>
+                  <a:pt x="0" y="0"/>
+                </a:moveTo>
+                <a:lnTo>
+                  <a:pt x="120000" y="0"/>
+                </a:lnTo>
+                <a:lnTo>
+                  <a:pt x="120000" y="120000"/>
+                </a:lnTo>
+                <a:lnTo>
+                  <a:pt x="0" y="120000"/>
+                </a:lnTo>
+                <a:close/>
+              </a:path>
+            </a:pathLst>
+          </a:custGeom>
+          <a:noFill/>
+          <a:ln>
+            <a:noFill/>
+          </a:ln>
+        </p:spPr>
+      </p:sp>
+      <p:sp>
+        <p:nvSpPr>
+          <p:cNvPr id="165" name="Google Shape;165;p12:notes"/>
+          <p:cNvSpPr txBox="1"/>
+          <p:nvPr>
+            <p:ph idx="1" type="body"/>
+          </p:nvPr>
+        </p:nvSpPr>
+        <p:spPr>
+          <a:xfrm>
+            <a:off x="0" y="0"/>
+            <a:ext cx="3000000" cy="3000000"/>
+          </a:xfrm>
+          <a:prstGeom prst="rect">
+            <a:avLst/>
+          </a:prstGeom>
+          <a:noFill/>
+          <a:ln>
+            <a:noFill/>
+          </a:ln>
+        </p:spPr>
+        <p:txBody>
+          <a:bodyPr anchorCtr="0" anchor="t" bIns="45700" lIns="91425" spcFirstLastPara="1" rIns="91425" wrap="square" tIns="45700">
+            <a:noAutofit/>
+          </a:bodyPr>
+          <a:lstStyle/>
+          <a:p>
+            <a:pPr indent="0" lvl="0" marL="0" marR="0" rtl="0" algn="l">
+              <a:spcBef>
+                <a:spcPts val="0"/>
+              </a:spcBef>
+              <a:spcAft>
+                <a:spcPts val="0"/>
+              </a:spcAft>
+              <a:buNone/>
+            </a:pPr>
+            <a:r>
+              <a:rPr lang="en-US" sz="1200">
+                <a:solidFill>
+                  <a:schemeClr val="dk1"/>
+                </a:solidFill>
+                <a:latin typeface="Arial"/>
+                <a:ea typeface="Arial"/>
+                <a:cs typeface="Arial"/>
+                <a:sym typeface="Arial"/>
+              </a:rPr>
+              <a:t>The pivot into discussion, and the sentence they should quote later. Recap the ladder with THEIR artifacts: instructions they wrote, a skill file they own, a task on their calendar. Then the reframe: email was the rehearsal. Pause here, then go to the next slide and open the floor.</a:t>
+            </a:r>
+            <a:endParaRPr/>
+          </a:p>
+        </p:txBody>
+      </p:sp>
+      <p:sp>
+        <p:nvSpPr>
+          <p:cNvPr id="166" name="Google Shape;166;p12:notes"/>
+          <p:cNvSpPr txBox="1"/>
+          <p:nvPr>
+            <p:ph idx="12" type="sldNum"/>
+          </p:nvPr>
+        </p:nvSpPr>
+        <p:spPr>
+          <a:xfrm>
+            <a:off x="0" y="0"/>
+            <a:ext cx="3000000" cy="3000000"/>
+          </a:xfrm>
+          <a:prstGeom prst="rect">
+            <a:avLst/>
+          </a:prstGeom>
+          <a:noFill/>
+          <a:ln>
+            <a:noFill/>
+          </a:ln>
+        </p:spPr>
+        <p:txBody>
+          <a:bodyPr anchorCtr="0" anchor="t" bIns="45700" lIns="91425" spcFirstLastPara="1" rIns="91425" wrap="square" tIns="45700">
+            <a:noAutofit/>
+          </a:bodyPr>
+          <a:lstStyle/>
+          <a:p>
+            <a:pPr indent="0" lvl="0" marL="0" marR="0" rtl="0" algn="l">
+              <a:spcBef>
+                <a:spcPts val="0"/>
+              </a:spcBef>
+              <a:spcAft>
+                <a:spcPts val="0"/>
+              </a:spcAft>
+              <a:buNone/>
+            </a:pPr>
+            <a:fld id="{00000000-1234-1234-1234-123412341234}" type="slidenum">
+              <a:rPr lang="en-US" sz="1800">
+                <a:solidFill>
+                  <a:schemeClr val="dk1"/>
+                </a:solidFill>
+                <a:latin typeface="Arial"/>
+                <a:ea typeface="Arial"/>
+                <a:cs typeface="Arial"/>
+                <a:sym typeface="Arial"/>
+              </a:rPr>
+              <a:t>‹#›</a:t>
+            </a:fld>
+            <a:endParaRPr sz="1800">
+              <a:solidFill>
+                <a:schemeClr val="dk1"/>
+              </a:solidFill>
+              <a:latin typeface="Arial"/>
+              <a:ea typeface="Arial"/>
+              <a:cs typeface="Arial"/>
+              <a:sym typeface="Arial"/>
+            </a:endParaRPr>
+          </a:p>
+        </p:txBody>
+      </p:sp>
+    </p:spTree>
+  </p:cSld>
+  <p:clrMapOvr>
+    <a:masterClrMapping/>
+  </p:clrMapOvr>
+</p:notes>
+</file>
+
+<file path=ppt/notesSlides/notesSlide22.xml><?xml version="1.0" encoding="utf-8"?>
+<p:notes xmlns:a="http://schemas.openxmlformats.org/drawingml/2006/main" xmlns:r="http://schemas.openxmlformats.org/officeDocument/2006/relationships" xmlns:mc="http://schemas.openxmlformats.org/markup-compatibility/2006" xmlns:mv="urn:schemas-microsoft-com:mac:vml" xmlns:p="http://schemas.openxmlformats.org/presentationml/2006/main" xmlns:c="http://schemas.openxmlformats.org/drawingml/2006/chart" xmlns:dgm="http://schemas.openxmlformats.org/drawingml/2006/diagram" xmlns:o="urn:schemas-microsoft-com:office:office" xmlns:v="urn:schemas-microsoft-com:vml" xmlns:pvml="urn:schemas-microsoft-com:office:powerpoint" xmlns:com="http://schemas.openxmlformats.org/drawingml/2006/compatibility" xmlns:p14="http://schemas.microsoft.com/office/powerpoint/2010/main" xmlns:p15="http://schemas.microsoft.com/office/powerpoint/2012/main" xmlns:ahyp="http://schemas.microsoft.com/office/drawing/2018/hyperlinkcolor" showMasterPhAnim="0" showMasterSp="0">
+  <p:cSld>
+    <p:spTree>
+      <p:nvGrpSpPr>
+        <p:cNvPr id="163" name="Shape 163"/>
+        <p:cNvGrpSpPr/>
+        <p:nvPr/>
+      </p:nvGrpSpPr>
+      <p:grpSpPr>
+        <a:xfrm>
+          <a:off x="0" y="0"/>
+          <a:ext cx="0" cy="0"/>
+          <a:chOff x="0" y="0"/>
+          <a:chExt cx="0" cy="0"/>
+        </a:xfrm>
+      </p:grpSpPr>
+      <p:sp>
+        <p:nvSpPr>
+          <p:cNvPr id="164" name="Google Shape;164;p12:notes"/>
+          <p:cNvSpPr/>
+          <p:nvPr>
+            <p:ph idx="2" type="sldImg"/>
+          </p:nvPr>
+        </p:nvSpPr>
+        <p:spPr>
+          <a:xfrm>
+            <a:off x="0" y="0"/>
+            <a:ext cx="3000000" cy="3000000"/>
+          </a:xfrm>
+          <a:custGeom>
+            <a:rect b="b" l="l" r="r" t="t"/>
+            <a:pathLst>
+              <a:path extrusionOk="0" h="120000" w="120000">
+                <a:moveTo>
+                  <a:pt x="0" y="0"/>
+                </a:moveTo>
+                <a:lnTo>
+                  <a:pt x="120000" y="0"/>
+                </a:lnTo>
+                <a:lnTo>
+                  <a:pt x="120000" y="120000"/>
+                </a:lnTo>
+                <a:lnTo>
+                  <a:pt x="0" y="120000"/>
+                </a:lnTo>
+                <a:close/>
+              </a:path>
+            </a:pathLst>
+          </a:custGeom>
+          <a:noFill/>
+          <a:ln>
+            <a:noFill/>
+          </a:ln>
+        </p:spPr>
+      </p:sp>
+      <p:sp>
+        <p:nvSpPr>
+          <p:cNvPr id="165" name="Google Shape;165;p12:notes"/>
+          <p:cNvSpPr txBox="1"/>
+          <p:nvPr>
+            <p:ph idx="1" type="body"/>
+          </p:nvPr>
+        </p:nvSpPr>
+        <p:spPr>
+          <a:xfrm>
+            <a:off x="0" y="0"/>
+            <a:ext cx="3000000" cy="3000000"/>
+          </a:xfrm>
+          <a:prstGeom prst="rect">
+            <a:avLst/>
+          </a:prstGeom>
+          <a:noFill/>
+          <a:ln>
+            <a:noFill/>
+          </a:ln>
+        </p:spPr>
+        <p:txBody>
+          <a:bodyPr anchorCtr="0" anchor="t" bIns="45700" lIns="91425" spcFirstLastPara="1" rIns="91425" wrap="square" tIns="45700">
+            <a:noAutofit/>
+          </a:bodyPr>
+          <a:lstStyle/>
+          <a:p>
+            <a:pPr indent="0" lvl="0" marL="0" marR="0" rtl="0" algn="l">
+              <a:spcBef>
+                <a:spcPts val="0"/>
+              </a:spcBef>
+              <a:spcAft>
+                <a:spcPts val="0"/>
+              </a:spcAft>
+              <a:buNone/>
+            </a:pPr>
+            <a:r>
+              <a:rPr lang="en-US" sz="1200">
+                <a:solidFill>
+                  <a:schemeClr val="dk1"/>
+                </a:solidFill>
+                <a:latin typeface="Arial"/>
+                <a:ea typeface="Arial"/>
+                <a:cs typeface="Arial"/>
+                <a:sym typeface="Arial"/>
+              </a:rPr>
+              <a:t>Facilitate, do not lecture. Take three or four answers per question and map each one onto the ladder out loud, so people hear their own use case become buildable. Close by pointing at the QR on the final slide: the site stays up, the prompts stay up, and the skill file is theirs to keep.</a:t>
+            </a:r>
+            <a:endParaRPr/>
+          </a:p>
+        </p:txBody>
+      </p:sp>
+      <p:sp>
+        <p:nvSpPr>
+          <p:cNvPr id="166" name="Google Shape;166;p12:notes"/>
+          <p:cNvSpPr txBox="1"/>
+          <p:nvPr>
+            <p:ph idx="12" type="sldNum"/>
+          </p:nvPr>
+        </p:nvSpPr>
+        <p:spPr>
+          <a:xfrm>
+            <a:off x="0" y="0"/>
+            <a:ext cx="3000000" cy="3000000"/>
+          </a:xfrm>
+          <a:prstGeom prst="rect">
+            <a:avLst/>
+          </a:prstGeom>
+          <a:noFill/>
+          <a:ln>
+            <a:noFill/>
+          </a:ln>
+        </p:spPr>
+        <p:txBody>
+          <a:bodyPr anchorCtr="0" anchor="t" bIns="45700" lIns="91425" spcFirstLastPara="1" rIns="91425" wrap="square" tIns="45700">
+            <a:noAutofit/>
+          </a:bodyPr>
+          <a:lstStyle/>
+          <a:p>
+            <a:pPr indent="0" lvl="0" marL="0" marR="0" rtl="0" algn="l">
+              <a:spcBef>
+                <a:spcPts val="0"/>
+              </a:spcBef>
+              <a:spcAft>
+                <a:spcPts val="0"/>
+              </a:spcAft>
+              <a:buNone/>
+            </a:pPr>
+            <a:fld id="{00000000-1234-1234-1234-123412341234}" type="slidenum">
+              <a:rPr lang="en-US" sz="1800">
+                <a:solidFill>
+                  <a:schemeClr val="dk1"/>
+                </a:solidFill>
+                <a:latin typeface="Arial"/>
+                <a:ea typeface="Arial"/>
+                <a:cs typeface="Arial"/>
+                <a:sym typeface="Arial"/>
+              </a:rPr>
+              <a:t>‹#›</a:t>
+            </a:fld>
+            <a:endParaRPr sz="1800">
+              <a:solidFill>
+                <a:schemeClr val="dk1"/>
               </a:solidFill>
               <a:latin typeface="Arial"/>
               <a:ea typeface="Arial"/>
@@ -2754,7 +3816,7 @@
                 <a:cs typeface="Arial"/>
                 <a:sym typeface="Arial"/>
               </a:rPr>
-              <a:t>This is the whole afternoon on one slide — interview her, brief her, hand her your playbook, give her the keys. Point at the site now (it’s the link from the prep email): four case files, same numbers, copy buttons everywhere. Nobody types anything longer than one sentence today.</a:t>
+              <a:t>Three case files now, one per rung of the ladder they just saw. Walk the arc on the eyebrow out loud: big picture until 2:50, build until 3:30, discussion until 4:00, done at 4:00 with a working Donna. Point at the site (the link from the prep email): same numbers, copy buttons everywhere. Nobody types anything longer than one sentence today.</a:t>
             </a:r>
             <a:endParaRPr/>
           </a:p>
@@ -3106,7 +4168,7 @@
                 <a:cs typeface="Arial"/>
                 <a:sym typeface="Arial"/>
               </a:rPr>
-              <a:t>Walk the room during connections — the classic failure is signing into the personal Google account instead of work. Connectors are pre-enabled workspace-wide, so all they click is Connect. Gmail people: also connect Google Calendar and Drive now (Step 4 needs both). Outlook people: Microsoft 365 covers mail, calendar, OneDrive in one go. Then prompt 1. Give it a beat — the room goes quiet when Claude answers from their real inbox.</a:t>
+              <a:t>Project FIRST, then connectors: the desk before the mail. Walk the room during connections; the classic failure is signing into the personal Google account instead of work. Everyone connects Gmail, Calendar, AND Drive now so nothing interrupts the finale. If a connector reads Connected but Claude cannot see mail: quit Claude fully and reopen it. The Setup prompt on this slide is the self-serve fallback for anyone stuck. STOP SIGN at the end of this case file: hold until every laptop passes the checkpoint.</a:t>
             </a:r>
             <a:endParaRPr/>
           </a:p>
@@ -4422,7 +5484,7 @@
                 <a:cs typeface="Consolas"/>
                 <a:sym typeface="Consolas"/>
               </a:rPr>
-              <a:t>WIFI: DonnaWorkshop</a:t>
+              <a:t>WIFI: [VENUE NETWORK]</a:t>
             </a:r>
             <a:endParaRPr b="1" i="0" sz="2000" u="none" cap="none" strike="noStrike">
               <a:solidFill>
@@ -4459,7 +5521,7 @@
                 <a:cs typeface="Consolas"/>
                 <a:sym typeface="Consolas"/>
               </a:rPr>
-              <a:t>Password: donnapaulsen</a:t>
+              <a:t>Password: [VENUE PASSWORD]</a:t>
             </a:r>
             <a:endParaRPr b="0" i="0" sz="2000" u="none" cap="none" strike="noStrike">
               <a:solidFill>
@@ -4671,7 +5733,7 @@
                 <a:cs typeface="Inter"/>
                 <a:sym typeface="Inter"/>
               </a:rPr>
-              <a:t>CASE FILE 02 · PROJECT — THE TRIAGE DESK</a:t>
+              <a:t>CASE FILE 02 · INSTRUCTIONS — THE TRIAGE DESK</a:t>
             </a:r>
             <a:endParaRPr sz="1200">
               <a:solidFill>
@@ -4857,7 +5919,7 @@
                 <a:cs typeface="Inter"/>
                 <a:sym typeface="Inter"/>
               </a:rPr>
-              <a:t>PROJECT INSTRUCTIONS — PASTE FROM THE SITE, FILL 3 BLANKS</a:t>
+              <a:t>PROJECT INSTRUCTIONS — PASTE FROM THE SITE, FILL 4 BLANKS</a:t>
             </a:r>
             <a:endParaRPr sz="950">
               <a:solidFill>
@@ -4923,17 +5985,8 @@
                 <a:cs typeface="Courier New"/>
                 <a:sym typeface="Courier New"/>
               </a:rPr>
-              <a:t>You are my inbox triage assistant. Whenever I ask you to triage:</a:t>
-            </a:r>
-            <a:endParaRPr sz="1150">
-              <a:solidFill>
-                <a:schemeClr val="dk1"/>
-              </a:solidFill>
-              <a:latin typeface="Calibri"/>
-              <a:ea typeface="Calibri"/>
-              <a:cs typeface="Calibri"/>
-              <a:sym typeface="Calibri"/>
-            </a:endParaRPr>
+              <a:t>You are Donna, my inbox triage assistant. When I say "triage my inbox":</a:t>
+            </a:r>
           </a:p>
           <a:p>
             <a:pPr indent="0" lvl="0" marL="0" marR="0" rtl="0" algn="l">
@@ -4963,17 +6016,8 @@
                 <a:cs typeface="Courier New"/>
                 <a:sym typeface="Courier New"/>
               </a:rPr>
-              <a:t>1. Review my inbox for the period I mention (default: last 24 hours).</a:t>
-            </a:r>
-            <a:endParaRPr sz="1150">
-              <a:solidFill>
-                <a:schemeClr val="dk1"/>
-              </a:solidFill>
-              <a:latin typeface="Calibri"/>
-              <a:ea typeface="Calibri"/>
-              <a:cs typeface="Calibri"/>
-              <a:sym typeface="Calibri"/>
-            </a:endParaRPr>
+              <a:t>1. Review my inbox (default: the last 24 hours).</a:t>
+            </a:r>
           </a:p>
           <a:p>
             <a:pPr indent="0" lvl="0" marL="0" marR="0" rtl="0" algn="l">
@@ -5003,17 +6047,8 @@
                 <a:cs typeface="Courier New"/>
                 <a:sym typeface="Courier New"/>
               </a:rPr>
-              <a:t>2. Sort every thread into: 🔴 NEEDS ME TODAY · 🟡 DELEGATE · 🔵 FYI · ⚪ IGNORE</a:t>
-            </a:r>
-            <a:endParaRPr sz="1150">
-              <a:solidFill>
-                <a:schemeClr val="dk1"/>
-              </a:solidFill>
-              <a:latin typeface="Calibri"/>
-              <a:ea typeface="Calibri"/>
-              <a:cs typeface="Calibri"/>
-              <a:sym typeface="Calibri"/>
-            </a:endParaRPr>
+              <a:t>2. Sort every thread into exactly three buckets:</a:t>
+            </a:r>
           </a:p>
           <a:p>
             <a:pPr indent="0" lvl="0" marL="0" marR="0" rtl="0" algn="l">
@@ -5043,17 +6078,8 @@
                 <a:cs typeface="Courier New"/>
                 <a:sym typeface="Courier New"/>
               </a:rPr>
-              <a:t>   - These people are ALWAYS 🔴 unless pure FYI: </a:t>
-            </a:r>
-            <a:endParaRPr sz="1150">
-              <a:solidFill>
-                <a:schemeClr val="dk1"/>
-              </a:solidFill>
-              <a:latin typeface="Calibri"/>
-              <a:ea typeface="Calibri"/>
-              <a:cs typeface="Calibri"/>
-              <a:sym typeface="Calibri"/>
-            </a:endParaRPr>
+              <a:t>   🔴 RED, NEEDS ME · my VIPs, plus my #1 project:</a:t>
+            </a:r>
           </a:p>
           <a:p>
             <a:pPr indent="0" lvl="0" marL="0" marR="0" rtl="0" algn="l">
@@ -5083,17 +6109,8 @@
                 <a:cs typeface="Courier New"/>
                 <a:sym typeface="Courier New"/>
               </a:rPr>
-              <a:t>[ADD 3–5 NAMES + EMAILS]</a:t>
-            </a:r>
-            <a:endParaRPr sz="1150">
-              <a:solidFill>
-                <a:schemeClr val="dk1"/>
-              </a:solidFill>
-              <a:latin typeface="Calibri"/>
-              <a:ea typeface="Calibri"/>
-              <a:cs typeface="Calibri"/>
-              <a:sym typeface="Calibri"/>
-            </a:endParaRPr>
+              <a:t>   [ADD 3-5 NAMES + EMAILS] · [ADD YOUR #1 PROJECT OR DEAL]</a:t>
+            </a:r>
           </a:p>
           <a:p>
             <a:pPr indent="0" lvl="0" marL="0" marR="0" rtl="0" algn="l">
@@ -5123,17 +6140,8 @@
                 <a:cs typeface="Courier New"/>
                 <a:sym typeface="Courier New"/>
               </a:rPr>
-              <a:t>   - Newsletters, cold outreach, automated notices → ⚪</a:t>
-            </a:r>
-            <a:endParaRPr sz="1150">
-              <a:solidFill>
-                <a:schemeClr val="dk1"/>
-              </a:solidFill>
-              <a:latin typeface="Calibri"/>
-              <a:ea typeface="Calibri"/>
-              <a:cs typeface="Calibri"/>
-              <a:sym typeface="Calibri"/>
-            </a:endParaRPr>
+              <a:t>   🟡 YELLOW, DELEGATE · work my team owns:</a:t>
+            </a:r>
           </a:p>
           <a:p>
             <a:pPr indent="0" lvl="0" marL="0" marR="0" rtl="0" algn="l">
@@ -5163,17 +6171,8 @@
                 <a:cs typeface="Courier New"/>
                 <a:sym typeface="Courier New"/>
               </a:rPr>
-              <a:t>   - Anything about </a:t>
-            </a:r>
-            <a:endParaRPr sz="1150">
-              <a:solidFill>
-                <a:schemeClr val="dk1"/>
-              </a:solidFill>
-              <a:latin typeface="Calibri"/>
-              <a:ea typeface="Calibri"/>
-              <a:cs typeface="Calibri"/>
-              <a:sym typeface="Calibri"/>
-            </a:endParaRPr>
+              <a:t>   [ADD 1-3 DELEGATES + WHAT EACH OWNS, e.g. “Sam: billing”]</a:t>
+            </a:r>
           </a:p>
           <a:p>
             <a:pPr indent="0" lvl="0" marL="0" marR="0" rtl="0" algn="l">
@@ -5203,8 +6202,27 @@
                 <a:cs typeface="Courier New"/>
                 <a:sym typeface="Courier New"/>
               </a:rPr>
-              <a:t>[ADD YOUR #1 PROJECT OR DEAL]</a:t>
-            </a:r>
+              <a:t>   ⚪ GRAY, IGNORE · newsletters, cold outreach, automated notices.</a:t>
+            </a:r>
+          </a:p>
+          <a:p>
+            <a:pPr indent="0" lvl="0" marL="0" marR="0" rtl="0" algn="l">
+              <a:lnSpc>
+                <a:spcPct val="122000"/>
+              </a:lnSpc>
+              <a:spcBef>
+                <a:spcPts val="0"/>
+              </a:spcBef>
+              <a:spcAft>
+                <a:spcPts val="0"/>
+              </a:spcAft>
+              <a:buClr>
+                <a:srgbClr val="F7F3E9"/>
+              </a:buClr>
+              <a:buSzPts val="1150"/>
+              <a:buFont typeface="Courier New"/>
+              <a:buNone/>
+            </a:pPr>
             <a:r>
               <a:rPr lang="en-US" sz="1150">
                 <a:solidFill>
@@ -5215,17 +6233,8 @@
                 <a:cs typeface="Courier New"/>
                 <a:sym typeface="Courier New"/>
               </a:rPr>
-              <a:t> → 🔴</a:t>
-            </a:r>
-            <a:endParaRPr sz="1150">
-              <a:solidFill>
-                <a:schemeClr val="dk1"/>
-              </a:solidFill>
-              <a:latin typeface="Calibri"/>
-              <a:ea typeface="Calibri"/>
-              <a:cs typeface="Calibri"/>
-              <a:sym typeface="Calibri"/>
-            </a:endParaRPr>
+              <a:t>3. Show me ONE table: sender · subject · bucket · why · next move.</a:t>
+            </a:r>
           </a:p>
           <a:p>
             <a:pPr indent="0" lvl="0" marL="0" marR="0" rtl="0" algn="l">
@@ -5255,17 +6264,8 @@
                 <a:cs typeface="Courier New"/>
                 <a:sym typeface="Courier New"/>
               </a:rPr>
-              <a:t>3. Give me ONE table: sender · subject · category · one-line why ·</a:t>
-            </a:r>
-            <a:endParaRPr sz="1150">
-              <a:solidFill>
-                <a:schemeClr val="dk1"/>
-              </a:solidFill>
-              <a:latin typeface="Calibri"/>
-              <a:ea typeface="Calibri"/>
-              <a:cs typeface="Calibri"/>
-              <a:sym typeface="Calibri"/>
-            </a:endParaRPr>
+              <a:t>4. Draft replies for REDs (my voice: [ADD 3 WORDS]) and handoff</a:t>
+            </a:r>
           </a:p>
           <a:p>
             <a:pPr indent="0" lvl="0" marL="0" marR="0" rtl="0" algn="l">
@@ -5295,17 +6295,8 @@
                 <a:cs typeface="Courier New"/>
                 <a:sym typeface="Courier New"/>
               </a:rPr>
-              <a:t>   suggested action.</a:t>
-            </a:r>
-            <a:endParaRPr sz="1150">
-              <a:solidFill>
-                <a:schemeClr val="dk1"/>
-              </a:solidFill>
-              <a:latin typeface="Calibri"/>
-              <a:ea typeface="Calibri"/>
-              <a:cs typeface="Calibri"/>
-              <a:sym typeface="Calibri"/>
-            </a:endParaRPr>
+              <a:t>   notes for YELLOWs. Save everything to my Drafts.</a:t>
+            </a:r>
           </a:p>
           <a:p>
             <a:pPr indent="0" lvl="0" marL="0" marR="0" rtl="0" algn="l">
@@ -5319,125 +6310,24 @@
                 <a:spcPts val="0"/>
               </a:spcAft>
               <a:buClr>
-                <a:srgbClr val="F7F3E9"/>
+                <a:srgbClr val="DDB94A"/>
               </a:buClr>
               <a:buSzPts val="1150"/>
               <a:buFont typeface="Courier New"/>
               <a:buNone/>
             </a:pPr>
             <a:r>
-              <a:rPr lang="en-US" sz="1150">
-                <a:solidFill>
-                  <a:srgbClr val="F7F3E9"/>
+              <a:rPr b="1" lang="en-US" sz="1150">
+                <a:solidFill>
+                  <a:srgbClr val="DDB94A"/>
                 </a:solidFill>
                 <a:latin typeface="Courier New"/>
                 <a:ea typeface="Courier New"/>
                 <a:cs typeface="Courier New"/>
                 <a:sym typeface="Courier New"/>
               </a:rPr>
-              <a:t>4. Offer to draft replies for the 🔴 rows. My voice: </a:t>
-            </a:r>
-            <a:endParaRPr sz="1150">
-              <a:solidFill>
-                <a:schemeClr val="dk1"/>
-              </a:solidFill>
-              <a:latin typeface="Calibri"/>
-              <a:ea typeface="Calibri"/>
-              <a:cs typeface="Calibri"/>
-              <a:sym typeface="Calibri"/>
-            </a:endParaRPr>
-          </a:p>
-          <a:p>
-            <a:pPr indent="0" lvl="0" marL="0" marR="0" rtl="0" algn="l">
-              <a:lnSpc>
-                <a:spcPct val="122000"/>
-              </a:lnSpc>
-              <a:spcBef>
-                <a:spcPts val="0"/>
-              </a:spcBef>
-              <a:spcAft>
-                <a:spcPts val="0"/>
-              </a:spcAft>
-              <a:buClr>
-                <a:srgbClr val="DDB94A"/>
-              </a:buClr>
-              <a:buSzPts val="1150"/>
-              <a:buFont typeface="Courier New"/>
-              <a:buNone/>
-            </a:pPr>
-            <a:r>
-              <a:rPr b="1" lang="en-US" sz="1150">
-                <a:solidFill>
-                  <a:srgbClr val="DDB94A"/>
-                </a:solidFill>
-                <a:latin typeface="Courier New"/>
-                <a:ea typeface="Courier New"/>
-                <a:cs typeface="Courier New"/>
-                <a:sym typeface="Courier New"/>
-              </a:rPr>
-              <a:t>[ADD 3 WORDS]</a:t>
-            </a:r>
-            <a:r>
-              <a:rPr lang="en-US" sz="1150">
-                <a:solidFill>
-                  <a:srgbClr val="F7F3E9"/>
-                </a:solidFill>
-                <a:latin typeface="Courier New"/>
-                <a:ea typeface="Courier New"/>
-                <a:cs typeface="Courier New"/>
-                <a:sym typeface="Courier New"/>
-              </a:rPr>
-              <a:t>.</a:t>
-            </a:r>
-            <a:endParaRPr sz="1150">
-              <a:solidFill>
-                <a:schemeClr val="dk1"/>
-              </a:solidFill>
-              <a:latin typeface="Calibri"/>
-              <a:ea typeface="Calibri"/>
-              <a:cs typeface="Calibri"/>
-              <a:sym typeface="Calibri"/>
-            </a:endParaRPr>
-          </a:p>
-          <a:p>
-            <a:pPr indent="0" lvl="0" marL="0" marR="0" rtl="0" algn="l">
-              <a:lnSpc>
-                <a:spcPct val="122000"/>
-              </a:lnSpc>
-              <a:spcBef>
-                <a:spcPts val="0"/>
-              </a:spcBef>
-              <a:spcAft>
-                <a:spcPts val="0"/>
-              </a:spcAft>
-              <a:buClr>
-                <a:srgbClr val="F7F3E9"/>
-              </a:buClr>
-              <a:buSzPts val="1150"/>
-              <a:buFont typeface="Courier New"/>
-              <a:buNone/>
-            </a:pPr>
-            <a:r>
-              <a:rPr lang="en-US" sz="1150">
-                <a:solidFill>
-                  <a:srgbClr val="F7F3E9"/>
-                </a:solidFill>
-                <a:latin typeface="Courier New"/>
-                <a:ea typeface="Courier New"/>
-                <a:cs typeface="Courier New"/>
-                <a:sym typeface="Courier New"/>
-              </a:rPr>
-              <a:t>Never send anything.</a:t>
-            </a:r>
-            <a:endParaRPr sz="1150">
-              <a:solidFill>
-                <a:schemeClr val="dk1"/>
-              </a:solidFill>
-              <a:latin typeface="Calibri"/>
-              <a:ea typeface="Calibri"/>
-              <a:cs typeface="Calibri"/>
-              <a:sym typeface="Calibri"/>
-            </a:endParaRPr>
+              <a:t>Never send anything. Never delete anything. Drafts only.</a:t>
+            </a:r>
           </a:p>
         </p:txBody>
       </p:sp>
@@ -5493,7 +6383,7 @@
                 <a:cs typeface="Inter"/>
                 <a:sym typeface="Inter"/>
               </a:rPr>
-              <a:t>The three blanks are the only editing you do:</a:t>
+              <a:t>The four blanks are the only editing you do:</a:t>
             </a:r>
             <a:endParaRPr sz="1400">
               <a:solidFill>
@@ -5610,9 +6500,28 @@
                 <a:cs typeface="Playfair Display"/>
                 <a:sym typeface="Playfair Display"/>
               </a:rPr>
-              <a:t>Your always-red list</a:t>
-            </a:r>
-            <a:br>
+              <a:t>Your always-red list + #1 deal</a:t>
+            </a:r>
+          </a:p>
+          <a:p>
+            <a:pPr indent="0" lvl="0" marL="0" marR="0" rtl="0" algn="l">
+              <a:lnSpc>
+                <a:spcPct val="112000"/>
+              </a:lnSpc>
+              <a:spcBef>
+                <a:spcPts val="0"/>
+              </a:spcBef>
+              <a:spcAft>
+                <a:spcPts val="0"/>
+              </a:spcAft>
+              <a:buClr>
+                <a:srgbClr val="14213D"/>
+              </a:buClr>
+              <a:buSzPts val="1500"/>
+              <a:buFont typeface="Playfair Display"/>
+              <a:buNone/>
+            </a:pPr>
+            <a:r>
               <a:rPr b="1" lang="en-US" sz="1800">
                 <a:solidFill>
                   <a:srgbClr val="14213D"/>
@@ -5622,28 +6531,8 @@
                 <a:cs typeface="Playfair Display"/>
                 <a:sym typeface="Playfair Display"/>
               </a:rPr>
-            </a:br>
-            <a:r>
-              <a:rPr lang="en-US" sz="1500">
-                <a:solidFill>
-                  <a:srgbClr val="5A6379"/>
-                </a:solidFill>
-                <a:latin typeface="Inter"/>
-                <a:ea typeface="Inter"/>
-                <a:cs typeface="Inter"/>
-                <a:sym typeface="Inter"/>
-              </a:rPr>
-              <a:t>the 3–5 people whose email always needs you</a:t>
-            </a:r>
-            <a:endParaRPr sz="1800">
-              <a:solidFill>
-                <a:schemeClr val="dk1"/>
-              </a:solidFill>
-              <a:latin typeface="Calibri"/>
-              <a:ea typeface="Calibri"/>
-              <a:cs typeface="Calibri"/>
-              <a:sym typeface="Calibri"/>
-            </a:endParaRPr>
+              <a:t>the people and the deal that jump every queue</a:t>
+            </a:r>
           </a:p>
         </p:txBody>
       </p:sp>
@@ -5699,9 +6588,28 @@
                 <a:cs typeface="Playfair Display"/>
                 <a:sym typeface="Playfair Display"/>
               </a:rPr>
-              <a:t>Your #1 deal</a:t>
-            </a:r>
-            <a:br>
+              <a:t>Your delegates and their lanes</a:t>
+            </a:r>
+          </a:p>
+          <a:p>
+            <a:pPr indent="0" lvl="0" marL="0" marR="0" rtl="0" algn="l">
+              <a:lnSpc>
+                <a:spcPct val="112000"/>
+              </a:lnSpc>
+              <a:spcBef>
+                <a:spcPts val="0"/>
+              </a:spcBef>
+              <a:spcAft>
+                <a:spcPts val="0"/>
+              </a:spcAft>
+              <a:buClr>
+                <a:srgbClr val="14213D"/>
+              </a:buClr>
+              <a:buSzPts val="1500"/>
+              <a:buFont typeface="Playfair Display"/>
+              <a:buNone/>
+            </a:pPr>
+            <a:r>
               <a:rPr b="1" lang="en-US" sz="1800">
                 <a:solidFill>
                   <a:srgbClr val="14213D"/>
@@ -5711,28 +6619,8 @@
                 <a:cs typeface="Playfair Display"/>
                 <a:sym typeface="Playfair Display"/>
               </a:rPr>
-            </a:br>
-            <a:r>
-              <a:rPr lang="en-US" sz="1500">
-                <a:solidFill>
-                  <a:srgbClr val="5A6379"/>
-                </a:solidFill>
-                <a:latin typeface="Inter"/>
-                <a:ea typeface="Inter"/>
-                <a:cs typeface="Inter"/>
-                <a:sym typeface="Inter"/>
-              </a:rPr>
-              <a:t>the thing that jumps every queue right now</a:t>
-            </a:r>
-            <a:endParaRPr sz="1800">
-              <a:solidFill>
-                <a:schemeClr val="dk1"/>
-              </a:solidFill>
-              <a:latin typeface="Calibri"/>
-              <a:ea typeface="Calibri"/>
-              <a:cs typeface="Calibri"/>
-              <a:sym typeface="Calibri"/>
-            </a:endParaRPr>
+              <a:t>1-3 people and what each owns: “Sam: billing”</a:t>
+            </a:r>
           </a:p>
         </p:txBody>
       </p:sp>
@@ -5790,7 +6678,26 @@
               </a:rPr>
               <a:t>Your voice, in 3 words</a:t>
             </a:r>
-            <a:br>
+          </a:p>
+          <a:p>
+            <a:pPr indent="0" lvl="0" marL="0" marR="0" rtl="0" algn="l">
+              <a:lnSpc>
+                <a:spcPct val="112000"/>
+              </a:lnSpc>
+              <a:spcBef>
+                <a:spcPts val="0"/>
+              </a:spcBef>
+              <a:spcAft>
+                <a:spcPts val="0"/>
+              </a:spcAft>
+              <a:buClr>
+                <a:srgbClr val="14213D"/>
+              </a:buClr>
+              <a:buSzPts val="1500"/>
+              <a:buFont typeface="Playfair Display"/>
+              <a:buNone/>
+            </a:pPr>
+            <a:r>
               <a:rPr b="1" lang="en-US" sz="1800">
                 <a:solidFill>
                   <a:srgbClr val="14213D"/>
@@ -5800,28 +6707,8 @@
                 <a:cs typeface="Playfair Display"/>
                 <a:sym typeface="Playfair Display"/>
               </a:rPr>
-            </a:br>
-            <a:r>
-              <a:rPr lang="en-US" sz="1500">
-                <a:solidFill>
-                  <a:srgbClr val="5A6379"/>
-                </a:solidFill>
-                <a:latin typeface="Inter"/>
-                <a:ea typeface="Inter"/>
-                <a:cs typeface="Inter"/>
-                <a:sym typeface="Inter"/>
-              </a:rPr>
               <a:t>warm, brief, decisive is a fine start</a:t>
             </a:r>
-            <a:endParaRPr sz="1800">
-              <a:solidFill>
-                <a:schemeClr val="dk1"/>
-              </a:solidFill>
-              <a:latin typeface="Calibri"/>
-              <a:ea typeface="Calibri"/>
-              <a:cs typeface="Calibri"/>
-              <a:sym typeface="Calibri"/>
-            </a:endParaRPr>
           </a:p>
         </p:txBody>
       </p:sp>
@@ -6539,7 +7426,7 @@
                 <a:cs typeface="Inter"/>
                 <a:sym typeface="Inter"/>
               </a:rPr>
-              <a:t>CASE FILE 03 · SKILL — DONNA’S PLAYBOOK</a:t>
+              <a:t>CASE FILE 03 · SKILL + SCHEDULE — DONNA, FULL TIME</a:t>
             </a:r>
             <a:endParaRPr sz="1200">
               <a:solidFill>
@@ -6602,7 +7489,7 @@
                 <a:cs typeface="Playfair Display"/>
                 <a:sym typeface="Playfair Display"/>
               </a:rPr>
-              <a:t>One paste. She does the rest.</a:t>
+              <a:t>She writes her own playbook. You hand it to Cowork.</a:t>
             </a:r>
             <a:endParaRPr sz="3200">
               <a:solidFill>
@@ -6725,7 +7612,7 @@
                 <a:cs typeface="Inter"/>
                 <a:sym typeface="Inter"/>
               </a:rPr>
-              <a:t>THE INSTALLER — ONE PASTE</a:t>
+              <a:t>THE PLAYBOOK — PASTE INSIDE YOUR DONNA PROJECT</a:t>
             </a:r>
             <a:endParaRPr sz="1000">
               <a:solidFill>
@@ -6791,17 +7678,8 @@
                 <a:cs typeface="Courier New"/>
                 <a:sym typeface="Courier New"/>
               </a:rPr>
-              <a:t>Fetch https://denisekgosnell.github.io/Donna/skills/donna-replies/SKILL.md</a:t>
-            </a:r>
-            <a:endParaRPr sz="1350">
-              <a:solidFill>
-                <a:schemeClr val="dk1"/>
-              </a:solidFill>
-              <a:latin typeface="Calibri"/>
-              <a:ea typeface="Calibri"/>
-              <a:cs typeface="Calibri"/>
-              <a:sym typeface="Calibri"/>
-            </a:endParaRPr>
+              <a:t>Turn this project’s triage instructions into a reusable skill file</a:t>
+            </a:r>
           </a:p>
           <a:p>
             <a:pPr indent="0" lvl="0" marL="0" marR="0" rtl="0" algn="l">
@@ -6831,17 +7709,8 @@
                 <a:cs typeface="Courier New"/>
                 <a:sym typeface="Courier New"/>
               </a:rPr>
-              <a:t>and install it for me as a skill named donna-replies.</a:t>
-            </a:r>
-            <a:endParaRPr sz="1350">
-              <a:solidFill>
-                <a:schemeClr val="dk1"/>
-              </a:solidFill>
-              <a:latin typeface="Calibri"/>
-              <a:ea typeface="Calibri"/>
-              <a:cs typeface="Calibri"/>
-              <a:sym typeface="Calibri"/>
-            </a:endParaRPr>
+              <a:t>called donna-replies, modeled on the template at</a:t>
+            </a:r>
           </a:p>
           <a:p>
             <a:pPr indent="0" lvl="0" marL="0" marR="0" rtl="0" algn="l">
@@ -6871,17 +7740,8 @@
                 <a:cs typeface="Courier New"/>
                 <a:sym typeface="Courier New"/>
               </a:rPr>
-              <a:t>Then interview me, one question at a time, to replace every {{PLACEHOLDER}}:</a:t>
-            </a:r>
-            <a:endParaRPr sz="1350">
-              <a:solidFill>
-                <a:schemeClr val="dk1"/>
-              </a:solidFill>
-              <a:latin typeface="Calibri"/>
-              <a:ea typeface="Calibri"/>
-              <a:cs typeface="Calibri"/>
-              <a:sym typeface="Calibri"/>
-            </a:endParaRPr>
+              <a:t>denisekgosnell.github.io/Donna/skills/donna-replies/SKILL.md</a:t>
+            </a:r>
           </a:p>
           <a:p>
             <a:pPr indent="0" lvl="0" marL="0" marR="0" rtl="0" algn="l">
@@ -6911,17 +7771,8 @@
                 <a:cs typeface="Courier New"/>
                 <a:sym typeface="Courier New"/>
               </a:rPr>
-              <a:t>my VIP list, my voice, my reply rules.</a:t>
-            </a:r>
-            <a:endParaRPr sz="1350">
-              <a:solidFill>
-                <a:schemeClr val="dk1"/>
-              </a:solidFill>
-              <a:latin typeface="Calibri"/>
-              <a:ea typeface="Calibri"/>
-              <a:cs typeface="Calibri"/>
-              <a:sym typeface="Calibri"/>
-            </a:endParaRPr>
+              <a:t>Fill in every placeholder with what you already know from this project.</a:t>
+            </a:r>
           </a:p>
           <a:p>
             <a:pPr indent="0" lvl="0" marL="0" marR="0" rtl="0" algn="l">
@@ -6951,17 +7802,8 @@
                 <a:cs typeface="Courier New"/>
                 <a:sym typeface="Courier New"/>
               </a:rPr>
-              <a:t>When it’s active, tell me the one sentence I say to use it.</a:t>
-            </a:r>
-            <a:endParaRPr sz="1350">
-              <a:solidFill>
-                <a:schemeClr val="dk1"/>
-              </a:solidFill>
-              <a:latin typeface="Calibri"/>
-              <a:ea typeface="Calibri"/>
-              <a:cs typeface="Calibri"/>
-              <a:sym typeface="Calibri"/>
-            </a:endParaRPr>
+              <a:t>Then give me the finished SKILL.md as a file I can download.</a:t>
+            </a:r>
           </a:p>
         </p:txBody>
       </p:sp>
@@ -7014,17 +7856,8 @@
                 <a:cs typeface="Inter"/>
                 <a:sym typeface="Inter"/>
               </a:rPr>
-              <a:t>She fetches her own playbook, installs it, then interviews you for the blanks — VIPs, voice, rules.</a:t>
-            </a:r>
-            <a:endParaRPr sz="1400">
-              <a:solidFill>
-                <a:schemeClr val="dk1"/>
-              </a:solidFill>
-              <a:latin typeface="Calibri"/>
-              <a:ea typeface="Calibri"/>
-              <a:cs typeface="Calibri"/>
-              <a:sym typeface="Calibri"/>
-            </a:endParaRPr>
+              <a:t>Then the hand-off: DOWNLOAD the file she gives you. Open Cowork → Skills → Add skill → UPLOAD that SKILL.md.</a:t>
+            </a:r>
           </a:p>
         </p:txBody>
       </p:sp>
@@ -7077,29 +7910,8 @@
                 <a:cs typeface="Inter"/>
                 <a:sym typeface="Inter"/>
               </a:rPr>
-              <a:t>Test drive:  </a:t>
-            </a:r>
-            <a:r>
-              <a:rPr lang="en-US" sz="1400">
-                <a:solidFill>
-                  <a:srgbClr val="F7F3E9"/>
-                </a:solidFill>
-                <a:latin typeface="Courier New"/>
-                <a:ea typeface="Courier New"/>
-                <a:cs typeface="Courier New"/>
-                <a:sym typeface="Courier New"/>
-              </a:rPr>
-              <a:t>Use donna-replies on my inbox.</a:t>
-            </a:r>
-            <a:endParaRPr sz="1400">
-              <a:solidFill>
-                <a:schemeClr val="dk1"/>
-              </a:solidFill>
-              <a:latin typeface="Calibri"/>
-              <a:ea typeface="Calibri"/>
-              <a:cs typeface="Calibri"/>
-              <a:sym typeface="Calibri"/>
-            </a:endParaRPr>
+              <a:t>You should see: donna-replies in your Cowork skills list.</a:t>
+            </a:r>
           </a:p>
         </p:txBody>
       </p:sp>
@@ -7293,17 +8105,8 @@
                 <a:cs typeface="Inter"/>
                 <a:sym typeface="Inter"/>
               </a:rPr>
-              <a:t>Every reply lands in your drafts folder and waits for your say-so.</a:t>
-            </a:r>
-            <a:endParaRPr sz="1600">
-              <a:solidFill>
-                <a:schemeClr val="dk1"/>
-              </a:solidFill>
-              <a:latin typeface="Calibri"/>
-              <a:ea typeface="Calibri"/>
-              <a:cs typeface="Calibri"/>
-              <a:sym typeface="Calibri"/>
-            </a:endParaRPr>
+              <a:t>Every reply and every handoff note lands in your Drafts and waits for your say-so. She never deletes anything, either.</a:t>
+            </a:r>
           </a:p>
           <a:p>
             <a:pPr indent="0" lvl="0" marL="0" marR="0" rtl="0" algn="ctr">
@@ -7333,17 +8136,8 @@
                 <a:cs typeface="Inter"/>
                 <a:sym typeface="Inter"/>
               </a:rPr>
-              <a:t>The rule is written into the skill itself: “Save every reply as a DRAFT. Never send. No exceptions.”</a:t>
-            </a:r>
-            <a:endParaRPr sz="1600">
-              <a:solidFill>
-                <a:schemeClr val="dk1"/>
-              </a:solidFill>
-              <a:latin typeface="Calibri"/>
-              <a:ea typeface="Calibri"/>
-              <a:cs typeface="Calibri"/>
-              <a:sym typeface="Calibri"/>
-            </a:endParaRPr>
+              <a:t>Written into the skill itself: “Never send. Never delete. No exceptions.”</a:t>
+            </a:r>
           </a:p>
         </p:txBody>
       </p:sp>
@@ -7479,7 +8273,7 @@
                 <a:cs typeface="Inter"/>
                 <a:sym typeface="Inter"/>
               </a:rPr>
-              <a:t>CASE FILE 04 · AGENT — DONNA, FULL TIME</a:t>
+              <a:t>CASE FILE 03 · SKILL + SCHEDULE — DONNA, FULL TIME</a:t>
             </a:r>
             <a:endParaRPr sz="1200">
               <a:solidFill>
@@ -7665,7 +8459,7 @@
                 <a:cs typeface="Inter"/>
                 <a:sym typeface="Inter"/>
               </a:rPr>
-              <a:t>THE STANDING ORDER — SCHEDULED TASKS → NEW TASK</a:t>
+              <a:t>THE STANDING ORDER — COWORK → SCHEDULED TASKS → NEW TASK</a:t>
             </a:r>
             <a:endParaRPr sz="1700">
               <a:solidFill>
@@ -7731,17 +8525,8 @@
                 <a:cs typeface="Courier New"/>
                 <a:sym typeface="Courier New"/>
               </a:rPr>
-              <a:t>Every weekday at 2:24 PM:</a:t>
-            </a:r>
-            <a:endParaRPr>
-              <a:solidFill>
-                <a:schemeClr val="dk1"/>
-              </a:solidFill>
-              <a:latin typeface="Calibri"/>
-              <a:ea typeface="Calibri"/>
-              <a:cs typeface="Calibri"/>
-              <a:sym typeface="Calibri"/>
-            </a:endParaRPr>
+              <a:t>Every weekday at 4:30 PM, use my donna-replies skill:</a:t>
+            </a:r>
           </a:p>
           <a:p>
             <a:pPr indent="0" lvl="0" marL="0" marR="0" rtl="0" algn="l">
@@ -7771,17 +8556,8 @@
                 <a:cs typeface="Courier New"/>
                 <a:sym typeface="Courier New"/>
               </a:rPr>
-              <a:t>1. Run my donna-replies skill on today’s inbox.</a:t>
-            </a:r>
-            <a:endParaRPr>
-              <a:solidFill>
-                <a:schemeClr val="dk1"/>
-              </a:solidFill>
-              <a:latin typeface="Calibri"/>
-              <a:ea typeface="Calibri"/>
-              <a:cs typeface="Calibri"/>
-              <a:sym typeface="Calibri"/>
-            </a:endParaRPr>
+              <a:t>1. Triage today’s inbox; save red replies + yellow handoffs to my Drafts.</a:t>
+            </a:r>
           </a:p>
           <a:p>
             <a:pPr indent="0" lvl="0" marL="0" marR="0" rtl="0" algn="l">
@@ -7811,17 +8587,8 @@
                 <a:cs typeface="Courier New"/>
                 <a:sym typeface="Courier New"/>
               </a:rPr>
-              <a:t>2. Write my Daily Briefing as a document titled "Daily Briefing — [today’s date]":</a:t>
-            </a:r>
-            <a:endParaRPr>
-              <a:solidFill>
-                <a:schemeClr val="dk1"/>
-              </a:solidFill>
-              <a:latin typeface="Calibri"/>
-              <a:ea typeface="Calibri"/>
-              <a:cs typeface="Calibri"/>
-              <a:sym typeface="Calibri"/>
-            </a:endParaRPr>
+              <a:t>2. Write my Daily Briefing doc, "Daily Briefing: [today’s date]":</a:t>
+            </a:r>
           </a:p>
           <a:p>
             <a:pPr indent="0" lvl="0" marL="0" marR="0" rtl="0" algn="l">
@@ -7851,17 +8618,8 @@
                 <a:cs typeface="Courier New"/>
                 <a:sym typeface="Courier New"/>
               </a:rPr>
-              <a:t>   • the 5 things in my inbox that need ME  • the replies you drafted today</a:t>
-            </a:r>
-            <a:endParaRPr>
-              <a:solidFill>
-                <a:schemeClr val="dk1"/>
-              </a:solidFill>
-              <a:latin typeface="Calibri"/>
-              <a:ea typeface="Calibri"/>
-              <a:cs typeface="Calibri"/>
-              <a:sym typeface="Calibri"/>
-            </a:endParaRPr>
+              <a:t>   • the 5 things that need ME   • the replies you drafted</a:t>
+            </a:r>
           </a:p>
           <a:p>
             <a:pPr indent="0" lvl="0" marL="0" marR="0" rtl="0" algn="l">
@@ -7891,17 +8649,8 @@
                 <a:cs typeface="Courier New"/>
                 <a:sym typeface="Courier New"/>
               </a:rPr>
-              <a:t>   • what you ignored and why  • my first meeting tomorrow</a:t>
-            </a:r>
-            <a:endParaRPr>
-              <a:solidFill>
-                <a:schemeClr val="dk1"/>
-              </a:solidFill>
-              <a:latin typeface="Calibri"/>
-              <a:ea typeface="Calibri"/>
-              <a:cs typeface="Calibri"/>
-              <a:sym typeface="Calibri"/>
-            </a:endParaRPr>
+              <a:t>   • what you ignored and why   • my first meeting tomorrow</a:t>
+            </a:r>
           </a:p>
           <a:p>
             <a:pPr indent="0" lvl="0" marL="0" marR="0" rtl="0" algn="l">
@@ -7931,17 +8680,8 @@
                 <a:cs typeface="Courier New"/>
                 <a:sym typeface="Courier New"/>
               </a:rPr>
-              <a:t>3. Save it to my Google Drive / OneDrive in a folder called "Donna Briefings".</a:t>
-            </a:r>
-            <a:endParaRPr>
-              <a:solidFill>
-                <a:schemeClr val="dk1"/>
-              </a:solidFill>
-              <a:latin typeface="Calibri"/>
-              <a:ea typeface="Calibri"/>
-              <a:cs typeface="Calibri"/>
-              <a:sym typeface="Calibri"/>
-            </a:endParaRPr>
+              <a:t>3. Save it to my Google Drive in a folder called "Donna Briefings".</a:t>
+            </a:r>
           </a:p>
           <a:p>
             <a:pPr indent="0" lvl="0" marL="0" marR="0" rtl="0" algn="l">
@@ -7971,17 +8711,8 @@
                 <a:cs typeface="Courier New"/>
                 <a:sym typeface="Courier New"/>
               </a:rPr>
-              <a:t>4. Create a calendar event today, 4:55–5:00 PM, called "📋 Briefing with Donna",</a:t>
-            </a:r>
-            <a:endParaRPr>
-              <a:solidFill>
-                <a:schemeClr val="dk1"/>
-              </a:solidFill>
-              <a:latin typeface="Calibri"/>
-              <a:ea typeface="Calibri"/>
-              <a:cs typeface="Calibri"/>
-              <a:sym typeface="Calibri"/>
-            </a:endParaRPr>
+              <a:t>4. Create a calendar event today, 4:55-5:00 PM, "📋 Briefing with</a:t>
+            </a:r>
           </a:p>
           <a:p>
             <a:pPr indent="0" lvl="0" marL="0" marR="0" rtl="0" algn="l">
@@ -8011,17 +8742,8 @@
                 <a:cs typeface="Courier New"/>
                 <a:sym typeface="Courier New"/>
               </a:rPr>
-              <a:t>   with the document link in the description and an EMAIL reminder 1 minute</a:t>
-            </a:r>
-            <a:endParaRPr>
-              <a:solidFill>
-                <a:schemeClr val="dk1"/>
-              </a:solidFill>
-              <a:latin typeface="Calibri"/>
-              <a:ea typeface="Calibri"/>
-              <a:cs typeface="Calibri"/>
-              <a:sym typeface="Calibri"/>
-            </a:endParaRPr>
+              <a:t>   Donna", doc link in the description, EMAIL reminder 1 minute before.</a:t>
+            </a:r>
           </a:p>
           <a:p>
             <a:pPr indent="0" lvl="0" marL="0" marR="0" rtl="0" algn="l">
@@ -8051,57 +8773,8 @@
                 <a:cs typeface="Courier New"/>
                 <a:sym typeface="Courier New"/>
               </a:rPr>
-              <a:t>   before the event. (Outlook: a calendar notification instead.)</a:t>
-            </a:r>
-            <a:endParaRPr>
-              <a:solidFill>
-                <a:schemeClr val="dk1"/>
-              </a:solidFill>
-              <a:latin typeface="Calibri"/>
-              <a:ea typeface="Calibri"/>
-              <a:cs typeface="Calibri"/>
-              <a:sym typeface="Calibri"/>
-            </a:endParaRPr>
-          </a:p>
-          <a:p>
-            <a:pPr indent="0" lvl="0" marL="0" marR="0" rtl="0" algn="l">
-              <a:lnSpc>
-                <a:spcPct val="125000"/>
-              </a:lnSpc>
-              <a:spcBef>
-                <a:spcPts val="0"/>
-              </a:spcBef>
-              <a:spcAft>
-                <a:spcPts val="0"/>
-              </a:spcAft>
-              <a:buClr>
-                <a:srgbClr val="1C2333"/>
-              </a:buClr>
-              <a:buSzPts val="1200"/>
-              <a:buFont typeface="Courier New"/>
-              <a:buNone/>
-            </a:pPr>
-            <a:r>
-              <a:rPr lang="en-US">
-                <a:solidFill>
-                  <a:srgbClr val="1C2333"/>
-                </a:solidFill>
-                <a:latin typeface="Courier New"/>
-                <a:ea typeface="Courier New"/>
-                <a:cs typeface="Courier New"/>
-                <a:sym typeface="Courier New"/>
-              </a:rPr>
               <a:t>Also: do a dry run for today RIGHT NOW so I can check your work.</a:t>
             </a:r>
-            <a:endParaRPr>
-              <a:solidFill>
-                <a:schemeClr val="dk1"/>
-              </a:solidFill>
-              <a:latin typeface="Calibri"/>
-              <a:ea typeface="Calibri"/>
-              <a:cs typeface="Calibri"/>
-              <a:sym typeface="Calibri"/>
-            </a:endParaRPr>
           </a:p>
         </p:txBody>
       </p:sp>
@@ -8411,7 +9084,7 @@
                 <a:cs typeface="Inter"/>
                 <a:sym typeface="Inter"/>
               </a:rPr>
-              <a:t>CASE FILE 04 · THE DRY RUN — CHECKPOINT</a:t>
+              <a:t>CASE FILE 03 · THE DRY RUN — CHECKPOINT</a:t>
             </a:r>
             <a:endParaRPr sz="1200">
               <a:solidFill>
@@ -8474,29 +9147,8 @@
                 <a:cs typeface="Playfair Display"/>
                 <a:sym typeface="Playfair Display"/>
               </a:rPr>
-              <a:t>2</a:t>
-            </a:r>
-            <a:r>
-              <a:rPr b="1" lang="en-US" sz="13000">
-                <a:solidFill>
-                  <a:srgbClr val="C9A227"/>
-                </a:solidFill>
-                <a:latin typeface="Playfair Display"/>
-                <a:ea typeface="Playfair Display"/>
-                <a:cs typeface="Playfair Display"/>
-                <a:sym typeface="Playfair Display"/>
-              </a:rPr>
-              <a:t>:24 PM</a:t>
-            </a:r>
-            <a:endParaRPr sz="13000">
-              <a:solidFill>
-                <a:schemeClr val="dk1"/>
-              </a:solidFill>
-              <a:latin typeface="Calibri"/>
-              <a:ea typeface="Calibri"/>
-              <a:cs typeface="Calibri"/>
-              <a:sym typeface="Calibri"/>
-            </a:endParaRPr>
+              <a:t>4:54 PM</a:t>
+            </a:r>
           </a:p>
         </p:txBody>
       </p:sp>
@@ -8965,7 +9617,7 @@
                 <a:cs typeface="Playfair Display"/>
                 <a:sym typeface="Playfair Display"/>
               </a:rPr>
-              <a:t>Yours starts tomorrow at 2:24.</a:t>
+              <a:t>Yours starts tomorrow at 4:54.</a:t>
             </a:r>
             <a:endParaRPr sz="2200">
               <a:solidFill>
@@ -9066,6 +9718,3367 @@
               <a:cs typeface="Calibri"/>
               <a:sym typeface="Calibri"/>
             </a:endParaRPr>
+          </a:p>
+        </p:txBody>
+      </p:sp>
+    </p:spTree>
+  </p:cSld>
+  <p:clrMapOvr>
+    <a:masterClrMapping/>
+  </p:clrMapOvr>
+</p:sld>
+</file>
+
+<file path=ppt/slides/slide17.xml><?xml version="1.0" encoding="utf-8"?>
+<p:sld xmlns:a="http://schemas.openxmlformats.org/drawingml/2006/main" xmlns:r="http://schemas.openxmlformats.org/officeDocument/2006/relationships" xmlns:mc="http://schemas.openxmlformats.org/markup-compatibility/2006" xmlns:mv="urn:schemas-microsoft-com:mac:vml" xmlns:p="http://schemas.openxmlformats.org/presentationml/2006/main" xmlns:c="http://schemas.openxmlformats.org/drawingml/2006/chart" xmlns:dgm="http://schemas.openxmlformats.org/drawingml/2006/diagram" xmlns:o="urn:schemas-microsoft-com:office:office" xmlns:v="urn:schemas-microsoft-com:vml" xmlns:pvml="urn:schemas-microsoft-com:office:powerpoint" xmlns:com="http://schemas.openxmlformats.org/drawingml/2006/compatibility" xmlns:p14="http://schemas.microsoft.com/office/powerpoint/2010/main" xmlns:p15="http://schemas.microsoft.com/office/powerpoint/2012/main" xmlns:ahyp="http://schemas.microsoft.com/office/drawing/2018/hyperlinkcolor">
+  <p:cSld>
+    <p:bg>
+      <p:bgPr>
+        <a:solidFill>
+          <a:srgbClr val="F7F3E9"/>
+        </a:solidFill>
+      </p:bgPr>
+    </p:bg>
+    <p:spTree>
+      <p:nvGrpSpPr>
+        <p:cNvPr id="42" name="Shape 42"/>
+        <p:cNvGrpSpPr/>
+        <p:nvPr/>
+      </p:nvGrpSpPr>
+      <p:grpSpPr>
+        <a:xfrm>
+          <a:off x="0" y="0"/>
+          <a:ext cx="0" cy="0"/>
+          <a:chOff x="0" y="0"/>
+          <a:chExt cx="0" cy="0"/>
+        </a:xfrm>
+      </p:grpSpPr>
+      <p:sp>
+        <p:nvSpPr>
+          <p:cNvPr id="43" name="Google Shape;43;p6"/>
+          <p:cNvSpPr/>
+          <p:nvPr/>
+        </p:nvSpPr>
+        <p:spPr>
+          <a:xfrm>
+            <a:off x="822960" y="502920"/>
+            <a:ext cx="10545775" cy="365760"/>
+          </a:xfrm>
+          <a:prstGeom prst="rect">
+            <a:avLst/>
+          </a:prstGeom>
+          <a:noFill/>
+          <a:ln>
+            <a:noFill/>
+          </a:ln>
+        </p:spPr>
+        <p:txBody>
+          <a:bodyPr anchorCtr="0" anchor="ctr" bIns="0" lIns="0" spcFirstLastPara="1" rIns="0" wrap="square" tIns="0">
+            <a:noAutofit/>
+          </a:bodyPr>
+          <a:lstStyle/>
+          <a:p>
+            <a:pPr indent="0" lvl="0" marL="0" marR="0" rtl="0" algn="l">
+              <a:spcBef>
+                <a:spcPts val="0"/>
+              </a:spcBef>
+              <a:spcAft>
+                <a:spcPts val="0"/>
+              </a:spcAft>
+              <a:buClr>
+                <a:srgbClr val="C9A227"/>
+              </a:buClr>
+              <a:buSzPts val="1200"/>
+              <a:buFont typeface="Inter"/>
+              <a:buNone/>
+            </a:pPr>
+            <a:r>
+              <a:rPr b="1" lang="en-US" sz="1200">
+                <a:solidFill>
+                  <a:srgbClr val="C9A227"/>
+                </a:solidFill>
+                <a:latin typeface="Inter"/>
+                <a:ea typeface="Inter"/>
+                <a:cs typeface="Inter"/>
+                <a:sym typeface="Inter"/>
+              </a:rPr>
+              <a:t>YOUR GUIDE</a:t>
+            </a:r>
+          </a:p>
+        </p:txBody>
+      </p:sp>
+      <p:sp>
+        <p:nvSpPr>
+          <p:cNvPr id="44" name="Google Shape;44;p6"/>
+          <p:cNvSpPr/>
+          <p:nvPr/>
+        </p:nvSpPr>
+        <p:spPr>
+          <a:xfrm>
+            <a:off x="822960" y="990600"/>
+            <a:ext cx="7112000" cy="812800"/>
+          </a:xfrm>
+          <a:prstGeom prst="rect">
+            <a:avLst/>
+          </a:prstGeom>
+          <a:noFill/>
+          <a:ln>
+            <a:noFill/>
+          </a:ln>
+        </p:spPr>
+        <p:txBody>
+          <a:bodyPr anchorCtr="0" anchor="t" bIns="0" lIns="0" spcFirstLastPara="1" rIns="0" wrap="square" tIns="0">
+            <a:noAutofit/>
+          </a:bodyPr>
+          <a:lstStyle/>
+          <a:p>
+            <a:pPr indent="0" lvl="0" marL="0" marR="0" rtl="0" algn="l">
+              <a:lnSpc>
+                <a:spcPct val="118000"/>
+              </a:lnSpc>
+              <a:spcBef>
+                <a:spcPts val="0"/>
+              </a:spcBef>
+              <a:spcAft>
+                <a:spcPts val="0"/>
+              </a:spcAft>
+              <a:buClr>
+                <a:srgbClr val="A31621"/>
+              </a:buClr>
+              <a:buSzPts val="2100"/>
+              <a:buFont typeface="Playfair Display"/>
+              <a:buNone/>
+            </a:pPr>
+            <a:r>
+              <a:rPr i="1" lang="en-US" sz="2100">
+                <a:solidFill>
+                  <a:srgbClr val="A31621"/>
+                </a:solidFill>
+                <a:latin typeface="Playfair Display"/>
+                <a:ea typeface="Playfair Display"/>
+                <a:cs typeface="Playfair Display"/>
+                <a:sym typeface="Playfair Display"/>
+              </a:rPr>
+              <a:t>Denise Gosnell, Ph.D.</a:t>
+            </a:r>
+          </a:p>
+        </p:txBody>
+      </p:sp>
+      <p:sp>
+        <p:nvSpPr>
+          <p:cNvPr id="45" name="Google Shape;45;p6"/>
+          <p:cNvSpPr/>
+          <p:nvPr/>
+        </p:nvSpPr>
+        <p:spPr>
+          <a:xfrm>
+            <a:off x="812800" y="1879600"/>
+            <a:ext cx="7112000" cy="812800"/>
+          </a:xfrm>
+          <a:prstGeom prst="rect">
+            <a:avLst/>
+          </a:prstGeom>
+          <a:noFill/>
+          <a:ln>
+            <a:noFill/>
+          </a:ln>
+        </p:spPr>
+        <p:txBody>
+          <a:bodyPr anchorCtr="0" anchor="ctr" bIns="0" lIns="0" spcFirstLastPara="1" rIns="0" wrap="square" tIns="0">
+            <a:noAutofit/>
+          </a:bodyPr>
+          <a:lstStyle/>
+          <a:p>
+            <a:pPr indent="0" lvl="0" marL="0" marR="0" rtl="0" algn="l">
+              <a:spcBef>
+                <a:spcPts val="0"/>
+              </a:spcBef>
+              <a:spcAft>
+                <a:spcPts val="0"/>
+              </a:spcAft>
+              <a:buClr>
+                <a:srgbClr val="14213D"/>
+              </a:buClr>
+              <a:buSzPts val="3600"/>
+              <a:buFont typeface="Playfair Display"/>
+              <a:buNone/>
+            </a:pPr>
+            <a:r>
+              <a:rPr b="1" lang="en-US" sz="3600">
+                <a:solidFill>
+                  <a:srgbClr val="14213D"/>
+                </a:solidFill>
+                <a:latin typeface="Playfair Display"/>
+                <a:ea typeface="Playfair Display"/>
+                <a:cs typeface="Playfair Display"/>
+                <a:sym typeface="Playfair Display"/>
+              </a:rPr>
+              <a:t>Fifteen years in data infrastructure. Now building an AI-first company, and Signature’s cooperative data system.</a:t>
+            </a:r>
+          </a:p>
+        </p:txBody>
+      </p:sp>
+      <p:sp>
+        <p:nvSpPr>
+          <p:cNvPr id="47" name="Google Shape;47;p6"/>
+          <p:cNvSpPr/>
+          <p:nvPr/>
+        </p:nvSpPr>
+        <p:spPr>
+          <a:xfrm>
+            <a:off x="812800" y="2895600"/>
+            <a:ext cx="7302500" cy="3175000"/>
+          </a:xfrm>
+          <a:prstGeom prst="rect">
+            <a:avLst/>
+          </a:prstGeom>
+          <a:noFill/>
+          <a:ln>
+            <a:noFill/>
+          </a:ln>
+        </p:spPr>
+        <p:txBody>
+          <a:bodyPr anchorCtr="0" anchor="ctr" bIns="0" lIns="0" spcFirstLastPara="1" rIns="0" wrap="square" tIns="0">
+            <a:noAutofit/>
+          </a:bodyPr>
+          <a:lstStyle/>
+          <a:p>
+            <a:pPr indent="0" lvl="0" marL="0" marR="0" rtl="0" algn="l">
+              <a:lnSpc>
+                <a:spcPct val="125000"/>
+              </a:lnSpc>
+              <a:spcBef>
+                <a:spcPts val="0"/>
+              </a:spcBef>
+              <a:spcAft>
+                <a:spcPts val="0"/>
+              </a:spcAft>
+              <a:buClr>
+                <a:srgbClr val="1C2333"/>
+              </a:buClr>
+              <a:buSzPts val="1800"/>
+              <a:buFont typeface="Inter"/>
+              <a:buNone/>
+            </a:pPr>
+            <a:r>
+              <a:rPr lang="en-US" sz="1800">
+                <a:solidFill>
+                  <a:srgbClr val="1C2333"/>
+                </a:solidFill>
+                <a:latin typeface="Inter"/>
+                <a:ea typeface="Inter"/>
+                <a:cs typeface="Inter"/>
+                <a:sym typeface="Inter"/>
+              </a:rPr>
+              <a:t>·  Managed P&amp;L for a nine-figure AWS service (2022 to 2025)</a:t>
+            </a:r>
+          </a:p>
+          <a:p>
+            <a:pPr indent="0" lvl="0" marL="0" marR="0" rtl="0" algn="l">
+              <a:lnSpc>
+                <a:spcPct val="125000"/>
+              </a:lnSpc>
+              <a:spcBef>
+                <a:spcPts val="0"/>
+              </a:spcBef>
+              <a:spcAft>
+                <a:spcPts val="0"/>
+              </a:spcAft>
+              <a:buClr>
+                <a:srgbClr val="14213D"/>
+              </a:buClr>
+              <a:buSzPts val="1800"/>
+              <a:buFont typeface="Inter"/>
+              <a:buNone/>
+            </a:pPr>
+            <a:r>
+              <a:rPr b="1" lang="en-US" sz="1800">
+                <a:solidFill>
+                  <a:srgbClr val="14213D"/>
+                </a:solidFill>
+                <a:latin typeface="Inter"/>
+                <a:ea typeface="Inter"/>
+                <a:cs typeface="Inter"/>
+                <a:sym typeface="Inter"/>
+              </a:rPr>
+              <a:t>·  Led a top-three AWS re:Invent launch: a new AI engine for enterprise workloads</a:t>
+            </a:r>
+          </a:p>
+          <a:p>
+            <a:pPr indent="0" lvl="0" marL="0" marR="0" rtl="0" algn="l">
+              <a:lnSpc>
+                <a:spcPct val="125000"/>
+              </a:lnSpc>
+              <a:spcBef>
+                <a:spcPts val="0"/>
+              </a:spcBef>
+              <a:spcAft>
+                <a:spcPts val="0"/>
+              </a:spcAft>
+              <a:buClr>
+                <a:srgbClr val="14213D"/>
+              </a:buClr>
+              <a:buSzPts val="1800"/>
+              <a:buFont typeface="Inter"/>
+              <a:buNone/>
+            </a:pPr>
+            <a:r>
+              <a:rPr b="1" lang="en-US" sz="1800">
+                <a:solidFill>
+                  <a:srgbClr val="14213D"/>
+                </a:solidFill>
+                <a:latin typeface="Inter"/>
+                <a:ea typeface="Inter"/>
+                <a:cs typeface="Inter"/>
+                <a:sym typeface="Inter"/>
+              </a:rPr>
+              <a:t>·  Chief Data Officer at DataStax, acquired by IBM in May 2025</a:t>
+            </a:r>
+          </a:p>
+          <a:p>
+            <a:pPr indent="0" lvl="0" marL="0" marR="0" rtl="0" algn="l">
+              <a:lnSpc>
+                <a:spcPct val="125000"/>
+              </a:lnSpc>
+              <a:spcBef>
+                <a:spcPts val="0"/>
+              </a:spcBef>
+              <a:spcAft>
+                <a:spcPts val="0"/>
+              </a:spcAft>
+              <a:buClr>
+                <a:srgbClr val="14213D"/>
+              </a:buClr>
+              <a:buSzPts val="1800"/>
+              <a:buFont typeface="Inter"/>
+              <a:buNone/>
+            </a:pPr>
+            <a:r>
+              <a:rPr b="1" lang="en-US" sz="1800">
+                <a:solidFill>
+                  <a:srgbClr val="14213D"/>
+                </a:solidFill>
+                <a:latin typeface="Inter"/>
+                <a:ea typeface="Inter"/>
+                <a:cs typeface="Inter"/>
+                <a:sym typeface="Inter"/>
+              </a:rPr>
+              <a:t>·  Bestselling, award-winning author in AI and leadership · patent holder</a:t>
+            </a:r>
+          </a:p>
+          <a:p>
+            <a:pPr indent="0" lvl="0" marL="0" marR="0" rtl="0" algn="l">
+              <a:lnSpc>
+                <a:spcPct val="125000"/>
+              </a:lnSpc>
+              <a:spcBef>
+                <a:spcPts val="0"/>
+              </a:spcBef>
+              <a:spcAft>
+                <a:spcPts val="0"/>
+              </a:spcAft>
+              <a:buClr>
+                <a:srgbClr val="14213D"/>
+              </a:buClr>
+              <a:buSzPts val="1800"/>
+              <a:buFont typeface="Inter"/>
+              <a:buNone/>
+            </a:pPr>
+            <a:r>
+              <a:rPr b="1" lang="en-US" sz="1800">
+                <a:solidFill>
+                  <a:srgbClr val="14213D"/>
+                </a:solidFill>
+                <a:latin typeface="Inter"/>
+                <a:ea typeface="Inter"/>
+                <a:cs typeface="Inter"/>
+                <a:sym typeface="Inter"/>
+              </a:rPr>
+              <a:t>·  Ph.D. in machine learning (2014) · Top 50 Women Leaders in SaaS</a:t>
+            </a:r>
+          </a:p>
+          <a:p>
+            <a:pPr indent="0" lvl="0" marL="0" marR="0" rtl="0" algn="l">
+              <a:lnSpc>
+                <a:spcPct val="125000"/>
+              </a:lnSpc>
+              <a:spcBef>
+                <a:spcPts val="0"/>
+              </a:spcBef>
+              <a:spcAft>
+                <a:spcPts val="0"/>
+              </a:spcAft>
+              <a:buClr>
+                <a:srgbClr val="14213D"/>
+              </a:buClr>
+              <a:buSzPts val="1800"/>
+              <a:buFont typeface="Inter"/>
+              <a:buNone/>
+            </a:pPr>
+            <a:r>
+              <a:rPr b="1" lang="en-US" sz="1800">
+                <a:solidFill>
+                  <a:srgbClr val="14213D"/>
+                </a:solidFill>
+                <a:latin typeface="Inter"/>
+                <a:ea typeface="Inter"/>
+                <a:cs typeface="Inter"/>
+                <a:sym typeface="Inter"/>
+              </a:rPr>
+              <a:t>·  Builds with these tools every day: Donna is her actual assistant</a:t>
+            </a:r>
+          </a:p>
+        </p:txBody>
+      </p:sp>
+      <p:pic>
+        <p:nvPicPr>
+          <p:cNvPr id="901" name="Denise headshot"/>
+          <p:cNvPicPr preferRelativeResize="0"/>
+          <p:nvPr/>
+        </p:nvPicPr>
+        <p:blipFill>
+          <a:blip r:embed="rId9"/>
+          <a:srcRect/>
+          <a:stretch>
+            <a:fillRect/>
+          </a:stretch>
+        </p:blipFill>
+        <p:spPr>
+          <a:xfrm>
+            <a:off x="8382000" y="1371600"/>
+            <a:ext cx="2997200" cy="2971800"/>
+          </a:xfrm>
+          <a:prstGeom prst="ellipse">
+            <a:avLst/>
+          </a:prstGeom>
+          <a:ln w="19050">
+            <a:solidFill>
+              <a:srgbClr val="C9A227"/>
+            </a:solidFill>
+          </a:ln>
+        </p:spPr>
+      </p:pic>
+    </p:spTree>
+  </p:cSld>
+  <p:clrMapOvr>
+    <a:masterClrMapping/>
+  </p:clrMapOvr>
+</p:sld>
+</file>
+
+<file path=ppt/slides/slide18.xml><?xml version="1.0" encoding="utf-8"?>
+<p:sld xmlns:a="http://schemas.openxmlformats.org/drawingml/2006/main" xmlns:r="http://schemas.openxmlformats.org/officeDocument/2006/relationships" xmlns:mc="http://schemas.openxmlformats.org/markup-compatibility/2006" xmlns:mv="urn:schemas-microsoft-com:mac:vml" xmlns:p="http://schemas.openxmlformats.org/presentationml/2006/main" xmlns:c="http://schemas.openxmlformats.org/drawingml/2006/chart" xmlns:dgm="http://schemas.openxmlformats.org/drawingml/2006/diagram" xmlns:o="urn:schemas-microsoft-com:office:office" xmlns:v="urn:schemas-microsoft-com:vml" xmlns:pvml="urn:schemas-microsoft-com:office:powerpoint" xmlns:com="http://schemas.openxmlformats.org/drawingml/2006/compatibility" xmlns:p14="http://schemas.microsoft.com/office/powerpoint/2010/main" xmlns:p15="http://schemas.microsoft.com/office/powerpoint/2012/main" xmlns:ahyp="http://schemas.microsoft.com/office/drawing/2018/hyperlinkcolor">
+  <p:cSld>
+    <p:bg>
+      <p:bgPr>
+        <a:solidFill>
+          <a:srgbClr val="14213D"/>
+        </a:solidFill>
+      </p:bgPr>
+    </p:bg>
+    <p:spTree>
+      <p:nvGrpSpPr>
+        <p:cNvPr id="52" name="Shape 52"/>
+        <p:cNvGrpSpPr/>
+        <p:nvPr/>
+      </p:nvGrpSpPr>
+      <p:grpSpPr>
+        <a:xfrm>
+          <a:off x="0" y="0"/>
+          <a:ext cx="0" cy="0"/>
+          <a:chOff x="0" y="0"/>
+          <a:chExt cx="0" cy="0"/>
+        </a:xfrm>
+      </p:grpSpPr>
+      <p:sp>
+        <p:nvSpPr>
+          <p:cNvPr id="53" name="Google Shape;53;p7"/>
+          <p:cNvSpPr/>
+          <p:nvPr/>
+        </p:nvSpPr>
+        <p:spPr>
+          <a:xfrm>
+            <a:off x="822960" y="502920"/>
+            <a:ext cx="10545775" cy="365760"/>
+          </a:xfrm>
+          <a:prstGeom prst="rect">
+            <a:avLst/>
+          </a:prstGeom>
+          <a:noFill/>
+          <a:ln>
+            <a:noFill/>
+          </a:ln>
+        </p:spPr>
+        <p:txBody>
+          <a:bodyPr anchorCtr="0" anchor="ctr" bIns="0" lIns="0" spcFirstLastPara="1" rIns="0" wrap="square" tIns="0">
+            <a:noAutofit/>
+          </a:bodyPr>
+          <a:lstStyle/>
+          <a:p>
+            <a:pPr indent="0" lvl="0" marL="0" marR="0" rtl="0" algn="l">
+              <a:spcBef>
+                <a:spcPts val="0"/>
+              </a:spcBef>
+              <a:spcAft>
+                <a:spcPts val="0"/>
+              </a:spcAft>
+              <a:buClr>
+                <a:srgbClr val="DDB94A"/>
+              </a:buClr>
+              <a:buSzPts val="1200"/>
+              <a:buFont typeface="Inter"/>
+              <a:buNone/>
+            </a:pPr>
+            <a:r>
+              <a:rPr b="1" lang="en-US" sz="1200">
+                <a:solidFill>
+                  <a:srgbClr val="DDB94A"/>
+                </a:solidFill>
+                <a:latin typeface="Inter"/>
+                <a:ea typeface="Inter"/>
+                <a:cs typeface="Inter"/>
+                <a:sym typeface="Inter"/>
+              </a:rPr>
+              <a:t>THE BIG PICTURE</a:t>
+            </a:r>
+          </a:p>
+        </p:txBody>
+      </p:sp>
+      <p:sp>
+        <p:nvSpPr>
+          <p:cNvPr id="54" name="Google Shape;54;p7"/>
+          <p:cNvSpPr/>
+          <p:nvPr/>
+        </p:nvSpPr>
+        <p:spPr>
+          <a:xfrm>
+            <a:off x="822960" y="868680"/>
+            <a:ext cx="10545775" cy="777240"/>
+          </a:xfrm>
+          <a:prstGeom prst="rect">
+            <a:avLst/>
+          </a:prstGeom>
+          <a:noFill/>
+          <a:ln>
+            <a:noFill/>
+          </a:ln>
+        </p:spPr>
+        <p:txBody>
+          <a:bodyPr anchorCtr="0" anchor="ctr" bIns="0" lIns="0" spcFirstLastPara="1" rIns="0" wrap="square" tIns="0">
+            <a:noAutofit/>
+          </a:bodyPr>
+          <a:lstStyle/>
+          <a:p>
+            <a:pPr indent="0" lvl="0" marL="0" marR="0" rtl="0" algn="l">
+              <a:spcBef>
+                <a:spcPts val="0"/>
+              </a:spcBef>
+              <a:spcAft>
+                <a:spcPts val="0"/>
+              </a:spcAft>
+              <a:buClr>
+                <a:srgbClr val="F7F3E9"/>
+              </a:buClr>
+              <a:buSzPts val="3800"/>
+              <a:buFont typeface="Playfair Display"/>
+              <a:buNone/>
+            </a:pPr>
+            <a:r>
+              <a:rPr b="1" lang="en-US" sz="3800">
+                <a:solidFill>
+                  <a:srgbClr val="F7F3E9"/>
+                </a:solidFill>
+                <a:latin typeface="Playfair Display"/>
+                <a:ea typeface="Playfair Display"/>
+                <a:cs typeface="Playfair Display"/>
+                <a:sym typeface="Playfair Display"/>
+              </a:rPr>
+              <a:t>You already speak the language</a:t>
+            </a:r>
+          </a:p>
+        </p:txBody>
+      </p:sp>
+      <p:sp>
+        <p:nvSpPr>
+          <p:cNvPr id="55" name="Google Shape;55;p7"/>
+          <p:cNvSpPr/>
+          <p:nvPr/>
+        </p:nvSpPr>
+        <p:spPr>
+          <a:xfrm>
+            <a:off x="822960" y="2011680"/>
+            <a:ext cx="2542032" cy="3108960"/>
+          </a:xfrm>
+          <a:prstGeom prst="roundRect">
+            <a:avLst>
+              <a:gd fmla="val 2158" name="adj"/>
+            </a:avLst>
+          </a:prstGeom>
+          <a:solidFill>
+            <a:srgbClr val="1B2A4A"/>
+          </a:solidFill>
+          <a:ln cap="flat" cmpd="sng" w="9525">
+            <a:solidFill>
+              <a:srgbClr val="C9A227">
+                <a:alpha val="65098"/>
+              </a:srgbClr>
+            </a:solidFill>
+            <a:prstDash val="solid"/>
+            <a:round/>
+            <a:headEnd len="sm" w="sm" type="none"/>
+            <a:tailEnd len="sm" w="sm" type="none"/>
+          </a:ln>
+        </p:spPr>
+        <p:txBody>
+          <a:bodyPr anchorCtr="0" anchor="t" bIns="45700" lIns="91425" spcFirstLastPara="1" rIns="91425" wrap="square" tIns="45700">
+            <a:noAutofit/>
+          </a:bodyPr>
+          <a:lstStyle/>
+          <a:p>
+            <a:pPr indent="0" lvl="0" marL="0" marR="0" rtl="0" algn="l">
+              <a:spcBef>
+                <a:spcPts val="0"/>
+              </a:spcBef>
+              <a:spcAft>
+                <a:spcPts val="0"/>
+              </a:spcAft>
+              <a:buNone/>
+            </a:pPr>
+            <a:r>
+              <a:t/>
+            </a:r>
+            <a:endParaRPr sz="1800">
+              <a:solidFill>
+                <a:schemeClr val="dk1"/>
+              </a:solidFill>
+              <a:latin typeface="Calibri"/>
+              <a:ea typeface="Calibri"/>
+              <a:cs typeface="Calibri"/>
+              <a:sym typeface="Calibri"/>
+            </a:endParaRPr>
+          </a:p>
+        </p:txBody>
+      </p:sp>
+      <p:sp>
+        <p:nvSpPr>
+          <p:cNvPr id="56" name="Google Shape;56;p7"/>
+          <p:cNvSpPr/>
+          <p:nvPr/>
+        </p:nvSpPr>
+        <p:spPr>
+          <a:xfrm>
+            <a:off x="1097280" y="2108343"/>
+            <a:ext cx="1993392" cy="502920"/>
+          </a:xfrm>
+          <a:prstGeom prst="rect">
+            <a:avLst/>
+          </a:prstGeom>
+          <a:noFill/>
+          <a:ln>
+            <a:noFill/>
+          </a:ln>
+        </p:spPr>
+        <p:txBody>
+          <a:bodyPr anchorCtr="0" anchor="ctr" bIns="0" lIns="0" spcFirstLastPara="1" rIns="0" wrap="square" tIns="0">
+            <a:noAutofit/>
+          </a:bodyPr>
+          <a:lstStyle/>
+          <a:p>
+            <a:pPr indent="0" lvl="0" marL="0" marR="0" rtl="0" algn="l">
+              <a:spcBef>
+                <a:spcPts val="0"/>
+              </a:spcBef>
+              <a:spcAft>
+                <a:spcPts val="0"/>
+              </a:spcAft>
+              <a:buClr>
+                <a:srgbClr val="C9A227"/>
+              </a:buClr>
+              <a:buSzPts val="2600"/>
+              <a:buFont typeface="Playfair Display"/>
+              <a:buNone/>
+            </a:pPr>
+            <a:r>
+              <a:rPr b="1" lang="en-US" sz="2600">
+                <a:solidFill>
+                  <a:srgbClr val="C9A227"/>
+                </a:solidFill>
+                <a:latin typeface="Playfair Display"/>
+                <a:ea typeface="Playfair Display"/>
+                <a:cs typeface="Playfair Display"/>
+                <a:sym typeface="Playfair Display"/>
+              </a:rPr>
+              <a:t>01</a:t>
+            </a:r>
+            <a:endParaRPr sz="2600">
+              <a:solidFill>
+                <a:schemeClr val="dk1"/>
+              </a:solidFill>
+              <a:latin typeface="Calibri"/>
+              <a:ea typeface="Calibri"/>
+              <a:cs typeface="Calibri"/>
+              <a:sym typeface="Calibri"/>
+            </a:endParaRPr>
+          </a:p>
+        </p:txBody>
+      </p:sp>
+      <p:sp>
+        <p:nvSpPr>
+          <p:cNvPr id="57" name="Google Shape;57;p7"/>
+          <p:cNvSpPr/>
+          <p:nvPr/>
+        </p:nvSpPr>
+        <p:spPr>
+          <a:xfrm>
+            <a:off x="1097280" y="2526355"/>
+            <a:ext cx="1993392" cy="594360"/>
+          </a:xfrm>
+          <a:prstGeom prst="rect">
+            <a:avLst/>
+          </a:prstGeom>
+          <a:noFill/>
+          <a:ln>
+            <a:noFill/>
+          </a:ln>
+        </p:spPr>
+        <p:txBody>
+          <a:bodyPr anchorCtr="0" anchor="ctr" bIns="0" lIns="0" spcFirstLastPara="1" rIns="0" wrap="square" tIns="0">
+            <a:noAutofit/>
+          </a:bodyPr>
+          <a:lstStyle/>
+          <a:p>
+            <a:pPr indent="0" lvl="0" marL="0" marR="0" rtl="0" algn="l">
+              <a:spcBef>
+                <a:spcPts val="0"/>
+              </a:spcBef>
+              <a:spcAft>
+                <a:spcPts val="0"/>
+              </a:spcAft>
+              <a:buClr>
+                <a:srgbClr val="F7F3E9"/>
+              </a:buClr>
+              <a:buSzPts val="1250"/>
+              <a:buFont typeface="Inter"/>
+              <a:buNone/>
+            </a:pPr>
+            <a:r>
+              <a:rPr b="1" lang="en-US" sz="1250">
+                <a:solidFill>
+                  <a:srgbClr val="F7F3E9"/>
+                </a:solidFill>
+                <a:latin typeface="Inter"/>
+                <a:ea typeface="Inter"/>
+                <a:cs typeface="Inter"/>
+                <a:sym typeface="Inter"/>
+              </a:rPr>
+              <a:t>SAY IT</a:t>
+            </a:r>
+          </a:p>
+          <a:p>
+            <a:pPr indent="0" lvl="0" marL="0" marR="0" rtl="0" algn="l">
+              <a:spcBef>
+                <a:spcPts val="0"/>
+              </a:spcBef>
+              <a:spcAft>
+                <a:spcPts val="0"/>
+              </a:spcAft>
+              <a:buClr>
+                <a:srgbClr val="F7F3E9"/>
+              </a:buClr>
+              <a:buSzPts val="1250"/>
+              <a:buFont typeface="Inter"/>
+              <a:buNone/>
+            </a:pPr>
+            <a:r>
+              <a:rPr b="1" lang="en-US" sz="1250">
+                <a:solidFill>
+                  <a:srgbClr val="F7F3E9"/>
+                </a:solidFill>
+                <a:latin typeface="Inter"/>
+                <a:ea typeface="Inter"/>
+                <a:cs typeface="Inter"/>
+                <a:sym typeface="Inter"/>
+              </a:rPr>
+              <a:t>A CHAT</a:t>
+            </a:r>
+          </a:p>
+        </p:txBody>
+      </p:sp>
+      <p:sp>
+        <p:nvSpPr>
+          <p:cNvPr id="58" name="Google Shape;58;p7"/>
+          <p:cNvSpPr/>
+          <p:nvPr/>
+        </p:nvSpPr>
+        <p:spPr>
+          <a:xfrm>
+            <a:off x="1097280" y="3310128"/>
+            <a:ext cx="1993392" cy="1235746"/>
+          </a:xfrm>
+          <a:prstGeom prst="rect">
+            <a:avLst/>
+          </a:prstGeom>
+          <a:noFill/>
+          <a:ln>
+            <a:noFill/>
+          </a:ln>
+        </p:spPr>
+        <p:txBody>
+          <a:bodyPr anchorCtr="0" anchor="ctr" bIns="0" lIns="0" spcFirstLastPara="1" rIns="0" wrap="square" tIns="0">
+            <a:noAutofit/>
+          </a:bodyPr>
+          <a:lstStyle/>
+          <a:p>
+            <a:pPr indent="0" lvl="0" marL="0" marR="0" rtl="0" algn="l">
+              <a:lnSpc>
+                <a:spcPct val="110000"/>
+              </a:lnSpc>
+              <a:spcBef>
+                <a:spcPts val="0"/>
+              </a:spcBef>
+              <a:spcAft>
+                <a:spcPts val="0"/>
+              </a:spcAft>
+              <a:buClr>
+                <a:srgbClr val="AFA893"/>
+              </a:buClr>
+              <a:buSzPts val="1600"/>
+              <a:buFont typeface="Inter"/>
+              <a:buNone/>
+            </a:pPr>
+            <a:r>
+              <a:rPr i="1" lang="en-US">
+                <a:solidFill>
+                  <a:srgbClr val="AFA893"/>
+                </a:solidFill>
+                <a:latin typeface="Inter"/>
+                <a:ea typeface="Inter"/>
+                <a:cs typeface="Inter"/>
+                <a:sym typeface="Inter"/>
+              </a:rPr>
+              <a:t>Ask the way you’d ask a person. Plain English is the whole interface.</a:t>
+            </a:r>
+          </a:p>
+        </p:txBody>
+      </p:sp>
+      <p:sp>
+        <p:nvSpPr>
+          <p:cNvPr id="59" name="Google Shape;59;p7"/>
+          <p:cNvSpPr/>
+          <p:nvPr/>
+        </p:nvSpPr>
+        <p:spPr>
+          <a:xfrm>
+            <a:off x="3584448" y="2011680"/>
+            <a:ext cx="2542032" cy="3108960"/>
+          </a:xfrm>
+          <a:prstGeom prst="roundRect">
+            <a:avLst>
+              <a:gd fmla="val 2158" name="adj"/>
+            </a:avLst>
+          </a:prstGeom>
+          <a:solidFill>
+            <a:srgbClr val="1B2A4A"/>
+          </a:solidFill>
+          <a:ln cap="flat" cmpd="sng" w="9525">
+            <a:solidFill>
+              <a:srgbClr val="C9A227">
+                <a:alpha val="65098"/>
+              </a:srgbClr>
+            </a:solidFill>
+            <a:prstDash val="solid"/>
+            <a:round/>
+            <a:headEnd len="sm" w="sm" type="none"/>
+            <a:tailEnd len="sm" w="sm" type="none"/>
+          </a:ln>
+        </p:spPr>
+        <p:txBody>
+          <a:bodyPr anchorCtr="0" anchor="t" bIns="45700" lIns="91425" spcFirstLastPara="1" rIns="91425" wrap="square" tIns="45700">
+            <a:noAutofit/>
+          </a:bodyPr>
+          <a:lstStyle/>
+          <a:p>
+            <a:pPr indent="0" lvl="0" marL="0" marR="0" rtl="0" algn="l">
+              <a:spcBef>
+                <a:spcPts val="0"/>
+              </a:spcBef>
+              <a:spcAft>
+                <a:spcPts val="0"/>
+              </a:spcAft>
+              <a:buNone/>
+            </a:pPr>
+            <a:r>
+              <a:t/>
+            </a:r>
+            <a:endParaRPr sz="1800">
+              <a:solidFill>
+                <a:schemeClr val="dk1"/>
+              </a:solidFill>
+              <a:latin typeface="Calibri"/>
+              <a:ea typeface="Calibri"/>
+              <a:cs typeface="Calibri"/>
+              <a:sym typeface="Calibri"/>
+            </a:endParaRPr>
+          </a:p>
+        </p:txBody>
+      </p:sp>
+      <p:sp>
+        <p:nvSpPr>
+          <p:cNvPr id="60" name="Google Shape;60;p7"/>
+          <p:cNvSpPr/>
+          <p:nvPr/>
+        </p:nvSpPr>
+        <p:spPr>
+          <a:xfrm>
+            <a:off x="3858768" y="2108343"/>
+            <a:ext cx="1993392" cy="502920"/>
+          </a:xfrm>
+          <a:prstGeom prst="rect">
+            <a:avLst/>
+          </a:prstGeom>
+          <a:noFill/>
+          <a:ln>
+            <a:noFill/>
+          </a:ln>
+        </p:spPr>
+        <p:txBody>
+          <a:bodyPr anchorCtr="0" anchor="ctr" bIns="0" lIns="0" spcFirstLastPara="1" rIns="0" wrap="square" tIns="0">
+            <a:noAutofit/>
+          </a:bodyPr>
+          <a:lstStyle/>
+          <a:p>
+            <a:pPr indent="0" lvl="0" marL="0" marR="0" rtl="0" algn="l">
+              <a:spcBef>
+                <a:spcPts val="0"/>
+              </a:spcBef>
+              <a:spcAft>
+                <a:spcPts val="0"/>
+              </a:spcAft>
+              <a:buClr>
+                <a:srgbClr val="C9A227"/>
+              </a:buClr>
+              <a:buSzPts val="2600"/>
+              <a:buFont typeface="Playfair Display"/>
+              <a:buNone/>
+            </a:pPr>
+            <a:r>
+              <a:rPr b="1" lang="en-US" sz="2600">
+                <a:solidFill>
+                  <a:srgbClr val="C9A227"/>
+                </a:solidFill>
+                <a:latin typeface="Playfair Display"/>
+                <a:ea typeface="Playfair Display"/>
+                <a:cs typeface="Playfair Display"/>
+                <a:sym typeface="Playfair Display"/>
+              </a:rPr>
+              <a:t>02</a:t>
+            </a:r>
+            <a:endParaRPr sz="2600">
+              <a:solidFill>
+                <a:schemeClr val="dk1"/>
+              </a:solidFill>
+              <a:latin typeface="Calibri"/>
+              <a:ea typeface="Calibri"/>
+              <a:cs typeface="Calibri"/>
+              <a:sym typeface="Calibri"/>
+            </a:endParaRPr>
+          </a:p>
+        </p:txBody>
+      </p:sp>
+      <p:sp>
+        <p:nvSpPr>
+          <p:cNvPr id="61" name="Google Shape;61;p7"/>
+          <p:cNvSpPr/>
+          <p:nvPr/>
+        </p:nvSpPr>
+        <p:spPr>
+          <a:xfrm>
+            <a:off x="3858768" y="2526355"/>
+            <a:ext cx="1993392" cy="594360"/>
+          </a:xfrm>
+          <a:prstGeom prst="rect">
+            <a:avLst/>
+          </a:prstGeom>
+          <a:noFill/>
+          <a:ln>
+            <a:noFill/>
+          </a:ln>
+        </p:spPr>
+        <p:txBody>
+          <a:bodyPr anchorCtr="0" anchor="ctr" bIns="0" lIns="0" spcFirstLastPara="1" rIns="0" wrap="square" tIns="0">
+            <a:noAutofit/>
+          </a:bodyPr>
+          <a:lstStyle/>
+          <a:p>
+            <a:pPr indent="0" lvl="0" marL="0" marR="0" rtl="0" algn="l">
+              <a:spcBef>
+                <a:spcPts val="0"/>
+              </a:spcBef>
+              <a:spcAft>
+                <a:spcPts val="0"/>
+              </a:spcAft>
+              <a:buClr>
+                <a:srgbClr val="F7F3E9"/>
+              </a:buClr>
+              <a:buSzPts val="1250"/>
+              <a:buFont typeface="Inter"/>
+              <a:buNone/>
+            </a:pPr>
+            <a:r>
+              <a:rPr b="1" lang="en-US" sz="1250">
+                <a:solidFill>
+                  <a:srgbClr val="F7F3E9"/>
+                </a:solidFill>
+                <a:latin typeface="Inter"/>
+                <a:ea typeface="Inter"/>
+                <a:cs typeface="Inter"/>
+                <a:sym typeface="Inter"/>
+              </a:rPr>
+              <a:t>WRITE IT DOWN</a:t>
+            </a:r>
+          </a:p>
+          <a:p>
+            <a:pPr indent="0" lvl="0" marL="0" marR="0" rtl="0" algn="l">
+              <a:spcBef>
+                <a:spcPts val="0"/>
+              </a:spcBef>
+              <a:spcAft>
+                <a:spcPts val="0"/>
+              </a:spcAft>
+              <a:buClr>
+                <a:srgbClr val="F7F3E9"/>
+              </a:buClr>
+              <a:buSzPts val="1250"/>
+              <a:buFont typeface="Inter"/>
+              <a:buNone/>
+            </a:pPr>
+            <a:r>
+              <a:rPr b="1" lang="en-US" sz="1250">
+                <a:solidFill>
+                  <a:srgbClr val="F7F3E9"/>
+                </a:solidFill>
+                <a:latin typeface="Inter"/>
+                <a:ea typeface="Inter"/>
+                <a:cs typeface="Inter"/>
+                <a:sym typeface="Inter"/>
+              </a:rPr>
+              <a:t>INSTRUCTIONS</a:t>
+            </a:r>
+          </a:p>
+        </p:txBody>
+      </p:sp>
+      <p:sp>
+        <p:nvSpPr>
+          <p:cNvPr id="62" name="Google Shape;62;p7"/>
+          <p:cNvSpPr/>
+          <p:nvPr/>
+        </p:nvSpPr>
+        <p:spPr>
+          <a:xfrm>
+            <a:off x="3858768" y="3310128"/>
+            <a:ext cx="1993392" cy="1235746"/>
+          </a:xfrm>
+          <a:prstGeom prst="rect">
+            <a:avLst/>
+          </a:prstGeom>
+          <a:noFill/>
+          <a:ln>
+            <a:noFill/>
+          </a:ln>
+        </p:spPr>
+        <p:txBody>
+          <a:bodyPr anchorCtr="0" anchor="ctr" bIns="0" lIns="0" spcFirstLastPara="1" rIns="0" wrap="square" tIns="0">
+            <a:noAutofit/>
+          </a:bodyPr>
+          <a:lstStyle/>
+          <a:p>
+            <a:pPr indent="0" lvl="0" marL="0" marR="0" rtl="0" algn="l">
+              <a:lnSpc>
+                <a:spcPct val="110000"/>
+              </a:lnSpc>
+              <a:spcBef>
+                <a:spcPts val="0"/>
+              </a:spcBef>
+              <a:spcAft>
+                <a:spcPts val="0"/>
+              </a:spcAft>
+              <a:buClr>
+                <a:srgbClr val="AFA893"/>
+              </a:buClr>
+              <a:buSzPts val="1600"/>
+              <a:buFont typeface="Inter"/>
+              <a:buNone/>
+            </a:pPr>
+            <a:r>
+              <a:rPr i="1" lang="en-US">
+                <a:solidFill>
+                  <a:srgbClr val="AFA893"/>
+                </a:solidFill>
+                <a:latin typeface="Inter"/>
+                <a:ea typeface="Inter"/>
+                <a:cs typeface="Inter"/>
+                <a:sym typeface="Inter"/>
+              </a:rPr>
+              <a:t>Rules you write once become rules she never forgets.</a:t>
+            </a:r>
+          </a:p>
+        </p:txBody>
+      </p:sp>
+      <p:sp>
+        <p:nvSpPr>
+          <p:cNvPr id="63" name="Google Shape;63;p7"/>
+          <p:cNvSpPr/>
+          <p:nvPr/>
+        </p:nvSpPr>
+        <p:spPr>
+          <a:xfrm>
+            <a:off x="6345936" y="2011680"/>
+            <a:ext cx="2542032" cy="3108960"/>
+          </a:xfrm>
+          <a:prstGeom prst="roundRect">
+            <a:avLst>
+              <a:gd fmla="val 2158" name="adj"/>
+            </a:avLst>
+          </a:prstGeom>
+          <a:solidFill>
+            <a:srgbClr val="1B2A4A"/>
+          </a:solidFill>
+          <a:ln cap="flat" cmpd="sng" w="9525">
+            <a:solidFill>
+              <a:srgbClr val="C9A227">
+                <a:alpha val="65098"/>
+              </a:srgbClr>
+            </a:solidFill>
+            <a:prstDash val="solid"/>
+            <a:round/>
+            <a:headEnd len="sm" w="sm" type="none"/>
+            <a:tailEnd len="sm" w="sm" type="none"/>
+          </a:ln>
+        </p:spPr>
+        <p:txBody>
+          <a:bodyPr anchorCtr="0" anchor="t" bIns="45700" lIns="91425" spcFirstLastPara="1" rIns="91425" wrap="square" tIns="45700">
+            <a:noAutofit/>
+          </a:bodyPr>
+          <a:lstStyle/>
+          <a:p>
+            <a:pPr indent="0" lvl="0" marL="0" marR="0" rtl="0" algn="l">
+              <a:spcBef>
+                <a:spcPts val="0"/>
+              </a:spcBef>
+              <a:spcAft>
+                <a:spcPts val="0"/>
+              </a:spcAft>
+              <a:buNone/>
+            </a:pPr>
+            <a:r>
+              <a:t/>
+            </a:r>
+            <a:endParaRPr sz="1800">
+              <a:solidFill>
+                <a:schemeClr val="dk1"/>
+              </a:solidFill>
+              <a:latin typeface="Calibri"/>
+              <a:ea typeface="Calibri"/>
+              <a:cs typeface="Calibri"/>
+              <a:sym typeface="Calibri"/>
+            </a:endParaRPr>
+          </a:p>
+        </p:txBody>
+      </p:sp>
+      <p:sp>
+        <p:nvSpPr>
+          <p:cNvPr id="64" name="Google Shape;64;p7"/>
+          <p:cNvSpPr/>
+          <p:nvPr/>
+        </p:nvSpPr>
+        <p:spPr>
+          <a:xfrm>
+            <a:off x="6620256" y="2108343"/>
+            <a:ext cx="1993392" cy="502920"/>
+          </a:xfrm>
+          <a:prstGeom prst="rect">
+            <a:avLst/>
+          </a:prstGeom>
+          <a:noFill/>
+          <a:ln>
+            <a:noFill/>
+          </a:ln>
+        </p:spPr>
+        <p:txBody>
+          <a:bodyPr anchorCtr="0" anchor="ctr" bIns="0" lIns="0" spcFirstLastPara="1" rIns="0" wrap="square" tIns="0">
+            <a:noAutofit/>
+          </a:bodyPr>
+          <a:lstStyle/>
+          <a:p>
+            <a:pPr indent="0" lvl="0" marL="0" marR="0" rtl="0" algn="l">
+              <a:spcBef>
+                <a:spcPts val="0"/>
+              </a:spcBef>
+              <a:spcAft>
+                <a:spcPts val="0"/>
+              </a:spcAft>
+              <a:buClr>
+                <a:srgbClr val="C9A227"/>
+              </a:buClr>
+              <a:buSzPts val="2600"/>
+              <a:buFont typeface="Playfair Display"/>
+              <a:buNone/>
+            </a:pPr>
+            <a:r>
+              <a:rPr b="1" lang="en-US" sz="2600">
+                <a:solidFill>
+                  <a:srgbClr val="C9A227"/>
+                </a:solidFill>
+                <a:latin typeface="Playfair Display"/>
+                <a:ea typeface="Playfair Display"/>
+                <a:cs typeface="Playfair Display"/>
+                <a:sym typeface="Playfair Display"/>
+              </a:rPr>
+              <a:t>03</a:t>
+            </a:r>
+            <a:endParaRPr sz="2600">
+              <a:solidFill>
+                <a:schemeClr val="dk1"/>
+              </a:solidFill>
+              <a:latin typeface="Calibri"/>
+              <a:ea typeface="Calibri"/>
+              <a:cs typeface="Calibri"/>
+              <a:sym typeface="Calibri"/>
+            </a:endParaRPr>
+          </a:p>
+        </p:txBody>
+      </p:sp>
+      <p:sp>
+        <p:nvSpPr>
+          <p:cNvPr id="65" name="Google Shape;65;p7"/>
+          <p:cNvSpPr/>
+          <p:nvPr/>
+        </p:nvSpPr>
+        <p:spPr>
+          <a:xfrm>
+            <a:off x="6620256" y="2526355"/>
+            <a:ext cx="1993392" cy="594360"/>
+          </a:xfrm>
+          <a:prstGeom prst="rect">
+            <a:avLst/>
+          </a:prstGeom>
+          <a:noFill/>
+          <a:ln>
+            <a:noFill/>
+          </a:ln>
+        </p:spPr>
+        <p:txBody>
+          <a:bodyPr anchorCtr="0" anchor="ctr" bIns="0" lIns="0" spcFirstLastPara="1" rIns="0" wrap="square" tIns="0">
+            <a:noAutofit/>
+          </a:bodyPr>
+          <a:lstStyle/>
+          <a:p>
+            <a:pPr indent="0" lvl="0" marL="0" marR="0" rtl="0" algn="l">
+              <a:spcBef>
+                <a:spcPts val="0"/>
+              </a:spcBef>
+              <a:spcAft>
+                <a:spcPts val="0"/>
+              </a:spcAft>
+              <a:buClr>
+                <a:srgbClr val="F7F3E9"/>
+              </a:buClr>
+              <a:buSzPts val="1250"/>
+              <a:buFont typeface="Inter"/>
+              <a:buNone/>
+            </a:pPr>
+            <a:r>
+              <a:rPr b="1" lang="en-US" sz="1250">
+                <a:solidFill>
+                  <a:srgbClr val="F7F3E9"/>
+                </a:solidFill>
+                <a:latin typeface="Inter"/>
+                <a:ea typeface="Inter"/>
+                <a:cs typeface="Inter"/>
+                <a:sym typeface="Inter"/>
+              </a:rPr>
+              <a:t>MAKE IT PORTABLE</a:t>
+            </a:r>
+          </a:p>
+          <a:p>
+            <a:pPr indent="0" lvl="0" marL="0" marR="0" rtl="0" algn="l">
+              <a:spcBef>
+                <a:spcPts val="0"/>
+              </a:spcBef>
+              <a:spcAft>
+                <a:spcPts val="0"/>
+              </a:spcAft>
+              <a:buClr>
+                <a:srgbClr val="F7F3E9"/>
+              </a:buClr>
+              <a:buSzPts val="1250"/>
+              <a:buFont typeface="Inter"/>
+              <a:buNone/>
+            </a:pPr>
+            <a:r>
+              <a:rPr b="1" lang="en-US" sz="1250">
+                <a:solidFill>
+                  <a:srgbClr val="F7F3E9"/>
+                </a:solidFill>
+                <a:latin typeface="Inter"/>
+                <a:ea typeface="Inter"/>
+                <a:cs typeface="Inter"/>
+                <a:sym typeface="Inter"/>
+              </a:rPr>
+              <a:t>A SKILL FILE</a:t>
+            </a:r>
+          </a:p>
+        </p:txBody>
+      </p:sp>
+      <p:sp>
+        <p:nvSpPr>
+          <p:cNvPr id="66" name="Google Shape;66;p7"/>
+          <p:cNvSpPr/>
+          <p:nvPr/>
+        </p:nvSpPr>
+        <p:spPr>
+          <a:xfrm>
+            <a:off x="6620256" y="3310128"/>
+            <a:ext cx="1993392" cy="1235746"/>
+          </a:xfrm>
+          <a:prstGeom prst="rect">
+            <a:avLst/>
+          </a:prstGeom>
+          <a:noFill/>
+          <a:ln>
+            <a:noFill/>
+          </a:ln>
+        </p:spPr>
+        <p:txBody>
+          <a:bodyPr anchorCtr="0" anchor="ctr" bIns="0" lIns="0" spcFirstLastPara="1" rIns="0" wrap="square" tIns="0">
+            <a:noAutofit/>
+          </a:bodyPr>
+          <a:lstStyle/>
+          <a:p>
+            <a:pPr indent="0" lvl="0" marL="0" marR="0" rtl="0" algn="l">
+              <a:lnSpc>
+                <a:spcPct val="110000"/>
+              </a:lnSpc>
+              <a:spcBef>
+                <a:spcPts val="0"/>
+              </a:spcBef>
+              <a:spcAft>
+                <a:spcPts val="0"/>
+              </a:spcAft>
+              <a:buClr>
+                <a:srgbClr val="AFA893"/>
+              </a:buClr>
+              <a:buSzPts val="1600"/>
+              <a:buFont typeface="Inter"/>
+              <a:buNone/>
+            </a:pPr>
+            <a:r>
+              <a:rPr i="1" lang="en-US">
+                <a:solidFill>
+                  <a:srgbClr val="AFA893"/>
+                </a:solidFill>
+                <a:latin typeface="Inter"/>
+                <a:ea typeface="Inter"/>
+                <a:cs typeface="Inter"/>
+                <a:sym typeface="Inter"/>
+              </a:rPr>
+              <a:t>Your rules become a file you own. It works anywhere Claude works.</a:t>
+            </a:r>
+          </a:p>
+        </p:txBody>
+      </p:sp>
+      <p:sp>
+        <p:nvSpPr>
+          <p:cNvPr id="67" name="Google Shape;67;p7"/>
+          <p:cNvSpPr/>
+          <p:nvPr/>
+        </p:nvSpPr>
+        <p:spPr>
+          <a:xfrm>
+            <a:off x="9107424" y="2011680"/>
+            <a:ext cx="2542032" cy="3108960"/>
+          </a:xfrm>
+          <a:prstGeom prst="roundRect">
+            <a:avLst>
+              <a:gd fmla="val 2158" name="adj"/>
+            </a:avLst>
+          </a:prstGeom>
+          <a:solidFill>
+            <a:srgbClr val="1B2A4A"/>
+          </a:solidFill>
+          <a:ln cap="flat" cmpd="sng" w="9525">
+            <a:solidFill>
+              <a:srgbClr val="C9A227">
+                <a:alpha val="65098"/>
+              </a:srgbClr>
+            </a:solidFill>
+            <a:prstDash val="solid"/>
+            <a:round/>
+            <a:headEnd len="sm" w="sm" type="none"/>
+            <a:tailEnd len="sm" w="sm" type="none"/>
+          </a:ln>
+        </p:spPr>
+        <p:txBody>
+          <a:bodyPr anchorCtr="0" anchor="t" bIns="45700" lIns="91425" spcFirstLastPara="1" rIns="91425" wrap="square" tIns="45700">
+            <a:noAutofit/>
+          </a:bodyPr>
+          <a:lstStyle/>
+          <a:p>
+            <a:pPr indent="0" lvl="0" marL="0" marR="0" rtl="0" algn="l">
+              <a:spcBef>
+                <a:spcPts val="0"/>
+              </a:spcBef>
+              <a:spcAft>
+                <a:spcPts val="0"/>
+              </a:spcAft>
+              <a:buNone/>
+            </a:pPr>
+            <a:r>
+              <a:t/>
+            </a:r>
+            <a:endParaRPr sz="1800">
+              <a:solidFill>
+                <a:schemeClr val="dk1"/>
+              </a:solidFill>
+              <a:latin typeface="Calibri"/>
+              <a:ea typeface="Calibri"/>
+              <a:cs typeface="Calibri"/>
+              <a:sym typeface="Calibri"/>
+            </a:endParaRPr>
+          </a:p>
+        </p:txBody>
+      </p:sp>
+      <p:sp>
+        <p:nvSpPr>
+          <p:cNvPr id="68" name="Google Shape;68;p7"/>
+          <p:cNvSpPr/>
+          <p:nvPr/>
+        </p:nvSpPr>
+        <p:spPr>
+          <a:xfrm>
+            <a:off x="9381744" y="2108343"/>
+            <a:ext cx="1993392" cy="502920"/>
+          </a:xfrm>
+          <a:prstGeom prst="rect">
+            <a:avLst/>
+          </a:prstGeom>
+          <a:noFill/>
+          <a:ln>
+            <a:noFill/>
+          </a:ln>
+        </p:spPr>
+        <p:txBody>
+          <a:bodyPr anchorCtr="0" anchor="ctr" bIns="0" lIns="0" spcFirstLastPara="1" rIns="0" wrap="square" tIns="0">
+            <a:noAutofit/>
+          </a:bodyPr>
+          <a:lstStyle/>
+          <a:p>
+            <a:pPr indent="0" lvl="0" marL="0" marR="0" rtl="0" algn="l">
+              <a:spcBef>
+                <a:spcPts val="0"/>
+              </a:spcBef>
+              <a:spcAft>
+                <a:spcPts val="0"/>
+              </a:spcAft>
+              <a:buClr>
+                <a:srgbClr val="C9A227"/>
+              </a:buClr>
+              <a:buSzPts val="2600"/>
+              <a:buFont typeface="Playfair Display"/>
+              <a:buNone/>
+            </a:pPr>
+            <a:r>
+              <a:rPr b="1" lang="en-US" sz="2600">
+                <a:solidFill>
+                  <a:srgbClr val="C9A227"/>
+                </a:solidFill>
+                <a:latin typeface="Playfair Display"/>
+                <a:ea typeface="Playfair Display"/>
+                <a:cs typeface="Playfair Display"/>
+                <a:sym typeface="Playfair Display"/>
+              </a:rPr>
+              <a:t>04</a:t>
+            </a:r>
+            <a:endParaRPr sz="2600">
+              <a:solidFill>
+                <a:schemeClr val="dk1"/>
+              </a:solidFill>
+              <a:latin typeface="Calibri"/>
+              <a:ea typeface="Calibri"/>
+              <a:cs typeface="Calibri"/>
+              <a:sym typeface="Calibri"/>
+            </a:endParaRPr>
+          </a:p>
+        </p:txBody>
+      </p:sp>
+      <p:sp>
+        <p:nvSpPr>
+          <p:cNvPr id="69" name="Google Shape;69;p7"/>
+          <p:cNvSpPr/>
+          <p:nvPr/>
+        </p:nvSpPr>
+        <p:spPr>
+          <a:xfrm>
+            <a:off x="9381744" y="2526355"/>
+            <a:ext cx="1993392" cy="594360"/>
+          </a:xfrm>
+          <a:prstGeom prst="rect">
+            <a:avLst/>
+          </a:prstGeom>
+          <a:noFill/>
+          <a:ln>
+            <a:noFill/>
+          </a:ln>
+        </p:spPr>
+        <p:txBody>
+          <a:bodyPr anchorCtr="0" anchor="ctr" bIns="0" lIns="0" spcFirstLastPara="1" rIns="0" wrap="square" tIns="0">
+            <a:noAutofit/>
+          </a:bodyPr>
+          <a:lstStyle/>
+          <a:p>
+            <a:pPr indent="0" lvl="0" marL="0" marR="0" rtl="0" algn="l">
+              <a:spcBef>
+                <a:spcPts val="0"/>
+              </a:spcBef>
+              <a:spcAft>
+                <a:spcPts val="0"/>
+              </a:spcAft>
+              <a:buClr>
+                <a:srgbClr val="F7F3E9"/>
+              </a:buClr>
+              <a:buSzPts val="1250"/>
+              <a:buFont typeface="Inter"/>
+              <a:buNone/>
+            </a:pPr>
+            <a:r>
+              <a:rPr b="1" lang="en-US" sz="1250">
+                <a:solidFill>
+                  <a:srgbClr val="F7F3E9"/>
+                </a:solidFill>
+                <a:latin typeface="Inter"/>
+                <a:ea typeface="Inter"/>
+                <a:cs typeface="Inter"/>
+                <a:sym typeface="Inter"/>
+              </a:rPr>
+              <a:t>PUT IT ON THE CLOCK</a:t>
+            </a:r>
+          </a:p>
+          <a:p>
+            <a:pPr indent="0" lvl="0" marL="0" marR="0" rtl="0" algn="l">
+              <a:spcBef>
+                <a:spcPts val="0"/>
+              </a:spcBef>
+              <a:spcAft>
+                <a:spcPts val="0"/>
+              </a:spcAft>
+              <a:buClr>
+                <a:srgbClr val="F7F3E9"/>
+              </a:buClr>
+              <a:buSzPts val="1250"/>
+              <a:buFont typeface="Inter"/>
+              <a:buNone/>
+            </a:pPr>
+            <a:r>
+              <a:rPr b="1" lang="en-US" sz="1250">
+                <a:solidFill>
+                  <a:srgbClr val="F7F3E9"/>
+                </a:solidFill>
+                <a:latin typeface="Inter"/>
+                <a:ea typeface="Inter"/>
+                <a:cs typeface="Inter"/>
+                <a:sym typeface="Inter"/>
+              </a:rPr>
+              <a:t>A SCHEDULE</a:t>
+            </a:r>
+          </a:p>
+        </p:txBody>
+      </p:sp>
+      <p:sp>
+        <p:nvSpPr>
+          <p:cNvPr id="70" name="Google Shape;70;p7"/>
+          <p:cNvSpPr/>
+          <p:nvPr/>
+        </p:nvSpPr>
+        <p:spPr>
+          <a:xfrm>
+            <a:off x="9381744" y="3310128"/>
+            <a:ext cx="1993392" cy="1235746"/>
+          </a:xfrm>
+          <a:prstGeom prst="rect">
+            <a:avLst/>
+          </a:prstGeom>
+          <a:noFill/>
+          <a:ln>
+            <a:noFill/>
+          </a:ln>
+        </p:spPr>
+        <p:txBody>
+          <a:bodyPr anchorCtr="0" anchor="ctr" bIns="0" lIns="0" spcFirstLastPara="1" rIns="0" wrap="square" tIns="0">
+            <a:noAutofit/>
+          </a:bodyPr>
+          <a:lstStyle/>
+          <a:p>
+            <a:pPr indent="0" lvl="0" marL="0" marR="0" rtl="0" algn="l">
+              <a:lnSpc>
+                <a:spcPct val="110000"/>
+              </a:lnSpc>
+              <a:spcBef>
+                <a:spcPts val="0"/>
+              </a:spcBef>
+              <a:spcAft>
+                <a:spcPts val="0"/>
+              </a:spcAft>
+              <a:buClr>
+                <a:srgbClr val="AFA893"/>
+              </a:buClr>
+              <a:buSzPts val="1600"/>
+              <a:buFont typeface="Inter"/>
+              <a:buNone/>
+            </a:pPr>
+            <a:r>
+              <a:rPr i="1" lang="en-US">
+                <a:solidFill>
+                  <a:srgbClr val="AFA893"/>
+                </a:solidFill>
+                <a:latin typeface="Inter"/>
+                <a:ea typeface="Inter"/>
+                <a:cs typeface="Inter"/>
+                <a:sym typeface="Inter"/>
+              </a:rPr>
+              <a:t>She runs the whole workflow without you, every single day.</a:t>
+            </a:r>
+          </a:p>
+        </p:txBody>
+      </p:sp>
+      <p:sp>
+        <p:nvSpPr>
+          <p:cNvPr id="71" name="Google Shape;71;p7"/>
+          <p:cNvSpPr/>
+          <p:nvPr/>
+        </p:nvSpPr>
+        <p:spPr>
+          <a:xfrm>
+            <a:off x="822960" y="5440680"/>
+            <a:ext cx="10545775" cy="457200"/>
+          </a:xfrm>
+          <a:prstGeom prst="rect">
+            <a:avLst/>
+          </a:prstGeom>
+          <a:noFill/>
+          <a:ln>
+            <a:noFill/>
+          </a:ln>
+        </p:spPr>
+        <p:txBody>
+          <a:bodyPr anchorCtr="0" anchor="ctr" bIns="0" lIns="0" spcFirstLastPara="1" rIns="0" wrap="square" tIns="0">
+            <a:noAutofit/>
+          </a:bodyPr>
+          <a:lstStyle/>
+          <a:p>
+            <a:pPr indent="0" lvl="0" marL="0" marR="0" rtl="0" algn="l">
+              <a:spcBef>
+                <a:spcPts val="0"/>
+              </a:spcBef>
+              <a:spcAft>
+                <a:spcPts val="0"/>
+              </a:spcAft>
+              <a:buClr>
+                <a:srgbClr val="AFA893"/>
+              </a:buClr>
+              <a:buSzPts val="2400"/>
+              <a:buFont typeface="Inter"/>
+              <a:buNone/>
+            </a:pPr>
+            <a:r>
+              <a:rPr i="1" lang="en-US" sz="2400">
+                <a:solidFill>
+                  <a:srgbClr val="AFA893"/>
+                </a:solidFill>
+                <a:latin typeface="Inter"/>
+                <a:ea typeface="Inter"/>
+                <a:cs typeface="Inter"/>
+                <a:sym typeface="Inter"/>
+              </a:rPr>
+              <a:t>That ladder is the entire discipline of AI workflow automation. Today you climb it once, on your inbox.</a:t>
+            </a:r>
+          </a:p>
+        </p:txBody>
+      </p:sp>
+      <p:sp>
+        <p:nvSpPr>
+          <p:cNvPr id="72" name="Google Shape;72;p7"/>
+          <p:cNvSpPr/>
+          <p:nvPr/>
+        </p:nvSpPr>
+        <p:spPr>
+          <a:xfrm>
+            <a:off x="1090879" y="4526280"/>
+            <a:ext cx="1993392" cy="502920"/>
+          </a:xfrm>
+          <a:prstGeom prst="rect">
+            <a:avLst/>
+          </a:prstGeom>
+          <a:noFill/>
+          <a:ln>
+            <a:noFill/>
+          </a:ln>
+        </p:spPr>
+        <p:txBody>
+          <a:bodyPr anchorCtr="0" anchor="ctr" bIns="0" lIns="0" spcFirstLastPara="1" rIns="0" wrap="square" tIns="0">
+            <a:noAutofit/>
+          </a:bodyPr>
+          <a:lstStyle/>
+          <a:p>
+            <a:pPr indent="0" lvl="0" marL="0" marR="0" rtl="0" algn="l">
+              <a:spcBef>
+                <a:spcPts val="0"/>
+              </a:spcBef>
+              <a:spcAft>
+                <a:spcPts val="0"/>
+              </a:spcAft>
+              <a:buClr>
+                <a:srgbClr val="C9A227"/>
+              </a:buClr>
+              <a:buSzPts val="1600"/>
+              <a:buFont typeface="Playfair Display"/>
+              <a:buNone/>
+            </a:pPr>
+            <a:r>
+              <a:rPr b="1" lang="en-US" sz="1600">
+                <a:solidFill>
+                  <a:srgbClr val="C9A227"/>
+                </a:solidFill>
+                <a:latin typeface="Playfair Display"/>
+                <a:ea typeface="Playfair Display"/>
+                <a:cs typeface="Playfair Display"/>
+                <a:sym typeface="Playfair Display"/>
+              </a:rPr>
+              <a:t>Today: your prompts</a:t>
+            </a:r>
+          </a:p>
+        </p:txBody>
+      </p:sp>
+      <p:sp>
+        <p:nvSpPr>
+          <p:cNvPr id="73" name="Google Shape;73;p7"/>
+          <p:cNvSpPr/>
+          <p:nvPr/>
+        </p:nvSpPr>
+        <p:spPr>
+          <a:xfrm>
+            <a:off x="3852367" y="4526280"/>
+            <a:ext cx="1993392" cy="502920"/>
+          </a:xfrm>
+          <a:prstGeom prst="rect">
+            <a:avLst/>
+          </a:prstGeom>
+          <a:noFill/>
+          <a:ln>
+            <a:noFill/>
+          </a:ln>
+        </p:spPr>
+        <p:txBody>
+          <a:bodyPr anchorCtr="0" anchor="ctr" bIns="0" lIns="0" spcFirstLastPara="1" rIns="0" wrap="square" tIns="0">
+            <a:noAutofit/>
+          </a:bodyPr>
+          <a:lstStyle/>
+          <a:p>
+            <a:pPr indent="0" lvl="0" marL="0" marR="0" rtl="0" algn="l">
+              <a:spcBef>
+                <a:spcPts val="0"/>
+              </a:spcBef>
+              <a:spcAft>
+                <a:spcPts val="0"/>
+              </a:spcAft>
+              <a:buClr>
+                <a:srgbClr val="C9A227"/>
+              </a:buClr>
+              <a:buSzPts val="1600"/>
+              <a:buFont typeface="Playfair Display"/>
+              <a:buNone/>
+            </a:pPr>
+            <a:r>
+              <a:rPr b="1" lang="en-US" sz="1600">
+                <a:solidFill>
+                  <a:srgbClr val="C9A227"/>
+                </a:solidFill>
+                <a:latin typeface="Playfair Display"/>
+                <a:ea typeface="Playfair Display"/>
+                <a:cs typeface="Playfair Display"/>
+                <a:sym typeface="Playfair Display"/>
+              </a:rPr>
+              <a:t>Today: the desk manual</a:t>
+            </a:r>
+          </a:p>
+        </p:txBody>
+      </p:sp>
+      <p:sp>
+        <p:nvSpPr>
+          <p:cNvPr id="74" name="Google Shape;74;p7"/>
+          <p:cNvSpPr/>
+          <p:nvPr/>
+        </p:nvSpPr>
+        <p:spPr>
+          <a:xfrm>
+            <a:off x="6613855" y="4526280"/>
+            <a:ext cx="1993392" cy="502920"/>
+          </a:xfrm>
+          <a:prstGeom prst="rect">
+            <a:avLst/>
+          </a:prstGeom>
+          <a:noFill/>
+          <a:ln>
+            <a:noFill/>
+          </a:ln>
+        </p:spPr>
+        <p:txBody>
+          <a:bodyPr anchorCtr="0" anchor="ctr" bIns="0" lIns="0" spcFirstLastPara="1" rIns="0" wrap="square" tIns="0">
+            <a:noAutofit/>
+          </a:bodyPr>
+          <a:lstStyle/>
+          <a:p>
+            <a:pPr indent="0" lvl="0" marL="0" marR="0" rtl="0" algn="l">
+              <a:spcBef>
+                <a:spcPts val="0"/>
+              </a:spcBef>
+              <a:spcAft>
+                <a:spcPts val="0"/>
+              </a:spcAft>
+              <a:buClr>
+                <a:srgbClr val="C9A227"/>
+              </a:buClr>
+              <a:buSzPts val="1600"/>
+              <a:buFont typeface="Playfair Display"/>
+              <a:buNone/>
+            </a:pPr>
+            <a:r>
+              <a:rPr b="1" lang="en-US" sz="1600">
+                <a:solidFill>
+                  <a:srgbClr val="C9A227"/>
+                </a:solidFill>
+                <a:latin typeface="Playfair Display"/>
+                <a:ea typeface="Playfair Display"/>
+                <a:cs typeface="Playfair Display"/>
+                <a:sym typeface="Playfair Display"/>
+              </a:rPr>
+              <a:t>Today: donna-replies</a:t>
+            </a:r>
+          </a:p>
+        </p:txBody>
+      </p:sp>
+      <p:sp>
+        <p:nvSpPr>
+          <p:cNvPr id="75" name="Google Shape;75;p7"/>
+          <p:cNvSpPr/>
+          <p:nvPr/>
+        </p:nvSpPr>
+        <p:spPr>
+          <a:xfrm>
+            <a:off x="9375343" y="4526280"/>
+            <a:ext cx="1993392" cy="502920"/>
+          </a:xfrm>
+          <a:prstGeom prst="rect">
+            <a:avLst/>
+          </a:prstGeom>
+          <a:noFill/>
+          <a:ln>
+            <a:noFill/>
+          </a:ln>
+        </p:spPr>
+        <p:txBody>
+          <a:bodyPr anchorCtr="0" anchor="ctr" bIns="0" lIns="0" spcFirstLastPara="1" rIns="0" wrap="square" tIns="0">
+            <a:noAutofit/>
+          </a:bodyPr>
+          <a:lstStyle/>
+          <a:p>
+            <a:pPr indent="0" lvl="0" marL="0" marR="0" rtl="0" algn="l">
+              <a:spcBef>
+                <a:spcPts val="0"/>
+              </a:spcBef>
+              <a:spcAft>
+                <a:spcPts val="0"/>
+              </a:spcAft>
+              <a:buClr>
+                <a:srgbClr val="C9A227"/>
+              </a:buClr>
+              <a:buSzPts val="1600"/>
+              <a:buFont typeface="Playfair Display"/>
+              <a:buNone/>
+            </a:pPr>
+            <a:r>
+              <a:rPr b="1" lang="en-US" sz="1600">
+                <a:solidFill>
+                  <a:srgbClr val="C9A227"/>
+                </a:solidFill>
+                <a:latin typeface="Playfair Display"/>
+                <a:ea typeface="Playfair Display"/>
+                <a:cs typeface="Playfair Display"/>
+                <a:sym typeface="Playfair Display"/>
+              </a:rPr>
+              <a:t>Today: the 4:30 shift</a:t>
+            </a:r>
+          </a:p>
+        </p:txBody>
+      </p:sp>
+    </p:spTree>
+  </p:cSld>
+  <p:clrMapOvr>
+    <a:masterClrMapping/>
+  </p:clrMapOvr>
+</p:sld>
+</file>
+
+<file path=ppt/slides/slide19.xml><?xml version="1.0" encoding="utf-8"?>
+<p:sld xmlns:a="http://schemas.openxmlformats.org/drawingml/2006/main" xmlns:r="http://schemas.openxmlformats.org/officeDocument/2006/relationships" xmlns:mc="http://schemas.openxmlformats.org/markup-compatibility/2006" xmlns:mv="urn:schemas-microsoft-com:mac:vml" xmlns:p="http://schemas.openxmlformats.org/presentationml/2006/main" xmlns:c="http://schemas.openxmlformats.org/drawingml/2006/chart" xmlns:dgm="http://schemas.openxmlformats.org/drawingml/2006/diagram" xmlns:o="urn:schemas-microsoft-com:office:office" xmlns:v="urn:schemas-microsoft-com:vml" xmlns:pvml="urn:schemas-microsoft-com:office:powerpoint" xmlns:com="http://schemas.openxmlformats.org/drawingml/2006/compatibility" xmlns:p14="http://schemas.microsoft.com/office/powerpoint/2010/main" xmlns:p15="http://schemas.microsoft.com/office/powerpoint/2012/main" xmlns:ahyp="http://schemas.microsoft.com/office/drawing/2018/hyperlinkcolor">
+  <p:cSld>
+    <p:bg>
+      <p:bgPr>
+        <a:solidFill>
+          <a:srgbClr val="14213D"/>
+        </a:solidFill>
+      </p:bgPr>
+    </p:bg>
+    <p:spTree>
+      <p:nvGrpSpPr>
+        <p:cNvPr id="52" name="Shape 52"/>
+        <p:cNvGrpSpPr/>
+        <p:nvPr/>
+      </p:nvGrpSpPr>
+      <p:grpSpPr>
+        <a:xfrm>
+          <a:off x="0" y="0"/>
+          <a:ext cx="0" cy="0"/>
+          <a:chOff x="0" y="0"/>
+          <a:chExt cx="0" cy="0"/>
+        </a:xfrm>
+      </p:grpSpPr>
+      <p:sp>
+        <p:nvSpPr>
+          <p:cNvPr id="53" name="Google Shape;53;p7"/>
+          <p:cNvSpPr/>
+          <p:nvPr/>
+        </p:nvSpPr>
+        <p:spPr>
+          <a:xfrm>
+            <a:off x="822960" y="502920"/>
+            <a:ext cx="10545775" cy="365760"/>
+          </a:xfrm>
+          <a:prstGeom prst="rect">
+            <a:avLst/>
+          </a:prstGeom>
+          <a:noFill/>
+          <a:ln>
+            <a:noFill/>
+          </a:ln>
+        </p:spPr>
+        <p:txBody>
+          <a:bodyPr anchorCtr="0" anchor="ctr" bIns="0" lIns="0" spcFirstLastPara="1" rIns="0" wrap="square" tIns="0">
+            <a:noAutofit/>
+          </a:bodyPr>
+          <a:lstStyle/>
+          <a:p>
+            <a:pPr indent="0" lvl="0" marL="0" marR="0" rtl="0" algn="l">
+              <a:spcBef>
+                <a:spcPts val="0"/>
+              </a:spcBef>
+              <a:spcAft>
+                <a:spcPts val="0"/>
+              </a:spcAft>
+              <a:buClr>
+                <a:srgbClr val="DDB94A"/>
+              </a:buClr>
+              <a:buSzPts val="1200"/>
+              <a:buFont typeface="Inter"/>
+              <a:buNone/>
+            </a:pPr>
+            <a:r>
+              <a:rPr b="1" lang="en-US" sz="1200">
+                <a:solidFill>
+                  <a:srgbClr val="DDB94A"/>
+                </a:solidFill>
+                <a:latin typeface="Inter"/>
+                <a:ea typeface="Inter"/>
+                <a:cs typeface="Inter"/>
+                <a:sym typeface="Inter"/>
+              </a:rPr>
+              <a:t>WHERE ELSE SHE WORKS</a:t>
+            </a:r>
+          </a:p>
+        </p:txBody>
+      </p:sp>
+      <p:sp>
+        <p:nvSpPr>
+          <p:cNvPr id="54" name="Google Shape;54;p7"/>
+          <p:cNvSpPr/>
+          <p:nvPr/>
+        </p:nvSpPr>
+        <p:spPr>
+          <a:xfrm>
+            <a:off x="822960" y="868680"/>
+            <a:ext cx="10545775" cy="777240"/>
+          </a:xfrm>
+          <a:prstGeom prst="rect">
+            <a:avLst/>
+          </a:prstGeom>
+          <a:noFill/>
+          <a:ln>
+            <a:noFill/>
+          </a:ln>
+        </p:spPr>
+        <p:txBody>
+          <a:bodyPr anchorCtr="0" anchor="ctr" bIns="0" lIns="0" spcFirstLastPara="1" rIns="0" wrap="square" tIns="0">
+            <a:noAutofit/>
+          </a:bodyPr>
+          <a:lstStyle/>
+          <a:p>
+            <a:pPr indent="0" lvl="0" marL="0" marR="0" rtl="0" algn="l">
+              <a:spcBef>
+                <a:spcPts val="0"/>
+              </a:spcBef>
+              <a:spcAft>
+                <a:spcPts val="0"/>
+              </a:spcAft>
+              <a:buClr>
+                <a:srgbClr val="F7F3E9"/>
+              </a:buClr>
+              <a:buSzPts val="3800"/>
+              <a:buFont typeface="Playfair Display"/>
+              <a:buNone/>
+            </a:pPr>
+            <a:r>
+              <a:rPr b="1" lang="en-US" sz="3800">
+                <a:solidFill>
+                  <a:srgbClr val="F7F3E9"/>
+                </a:solidFill>
+                <a:latin typeface="Playfair Display"/>
+                <a:ea typeface="Playfair Display"/>
+                <a:cs typeface="Playfair Display"/>
+                <a:sym typeface="Playfair Display"/>
+              </a:rPr>
+              <a:t>Same ladder, different workflows</a:t>
+            </a:r>
+          </a:p>
+        </p:txBody>
+      </p:sp>
+      <p:sp>
+        <p:nvSpPr>
+          <p:cNvPr id="55" name="Google Shape;55;p7"/>
+          <p:cNvSpPr/>
+          <p:nvPr/>
+        </p:nvSpPr>
+        <p:spPr>
+          <a:xfrm>
+            <a:off x="822960" y="2011680"/>
+            <a:ext cx="2542032" cy="3108960"/>
+          </a:xfrm>
+          <a:prstGeom prst="roundRect">
+            <a:avLst>
+              <a:gd fmla="val 2158" name="adj"/>
+            </a:avLst>
+          </a:prstGeom>
+          <a:solidFill>
+            <a:srgbClr val="1B2A4A"/>
+          </a:solidFill>
+          <a:ln cap="flat" cmpd="sng" w="9525">
+            <a:solidFill>
+              <a:srgbClr val="C9A227">
+                <a:alpha val="65098"/>
+              </a:srgbClr>
+            </a:solidFill>
+            <a:prstDash val="solid"/>
+            <a:round/>
+            <a:headEnd len="sm" w="sm" type="none"/>
+            <a:tailEnd len="sm" w="sm" type="none"/>
+          </a:ln>
+        </p:spPr>
+        <p:txBody>
+          <a:bodyPr anchorCtr="0" anchor="t" bIns="45700" lIns="91425" spcFirstLastPara="1" rIns="91425" wrap="square" tIns="45700">
+            <a:noAutofit/>
+          </a:bodyPr>
+          <a:lstStyle/>
+          <a:p>
+            <a:pPr indent="0" lvl="0" marL="0" marR="0" rtl="0" algn="l">
+              <a:spcBef>
+                <a:spcPts val="0"/>
+              </a:spcBef>
+              <a:spcAft>
+                <a:spcPts val="0"/>
+              </a:spcAft>
+              <a:buNone/>
+            </a:pPr>
+            <a:r>
+              <a:t/>
+            </a:r>
+            <a:endParaRPr sz="1800">
+              <a:solidFill>
+                <a:schemeClr val="dk1"/>
+              </a:solidFill>
+              <a:latin typeface="Calibri"/>
+              <a:ea typeface="Calibri"/>
+              <a:cs typeface="Calibri"/>
+              <a:sym typeface="Calibri"/>
+            </a:endParaRPr>
+          </a:p>
+        </p:txBody>
+      </p:sp>
+      <p:sp>
+        <p:nvSpPr>
+          <p:cNvPr id="56" name="Google Shape;56;p7"/>
+          <p:cNvSpPr/>
+          <p:nvPr/>
+        </p:nvSpPr>
+        <p:spPr>
+          <a:xfrm>
+            <a:off x="1097280" y="2108343"/>
+            <a:ext cx="1993392" cy="502920"/>
+          </a:xfrm>
+          <a:prstGeom prst="rect">
+            <a:avLst/>
+          </a:prstGeom>
+          <a:noFill/>
+          <a:ln>
+            <a:noFill/>
+          </a:ln>
+        </p:spPr>
+        <p:txBody>
+          <a:bodyPr anchorCtr="0" anchor="ctr" bIns="0" lIns="0" spcFirstLastPara="1" rIns="0" wrap="square" tIns="0">
+            <a:noAutofit/>
+          </a:bodyPr>
+          <a:lstStyle/>
+          <a:p>
+            <a:pPr indent="0" lvl="0" marL="0" marR="0" rtl="0" algn="l">
+              <a:spcBef>
+                <a:spcPts val="0"/>
+              </a:spcBef>
+              <a:spcAft>
+                <a:spcPts val="0"/>
+              </a:spcAft>
+              <a:buClr>
+                <a:srgbClr val="C9A227"/>
+              </a:buClr>
+              <a:buSzPts val="2600"/>
+              <a:buFont typeface="Playfair Display"/>
+              <a:buNone/>
+            </a:pPr>
+            <a:r>
+              <a:rPr b="1" lang="en-US" sz="2600">
+                <a:solidFill>
+                  <a:srgbClr val="C9A227"/>
+                </a:solidFill>
+                <a:latin typeface="Playfair Display"/>
+                <a:ea typeface="Playfair Display"/>
+                <a:cs typeface="Playfair Display"/>
+                <a:sym typeface="Playfair Display"/>
+              </a:rPr>
+              <a:t>01</a:t>
+            </a:r>
+            <a:endParaRPr sz="2600">
+              <a:solidFill>
+                <a:schemeClr val="dk1"/>
+              </a:solidFill>
+              <a:latin typeface="Calibri"/>
+              <a:ea typeface="Calibri"/>
+              <a:cs typeface="Calibri"/>
+              <a:sym typeface="Calibri"/>
+            </a:endParaRPr>
+          </a:p>
+        </p:txBody>
+      </p:sp>
+      <p:sp>
+        <p:nvSpPr>
+          <p:cNvPr id="57" name="Google Shape;57;p7"/>
+          <p:cNvSpPr/>
+          <p:nvPr/>
+        </p:nvSpPr>
+        <p:spPr>
+          <a:xfrm>
+            <a:off x="1097280" y="2526355"/>
+            <a:ext cx="1993392" cy="594360"/>
+          </a:xfrm>
+          <a:prstGeom prst="rect">
+            <a:avLst/>
+          </a:prstGeom>
+          <a:noFill/>
+          <a:ln>
+            <a:noFill/>
+          </a:ln>
+        </p:spPr>
+        <p:txBody>
+          <a:bodyPr anchorCtr="0" anchor="ctr" bIns="0" lIns="0" spcFirstLastPara="1" rIns="0" wrap="square" tIns="0">
+            <a:noAutofit/>
+          </a:bodyPr>
+          <a:lstStyle/>
+          <a:p>
+            <a:pPr indent="0" lvl="0" marL="0" marR="0" rtl="0" algn="l">
+              <a:spcBef>
+                <a:spcPts val="0"/>
+              </a:spcBef>
+              <a:spcAft>
+                <a:spcPts val="0"/>
+              </a:spcAft>
+              <a:buClr>
+                <a:srgbClr val="F7F3E9"/>
+              </a:buClr>
+              <a:buSzPts val="1250"/>
+              <a:buFont typeface="Inter"/>
+              <a:buNone/>
+            </a:pPr>
+            <a:r>
+              <a:rPr b="1" lang="en-US" sz="1250">
+                <a:solidFill>
+                  <a:srgbClr val="F7F3E9"/>
+                </a:solidFill>
+                <a:latin typeface="Inter"/>
+                <a:ea typeface="Inter"/>
+                <a:cs typeface="Inter"/>
+                <a:sym typeface="Inter"/>
+              </a:rPr>
+              <a:t>TWO CALENDARS</a:t>
+            </a:r>
+          </a:p>
+          <a:p>
+            <a:pPr indent="0" lvl="0" marL="0" marR="0" rtl="0" algn="l">
+              <a:spcBef>
+                <a:spcPts val="0"/>
+              </a:spcBef>
+              <a:spcAft>
+                <a:spcPts val="0"/>
+              </a:spcAft>
+              <a:buClr>
+                <a:srgbClr val="F7F3E9"/>
+              </a:buClr>
+              <a:buSzPts val="1250"/>
+              <a:buFont typeface="Inter"/>
+              <a:buNone/>
+            </a:pPr>
+            <a:r>
+              <a:rPr b="1" lang="en-US" sz="1250">
+                <a:solidFill>
+                  <a:srgbClr val="F7F3E9"/>
+                </a:solidFill>
+                <a:latin typeface="Inter"/>
+                <a:ea typeface="Inter"/>
+                <a:cs typeface="Inter"/>
+                <a:sym typeface="Inter"/>
+              </a:rPr>
+              <a:t>THE MORNING SHIFT</a:t>
+            </a:r>
+          </a:p>
+        </p:txBody>
+      </p:sp>
+      <p:sp>
+        <p:nvSpPr>
+          <p:cNvPr id="58" name="Google Shape;58;p7"/>
+          <p:cNvSpPr/>
+          <p:nvPr/>
+        </p:nvSpPr>
+        <p:spPr>
+          <a:xfrm>
+            <a:off x="1097280" y="3310128"/>
+            <a:ext cx="1993392" cy="1235746"/>
+          </a:xfrm>
+          <a:prstGeom prst="rect">
+            <a:avLst/>
+          </a:prstGeom>
+          <a:noFill/>
+          <a:ln>
+            <a:noFill/>
+          </a:ln>
+        </p:spPr>
+        <p:txBody>
+          <a:bodyPr anchorCtr="0" anchor="ctr" bIns="0" lIns="0" spcFirstLastPara="1" rIns="0" wrap="square" tIns="0">
+            <a:noAutofit/>
+          </a:bodyPr>
+          <a:lstStyle/>
+          <a:p>
+            <a:pPr indent="0" lvl="0" marL="0" marR="0" rtl="0" algn="l">
+              <a:lnSpc>
+                <a:spcPct val="110000"/>
+              </a:lnSpc>
+              <a:spcBef>
+                <a:spcPts val="0"/>
+              </a:spcBef>
+              <a:spcAft>
+                <a:spcPts val="0"/>
+              </a:spcAft>
+              <a:buClr>
+                <a:srgbClr val="AFA893"/>
+              </a:buClr>
+              <a:buSzPts val="1600"/>
+              <a:buFont typeface="Inter"/>
+              <a:buNone/>
+            </a:pPr>
+            <a:r>
+              <a:rPr i="1" lang="en-US">
+                <a:solidFill>
+                  <a:srgbClr val="AFA893"/>
+                </a:solidFill>
+                <a:latin typeface="Inter"/>
+                <a:ea typeface="Inter"/>
+                <a:cs typeface="Inter"/>
+                <a:sym typeface="Inter"/>
+              </a:rPr>
+              <a:t>She reads every calendar you have, writes one unified day, flags the conflicts.</a:t>
+            </a:r>
+          </a:p>
+        </p:txBody>
+      </p:sp>
+      <p:sp>
+        <p:nvSpPr>
+          <p:cNvPr id="59" name="Google Shape;59;p7"/>
+          <p:cNvSpPr/>
+          <p:nvPr/>
+        </p:nvSpPr>
+        <p:spPr>
+          <a:xfrm>
+            <a:off x="3584448" y="2011680"/>
+            <a:ext cx="2542032" cy="3108960"/>
+          </a:xfrm>
+          <a:prstGeom prst="roundRect">
+            <a:avLst>
+              <a:gd fmla="val 2158" name="adj"/>
+            </a:avLst>
+          </a:prstGeom>
+          <a:solidFill>
+            <a:srgbClr val="1B2A4A"/>
+          </a:solidFill>
+          <a:ln cap="flat" cmpd="sng" w="9525">
+            <a:solidFill>
+              <a:srgbClr val="C9A227">
+                <a:alpha val="65098"/>
+              </a:srgbClr>
+            </a:solidFill>
+            <a:prstDash val="solid"/>
+            <a:round/>
+            <a:headEnd len="sm" w="sm" type="none"/>
+            <a:tailEnd len="sm" w="sm" type="none"/>
+          </a:ln>
+        </p:spPr>
+        <p:txBody>
+          <a:bodyPr anchorCtr="0" anchor="t" bIns="45700" lIns="91425" spcFirstLastPara="1" rIns="91425" wrap="square" tIns="45700">
+            <a:noAutofit/>
+          </a:bodyPr>
+          <a:lstStyle/>
+          <a:p>
+            <a:pPr indent="0" lvl="0" marL="0" marR="0" rtl="0" algn="l">
+              <a:spcBef>
+                <a:spcPts val="0"/>
+              </a:spcBef>
+              <a:spcAft>
+                <a:spcPts val="0"/>
+              </a:spcAft>
+              <a:buNone/>
+            </a:pPr>
+            <a:r>
+              <a:t/>
+            </a:r>
+            <a:endParaRPr sz="1800">
+              <a:solidFill>
+                <a:schemeClr val="dk1"/>
+              </a:solidFill>
+              <a:latin typeface="Calibri"/>
+              <a:ea typeface="Calibri"/>
+              <a:cs typeface="Calibri"/>
+              <a:sym typeface="Calibri"/>
+            </a:endParaRPr>
+          </a:p>
+        </p:txBody>
+      </p:sp>
+      <p:sp>
+        <p:nvSpPr>
+          <p:cNvPr id="60" name="Google Shape;60;p7"/>
+          <p:cNvSpPr/>
+          <p:nvPr/>
+        </p:nvSpPr>
+        <p:spPr>
+          <a:xfrm>
+            <a:off x="3858768" y="2108343"/>
+            <a:ext cx="1993392" cy="502920"/>
+          </a:xfrm>
+          <a:prstGeom prst="rect">
+            <a:avLst/>
+          </a:prstGeom>
+          <a:noFill/>
+          <a:ln>
+            <a:noFill/>
+          </a:ln>
+        </p:spPr>
+        <p:txBody>
+          <a:bodyPr anchorCtr="0" anchor="ctr" bIns="0" lIns="0" spcFirstLastPara="1" rIns="0" wrap="square" tIns="0">
+            <a:noAutofit/>
+          </a:bodyPr>
+          <a:lstStyle/>
+          <a:p>
+            <a:pPr indent="0" lvl="0" marL="0" marR="0" rtl="0" algn="l">
+              <a:spcBef>
+                <a:spcPts val="0"/>
+              </a:spcBef>
+              <a:spcAft>
+                <a:spcPts val="0"/>
+              </a:spcAft>
+              <a:buClr>
+                <a:srgbClr val="C9A227"/>
+              </a:buClr>
+              <a:buSzPts val="2600"/>
+              <a:buFont typeface="Playfair Display"/>
+              <a:buNone/>
+            </a:pPr>
+            <a:r>
+              <a:rPr b="1" lang="en-US" sz="2600">
+                <a:solidFill>
+                  <a:srgbClr val="C9A227"/>
+                </a:solidFill>
+                <a:latin typeface="Playfair Display"/>
+                <a:ea typeface="Playfair Display"/>
+                <a:cs typeface="Playfair Display"/>
+                <a:sym typeface="Playfair Display"/>
+              </a:rPr>
+              <a:t>02</a:t>
+            </a:r>
+            <a:endParaRPr sz="2600">
+              <a:solidFill>
+                <a:schemeClr val="dk1"/>
+              </a:solidFill>
+              <a:latin typeface="Calibri"/>
+              <a:ea typeface="Calibri"/>
+              <a:cs typeface="Calibri"/>
+              <a:sym typeface="Calibri"/>
+            </a:endParaRPr>
+          </a:p>
+        </p:txBody>
+      </p:sp>
+      <p:sp>
+        <p:nvSpPr>
+          <p:cNvPr id="61" name="Google Shape;61;p7"/>
+          <p:cNvSpPr/>
+          <p:nvPr/>
+        </p:nvSpPr>
+        <p:spPr>
+          <a:xfrm>
+            <a:off x="3858768" y="2526355"/>
+            <a:ext cx="1993392" cy="594360"/>
+          </a:xfrm>
+          <a:prstGeom prst="rect">
+            <a:avLst/>
+          </a:prstGeom>
+          <a:noFill/>
+          <a:ln>
+            <a:noFill/>
+          </a:ln>
+        </p:spPr>
+        <p:txBody>
+          <a:bodyPr anchorCtr="0" anchor="ctr" bIns="0" lIns="0" spcFirstLastPara="1" rIns="0" wrap="square" tIns="0">
+            <a:noAutofit/>
+          </a:bodyPr>
+          <a:lstStyle/>
+          <a:p>
+            <a:pPr indent="0" lvl="0" marL="0" marR="0" rtl="0" algn="l">
+              <a:spcBef>
+                <a:spcPts val="0"/>
+              </a:spcBef>
+              <a:spcAft>
+                <a:spcPts val="0"/>
+              </a:spcAft>
+              <a:buClr>
+                <a:srgbClr val="F7F3E9"/>
+              </a:buClr>
+              <a:buSzPts val="1250"/>
+              <a:buFont typeface="Inter"/>
+              <a:buNone/>
+            </a:pPr>
+            <a:r>
+              <a:rPr b="1" lang="en-US" sz="1250">
+                <a:solidFill>
+                  <a:srgbClr val="F7F3E9"/>
+                </a:solidFill>
+                <a:latin typeface="Inter"/>
+                <a:ea typeface="Inter"/>
+                <a:cs typeface="Inter"/>
+                <a:sym typeface="Inter"/>
+              </a:rPr>
+              <a:t>MEETING PREP</a:t>
+            </a:r>
+          </a:p>
+          <a:p>
+            <a:pPr indent="0" lvl="0" marL="0" marR="0" rtl="0" algn="l">
+              <a:spcBef>
+                <a:spcPts val="0"/>
+              </a:spcBef>
+              <a:spcAft>
+                <a:spcPts val="0"/>
+              </a:spcAft>
+              <a:buClr>
+                <a:srgbClr val="F7F3E9"/>
+              </a:buClr>
+              <a:buSzPts val="1250"/>
+              <a:buFont typeface="Inter"/>
+              <a:buNone/>
+            </a:pPr>
+            <a:r>
+              <a:rPr b="1" lang="en-US" sz="1250">
+                <a:solidFill>
+                  <a:srgbClr val="F7F3E9"/>
+                </a:solidFill>
+                <a:latin typeface="Inter"/>
+                <a:ea typeface="Inter"/>
+                <a:cs typeface="Inter"/>
+                <a:sym typeface="Inter"/>
+              </a:rPr>
+              <a:t>THE BRIEFING</a:t>
+            </a:r>
+          </a:p>
+        </p:txBody>
+      </p:sp>
+      <p:sp>
+        <p:nvSpPr>
+          <p:cNvPr id="62" name="Google Shape;62;p7"/>
+          <p:cNvSpPr/>
+          <p:nvPr/>
+        </p:nvSpPr>
+        <p:spPr>
+          <a:xfrm>
+            <a:off x="3858768" y="3310128"/>
+            <a:ext cx="1993392" cy="1235746"/>
+          </a:xfrm>
+          <a:prstGeom prst="rect">
+            <a:avLst/>
+          </a:prstGeom>
+          <a:noFill/>
+          <a:ln>
+            <a:noFill/>
+          </a:ln>
+        </p:spPr>
+        <p:txBody>
+          <a:bodyPr anchorCtr="0" anchor="ctr" bIns="0" lIns="0" spcFirstLastPara="1" rIns="0" wrap="square" tIns="0">
+            <a:noAutofit/>
+          </a:bodyPr>
+          <a:lstStyle/>
+          <a:p>
+            <a:pPr indent="0" lvl="0" marL="0" marR="0" rtl="0" algn="l">
+              <a:lnSpc>
+                <a:spcPct val="110000"/>
+              </a:lnSpc>
+              <a:spcBef>
+                <a:spcPts val="0"/>
+              </a:spcBef>
+              <a:spcAft>
+                <a:spcPts val="0"/>
+              </a:spcAft>
+              <a:buClr>
+                <a:srgbClr val="AFA893"/>
+              </a:buClr>
+              <a:buSzPts val="1600"/>
+              <a:buFont typeface="Inter"/>
+              <a:buNone/>
+            </a:pPr>
+            <a:r>
+              <a:rPr i="1" lang="en-US">
+                <a:solidFill>
+                  <a:srgbClr val="AFA893"/>
+                </a:solidFill>
+                <a:latin typeface="Inter"/>
+                <a:ea typeface="Inter"/>
+                <a:cs typeface="Inter"/>
+                <a:sym typeface="Inter"/>
+              </a:rPr>
+              <a:t>Before each meeting: who’s in the room, open items, last emails. One page.</a:t>
+            </a:r>
+          </a:p>
+        </p:txBody>
+      </p:sp>
+      <p:sp>
+        <p:nvSpPr>
+          <p:cNvPr id="63" name="Google Shape;63;p7"/>
+          <p:cNvSpPr/>
+          <p:nvPr/>
+        </p:nvSpPr>
+        <p:spPr>
+          <a:xfrm>
+            <a:off x="6345936" y="2011680"/>
+            <a:ext cx="2542032" cy="3108960"/>
+          </a:xfrm>
+          <a:prstGeom prst="roundRect">
+            <a:avLst>
+              <a:gd fmla="val 2158" name="adj"/>
+            </a:avLst>
+          </a:prstGeom>
+          <a:solidFill>
+            <a:srgbClr val="1B2A4A"/>
+          </a:solidFill>
+          <a:ln cap="flat" cmpd="sng" w="9525">
+            <a:solidFill>
+              <a:srgbClr val="C9A227">
+                <a:alpha val="65098"/>
+              </a:srgbClr>
+            </a:solidFill>
+            <a:prstDash val="solid"/>
+            <a:round/>
+            <a:headEnd len="sm" w="sm" type="none"/>
+            <a:tailEnd len="sm" w="sm" type="none"/>
+          </a:ln>
+        </p:spPr>
+        <p:txBody>
+          <a:bodyPr anchorCtr="0" anchor="t" bIns="45700" lIns="91425" spcFirstLastPara="1" rIns="91425" wrap="square" tIns="45700">
+            <a:noAutofit/>
+          </a:bodyPr>
+          <a:lstStyle/>
+          <a:p>
+            <a:pPr indent="0" lvl="0" marL="0" marR="0" rtl="0" algn="l">
+              <a:spcBef>
+                <a:spcPts val="0"/>
+              </a:spcBef>
+              <a:spcAft>
+                <a:spcPts val="0"/>
+              </a:spcAft>
+              <a:buNone/>
+            </a:pPr>
+            <a:r>
+              <a:t/>
+            </a:r>
+            <a:endParaRPr sz="1800">
+              <a:solidFill>
+                <a:schemeClr val="dk1"/>
+              </a:solidFill>
+              <a:latin typeface="Calibri"/>
+              <a:ea typeface="Calibri"/>
+              <a:cs typeface="Calibri"/>
+              <a:sym typeface="Calibri"/>
+            </a:endParaRPr>
+          </a:p>
+        </p:txBody>
+      </p:sp>
+      <p:sp>
+        <p:nvSpPr>
+          <p:cNvPr id="64" name="Google Shape;64;p7"/>
+          <p:cNvSpPr/>
+          <p:nvPr/>
+        </p:nvSpPr>
+        <p:spPr>
+          <a:xfrm>
+            <a:off x="6620256" y="2108343"/>
+            <a:ext cx="1993392" cy="502920"/>
+          </a:xfrm>
+          <a:prstGeom prst="rect">
+            <a:avLst/>
+          </a:prstGeom>
+          <a:noFill/>
+          <a:ln>
+            <a:noFill/>
+          </a:ln>
+        </p:spPr>
+        <p:txBody>
+          <a:bodyPr anchorCtr="0" anchor="ctr" bIns="0" lIns="0" spcFirstLastPara="1" rIns="0" wrap="square" tIns="0">
+            <a:noAutofit/>
+          </a:bodyPr>
+          <a:lstStyle/>
+          <a:p>
+            <a:pPr indent="0" lvl="0" marL="0" marR="0" rtl="0" algn="l">
+              <a:spcBef>
+                <a:spcPts val="0"/>
+              </a:spcBef>
+              <a:spcAft>
+                <a:spcPts val="0"/>
+              </a:spcAft>
+              <a:buClr>
+                <a:srgbClr val="C9A227"/>
+              </a:buClr>
+              <a:buSzPts val="2600"/>
+              <a:buFont typeface="Playfair Display"/>
+              <a:buNone/>
+            </a:pPr>
+            <a:r>
+              <a:rPr b="1" lang="en-US" sz="2600">
+                <a:solidFill>
+                  <a:srgbClr val="C9A227"/>
+                </a:solidFill>
+                <a:latin typeface="Playfair Display"/>
+                <a:ea typeface="Playfair Display"/>
+                <a:cs typeface="Playfair Display"/>
+                <a:sym typeface="Playfair Display"/>
+              </a:rPr>
+              <a:t>03</a:t>
+            </a:r>
+            <a:endParaRPr sz="2600">
+              <a:solidFill>
+                <a:schemeClr val="dk1"/>
+              </a:solidFill>
+              <a:latin typeface="Calibri"/>
+              <a:ea typeface="Calibri"/>
+              <a:cs typeface="Calibri"/>
+              <a:sym typeface="Calibri"/>
+            </a:endParaRPr>
+          </a:p>
+        </p:txBody>
+      </p:sp>
+      <p:sp>
+        <p:nvSpPr>
+          <p:cNvPr id="65" name="Google Shape;65;p7"/>
+          <p:cNvSpPr/>
+          <p:nvPr/>
+        </p:nvSpPr>
+        <p:spPr>
+          <a:xfrm>
+            <a:off x="6620256" y="2526355"/>
+            <a:ext cx="1993392" cy="594360"/>
+          </a:xfrm>
+          <a:prstGeom prst="rect">
+            <a:avLst/>
+          </a:prstGeom>
+          <a:noFill/>
+          <a:ln>
+            <a:noFill/>
+          </a:ln>
+        </p:spPr>
+        <p:txBody>
+          <a:bodyPr anchorCtr="0" anchor="ctr" bIns="0" lIns="0" spcFirstLastPara="1" rIns="0" wrap="square" tIns="0">
+            <a:noAutofit/>
+          </a:bodyPr>
+          <a:lstStyle/>
+          <a:p>
+            <a:pPr indent="0" lvl="0" marL="0" marR="0" rtl="0" algn="l">
+              <a:spcBef>
+                <a:spcPts val="0"/>
+              </a:spcBef>
+              <a:spcAft>
+                <a:spcPts val="0"/>
+              </a:spcAft>
+              <a:buClr>
+                <a:srgbClr val="F7F3E9"/>
+              </a:buClr>
+              <a:buSzPts val="1250"/>
+              <a:buFont typeface="Inter"/>
+              <a:buNone/>
+            </a:pPr>
+            <a:r>
+              <a:rPr b="1" lang="en-US" sz="1250">
+                <a:solidFill>
+                  <a:srgbClr val="F7F3E9"/>
+                </a:solidFill>
+                <a:latin typeface="Inter"/>
+                <a:ea typeface="Inter"/>
+                <a:cs typeface="Inter"/>
+                <a:sym typeface="Inter"/>
+              </a:rPr>
+              <a:t>CLIENT FOLLOW-UPS</a:t>
+            </a:r>
+          </a:p>
+          <a:p>
+            <a:pPr indent="0" lvl="0" marL="0" marR="0" rtl="0" algn="l">
+              <a:spcBef>
+                <a:spcPts val="0"/>
+              </a:spcBef>
+              <a:spcAft>
+                <a:spcPts val="0"/>
+              </a:spcAft>
+              <a:buClr>
+                <a:srgbClr val="F7F3E9"/>
+              </a:buClr>
+              <a:buSzPts val="1250"/>
+              <a:buFont typeface="Inter"/>
+              <a:buNone/>
+            </a:pPr>
+            <a:r>
+              <a:rPr b="1" lang="en-US" sz="1250">
+                <a:solidFill>
+                  <a:srgbClr val="F7F3E9"/>
+                </a:solidFill>
+                <a:latin typeface="Inter"/>
+                <a:ea typeface="Inter"/>
+                <a:cs typeface="Inter"/>
+                <a:sym typeface="Inter"/>
+              </a:rPr>
+              <a:t>THE SWEEP</a:t>
+            </a:r>
+          </a:p>
+        </p:txBody>
+      </p:sp>
+      <p:sp>
+        <p:nvSpPr>
+          <p:cNvPr id="66" name="Google Shape;66;p7"/>
+          <p:cNvSpPr/>
+          <p:nvPr/>
+        </p:nvSpPr>
+        <p:spPr>
+          <a:xfrm>
+            <a:off x="6620256" y="3310128"/>
+            <a:ext cx="1993392" cy="1235746"/>
+          </a:xfrm>
+          <a:prstGeom prst="rect">
+            <a:avLst/>
+          </a:prstGeom>
+          <a:noFill/>
+          <a:ln>
+            <a:noFill/>
+          </a:ln>
+        </p:spPr>
+        <p:txBody>
+          <a:bodyPr anchorCtr="0" anchor="ctr" bIns="0" lIns="0" spcFirstLastPara="1" rIns="0" wrap="square" tIns="0">
+            <a:noAutofit/>
+          </a:bodyPr>
+          <a:lstStyle/>
+          <a:p>
+            <a:pPr indent="0" lvl="0" marL="0" marR="0" rtl="0" algn="l">
+              <a:lnSpc>
+                <a:spcPct val="110000"/>
+              </a:lnSpc>
+              <a:spcBef>
+                <a:spcPts val="0"/>
+              </a:spcBef>
+              <a:spcAft>
+                <a:spcPts val="0"/>
+              </a:spcAft>
+              <a:buClr>
+                <a:srgbClr val="AFA893"/>
+              </a:buClr>
+              <a:buSzPts val="1600"/>
+              <a:buFont typeface="Inter"/>
+              <a:buNone/>
+            </a:pPr>
+            <a:r>
+              <a:rPr i="1" lang="en-US">
+                <a:solidFill>
+                  <a:srgbClr val="AFA893"/>
+                </a:solidFill>
+                <a:latin typeface="Inter"/>
+                <a:ea typeface="Inter"/>
+                <a:cs typeface="Inter"/>
+                <a:sym typeface="Inter"/>
+              </a:rPr>
+              <a:t>A weekly pass over every thread still waiting on you, drafts included.</a:t>
+            </a:r>
+          </a:p>
+        </p:txBody>
+      </p:sp>
+      <p:sp>
+        <p:nvSpPr>
+          <p:cNvPr id="67" name="Google Shape;67;p7"/>
+          <p:cNvSpPr/>
+          <p:nvPr/>
+        </p:nvSpPr>
+        <p:spPr>
+          <a:xfrm>
+            <a:off x="9107424" y="2011680"/>
+            <a:ext cx="2542032" cy="3108960"/>
+          </a:xfrm>
+          <a:prstGeom prst="roundRect">
+            <a:avLst>
+              <a:gd fmla="val 2158" name="adj"/>
+            </a:avLst>
+          </a:prstGeom>
+          <a:solidFill>
+            <a:srgbClr val="1B2A4A"/>
+          </a:solidFill>
+          <a:ln cap="flat" cmpd="sng" w="9525">
+            <a:solidFill>
+              <a:srgbClr val="C9A227">
+                <a:alpha val="65098"/>
+              </a:srgbClr>
+            </a:solidFill>
+            <a:prstDash val="solid"/>
+            <a:round/>
+            <a:headEnd len="sm" w="sm" type="none"/>
+            <a:tailEnd len="sm" w="sm" type="none"/>
+          </a:ln>
+        </p:spPr>
+        <p:txBody>
+          <a:bodyPr anchorCtr="0" anchor="t" bIns="45700" lIns="91425" spcFirstLastPara="1" rIns="91425" wrap="square" tIns="45700">
+            <a:noAutofit/>
+          </a:bodyPr>
+          <a:lstStyle/>
+          <a:p>
+            <a:pPr indent="0" lvl="0" marL="0" marR="0" rtl="0" algn="l">
+              <a:spcBef>
+                <a:spcPts val="0"/>
+              </a:spcBef>
+              <a:spcAft>
+                <a:spcPts val="0"/>
+              </a:spcAft>
+              <a:buNone/>
+            </a:pPr>
+            <a:r>
+              <a:t/>
+            </a:r>
+            <a:endParaRPr sz="1800">
+              <a:solidFill>
+                <a:schemeClr val="dk1"/>
+              </a:solidFill>
+              <a:latin typeface="Calibri"/>
+              <a:ea typeface="Calibri"/>
+              <a:cs typeface="Calibri"/>
+              <a:sym typeface="Calibri"/>
+            </a:endParaRPr>
+          </a:p>
+        </p:txBody>
+      </p:sp>
+      <p:sp>
+        <p:nvSpPr>
+          <p:cNvPr id="68" name="Google Shape;68;p7"/>
+          <p:cNvSpPr/>
+          <p:nvPr/>
+        </p:nvSpPr>
+        <p:spPr>
+          <a:xfrm>
+            <a:off x="9381744" y="2108343"/>
+            <a:ext cx="1993392" cy="502920"/>
+          </a:xfrm>
+          <a:prstGeom prst="rect">
+            <a:avLst/>
+          </a:prstGeom>
+          <a:noFill/>
+          <a:ln>
+            <a:noFill/>
+          </a:ln>
+        </p:spPr>
+        <p:txBody>
+          <a:bodyPr anchorCtr="0" anchor="ctr" bIns="0" lIns="0" spcFirstLastPara="1" rIns="0" wrap="square" tIns="0">
+            <a:noAutofit/>
+          </a:bodyPr>
+          <a:lstStyle/>
+          <a:p>
+            <a:pPr indent="0" lvl="0" marL="0" marR="0" rtl="0" algn="l">
+              <a:spcBef>
+                <a:spcPts val="0"/>
+              </a:spcBef>
+              <a:spcAft>
+                <a:spcPts val="0"/>
+              </a:spcAft>
+              <a:buClr>
+                <a:srgbClr val="C9A227"/>
+              </a:buClr>
+              <a:buSzPts val="2600"/>
+              <a:buFont typeface="Playfair Display"/>
+              <a:buNone/>
+            </a:pPr>
+            <a:r>
+              <a:rPr b="1" lang="en-US" sz="2600">
+                <a:solidFill>
+                  <a:srgbClr val="C9A227"/>
+                </a:solidFill>
+                <a:latin typeface="Playfair Display"/>
+                <a:ea typeface="Playfair Display"/>
+                <a:cs typeface="Playfair Display"/>
+                <a:sym typeface="Playfair Display"/>
+              </a:rPr>
+              <a:t>04</a:t>
+            </a:r>
+            <a:endParaRPr sz="2600">
+              <a:solidFill>
+                <a:schemeClr val="dk1"/>
+              </a:solidFill>
+              <a:latin typeface="Calibri"/>
+              <a:ea typeface="Calibri"/>
+              <a:cs typeface="Calibri"/>
+              <a:sym typeface="Calibri"/>
+            </a:endParaRPr>
+          </a:p>
+        </p:txBody>
+      </p:sp>
+      <p:sp>
+        <p:nvSpPr>
+          <p:cNvPr id="69" name="Google Shape;69;p7"/>
+          <p:cNvSpPr/>
+          <p:nvPr/>
+        </p:nvSpPr>
+        <p:spPr>
+          <a:xfrm>
+            <a:off x="9381744" y="2526355"/>
+            <a:ext cx="1993392" cy="594360"/>
+          </a:xfrm>
+          <a:prstGeom prst="rect">
+            <a:avLst/>
+          </a:prstGeom>
+          <a:noFill/>
+          <a:ln>
+            <a:noFill/>
+          </a:ln>
+        </p:spPr>
+        <p:txBody>
+          <a:bodyPr anchorCtr="0" anchor="ctr" bIns="0" lIns="0" spcFirstLastPara="1" rIns="0" wrap="square" tIns="0">
+            <a:noAutofit/>
+          </a:bodyPr>
+          <a:lstStyle/>
+          <a:p>
+            <a:pPr indent="0" lvl="0" marL="0" marR="0" rtl="0" algn="l">
+              <a:spcBef>
+                <a:spcPts val="0"/>
+              </a:spcBef>
+              <a:spcAft>
+                <a:spcPts val="0"/>
+              </a:spcAft>
+              <a:buClr>
+                <a:srgbClr val="F7F3E9"/>
+              </a:buClr>
+              <a:buSzPts val="1250"/>
+              <a:buFont typeface="Inter"/>
+              <a:buNone/>
+            </a:pPr>
+            <a:r>
+              <a:rPr b="1" lang="en-US" sz="1250">
+                <a:solidFill>
+                  <a:srgbClr val="F7F3E9"/>
+                </a:solidFill>
+                <a:latin typeface="Inter"/>
+                <a:ea typeface="Inter"/>
+                <a:cs typeface="Inter"/>
+                <a:sym typeface="Inter"/>
+              </a:rPr>
+              <a:t>SUPPLIER NOISE</a:t>
+            </a:r>
+          </a:p>
+          <a:p>
+            <a:pPr indent="0" lvl="0" marL="0" marR="0" rtl="0" algn="l">
+              <a:spcBef>
+                <a:spcPts val="0"/>
+              </a:spcBef>
+              <a:spcAft>
+                <a:spcPts val="0"/>
+              </a:spcAft>
+              <a:buClr>
+                <a:srgbClr val="F7F3E9"/>
+              </a:buClr>
+              <a:buSzPts val="1250"/>
+              <a:buFont typeface="Inter"/>
+              <a:buNone/>
+            </a:pPr>
+            <a:r>
+              <a:rPr b="1" lang="en-US" sz="1250">
+                <a:solidFill>
+                  <a:srgbClr val="F7F3E9"/>
+                </a:solidFill>
+                <a:latin typeface="Inter"/>
+                <a:ea typeface="Inter"/>
+                <a:cs typeface="Inter"/>
+                <a:sym typeface="Inter"/>
+              </a:rPr>
+              <a:t>THE DIGEST</a:t>
+            </a:r>
+          </a:p>
+        </p:txBody>
+      </p:sp>
+      <p:sp>
+        <p:nvSpPr>
+          <p:cNvPr id="70" name="Google Shape;70;p7"/>
+          <p:cNvSpPr/>
+          <p:nvPr/>
+        </p:nvSpPr>
+        <p:spPr>
+          <a:xfrm>
+            <a:off x="9381744" y="3310128"/>
+            <a:ext cx="1993392" cy="1235746"/>
+          </a:xfrm>
+          <a:prstGeom prst="rect">
+            <a:avLst/>
+          </a:prstGeom>
+          <a:noFill/>
+          <a:ln>
+            <a:noFill/>
+          </a:ln>
+        </p:spPr>
+        <p:txBody>
+          <a:bodyPr anchorCtr="0" anchor="ctr" bIns="0" lIns="0" spcFirstLastPara="1" rIns="0" wrap="square" tIns="0">
+            <a:noAutofit/>
+          </a:bodyPr>
+          <a:lstStyle/>
+          <a:p>
+            <a:pPr indent="0" lvl="0" marL="0" marR="0" rtl="0" algn="l">
+              <a:lnSpc>
+                <a:spcPct val="110000"/>
+              </a:lnSpc>
+              <a:spcBef>
+                <a:spcPts val="0"/>
+              </a:spcBef>
+              <a:spcAft>
+                <a:spcPts val="0"/>
+              </a:spcAft>
+              <a:buClr>
+                <a:srgbClr val="AFA893"/>
+              </a:buClr>
+              <a:buSzPts val="1600"/>
+              <a:buFont typeface="Inter"/>
+              <a:buNone/>
+            </a:pPr>
+            <a:r>
+              <a:rPr i="1" lang="en-US">
+                <a:solidFill>
+                  <a:srgbClr val="AFA893"/>
+                </a:solidFill>
+                <a:latin typeface="Inter"/>
+                <a:ea typeface="Inter"/>
+                <a:cs typeface="Inter"/>
+                <a:sym typeface="Inter"/>
+              </a:rPr>
+              <a:t>Promos, rate sheets, program updates: one Monday digest, not forty emails.</a:t>
+            </a:r>
+          </a:p>
+        </p:txBody>
+      </p:sp>
+      <p:sp>
+        <p:nvSpPr>
+          <p:cNvPr id="71" name="Google Shape;71;p7"/>
+          <p:cNvSpPr/>
+          <p:nvPr/>
+        </p:nvSpPr>
+        <p:spPr>
+          <a:xfrm>
+            <a:off x="822960" y="5440680"/>
+            <a:ext cx="10545775" cy="457200"/>
+          </a:xfrm>
+          <a:prstGeom prst="rect">
+            <a:avLst/>
+          </a:prstGeom>
+          <a:noFill/>
+          <a:ln>
+            <a:noFill/>
+          </a:ln>
+        </p:spPr>
+        <p:txBody>
+          <a:bodyPr anchorCtr="0" anchor="ctr" bIns="0" lIns="0" spcFirstLastPara="1" rIns="0" wrap="square" tIns="0">
+            <a:noAutofit/>
+          </a:bodyPr>
+          <a:lstStyle/>
+          <a:p>
+            <a:pPr indent="0" lvl="0" marL="0" marR="0" rtl="0" algn="l">
+              <a:spcBef>
+                <a:spcPts val="0"/>
+              </a:spcBef>
+              <a:spcAft>
+                <a:spcPts val="0"/>
+              </a:spcAft>
+              <a:buClr>
+                <a:srgbClr val="AFA893"/>
+              </a:buClr>
+              <a:buSzPts val="2400"/>
+              <a:buFont typeface="Inter"/>
+              <a:buNone/>
+            </a:pPr>
+            <a:r>
+              <a:rPr i="1" lang="en-US" sz="2400">
+                <a:solidFill>
+                  <a:srgbClr val="AFA893"/>
+                </a:solidFill>
+                <a:latin typeface="Inter"/>
+                <a:ea typeface="Inter"/>
+                <a:cs typeface="Inter"/>
+                <a:sym typeface="Inter"/>
+              </a:rPr>
+              <a:t>Each one is the ladder again: describe it in English, write it down, make it a skill, put it on the clock.</a:t>
+            </a:r>
+          </a:p>
+        </p:txBody>
+      </p:sp>
+      <p:sp>
+        <p:nvSpPr>
+          <p:cNvPr id="72" name="Google Shape;72;p7"/>
+          <p:cNvSpPr/>
+          <p:nvPr/>
+        </p:nvSpPr>
+        <p:spPr>
+          <a:xfrm>
+            <a:off x="1090879" y="4526280"/>
+            <a:ext cx="1993392" cy="502920"/>
+          </a:xfrm>
+          <a:prstGeom prst="rect">
+            <a:avLst/>
+          </a:prstGeom>
+          <a:noFill/>
+          <a:ln>
+            <a:noFill/>
+          </a:ln>
+        </p:spPr>
+        <p:txBody>
+          <a:bodyPr anchorCtr="0" anchor="ctr" bIns="0" lIns="0" spcFirstLastPara="1" rIns="0" wrap="square" tIns="0">
+            <a:noAutofit/>
+          </a:bodyPr>
+          <a:lstStyle/>
+          <a:p>
+            <a:pPr indent="0" lvl="0" marL="0" marR="0" rtl="0" algn="l">
+              <a:spcBef>
+                <a:spcPts val="0"/>
+              </a:spcBef>
+              <a:spcAft>
+                <a:spcPts val="0"/>
+              </a:spcAft>
+              <a:buClr>
+                <a:srgbClr val="C9A227"/>
+              </a:buClr>
+              <a:buSzPts val="1600"/>
+              <a:buFont typeface="Playfair Display"/>
+              <a:buNone/>
+            </a:pPr>
+            <a:r>
+              <a:rPr b="1" lang="en-US" sz="1600">
+                <a:solidFill>
+                  <a:srgbClr val="C9A227"/>
+                </a:solidFill>
+                <a:latin typeface="Playfair Display"/>
+                <a:ea typeface="Playfair Display"/>
+                <a:cs typeface="Playfair Display"/>
+                <a:sym typeface="Playfair Display"/>
+              </a:rPr>
+              <a:t>A morning task</a:t>
+            </a:r>
+          </a:p>
+        </p:txBody>
+      </p:sp>
+      <p:sp>
+        <p:nvSpPr>
+          <p:cNvPr id="73" name="Google Shape;73;p7"/>
+          <p:cNvSpPr/>
+          <p:nvPr/>
+        </p:nvSpPr>
+        <p:spPr>
+          <a:xfrm>
+            <a:off x="3852367" y="4526280"/>
+            <a:ext cx="1993392" cy="502920"/>
+          </a:xfrm>
+          <a:prstGeom prst="rect">
+            <a:avLst/>
+          </a:prstGeom>
+          <a:noFill/>
+          <a:ln>
+            <a:noFill/>
+          </a:ln>
+        </p:spPr>
+        <p:txBody>
+          <a:bodyPr anchorCtr="0" anchor="ctr" bIns="0" lIns="0" spcFirstLastPara="1" rIns="0" wrap="square" tIns="0">
+            <a:noAutofit/>
+          </a:bodyPr>
+          <a:lstStyle/>
+          <a:p>
+            <a:pPr indent="0" lvl="0" marL="0" marR="0" rtl="0" algn="l">
+              <a:spcBef>
+                <a:spcPts val="0"/>
+              </a:spcBef>
+              <a:spcAft>
+                <a:spcPts val="0"/>
+              </a:spcAft>
+              <a:buClr>
+                <a:srgbClr val="C9A227"/>
+              </a:buClr>
+              <a:buSzPts val="1600"/>
+              <a:buFont typeface="Playfair Display"/>
+              <a:buNone/>
+            </a:pPr>
+            <a:r>
+              <a:rPr b="1" lang="en-US" sz="1600">
+                <a:solidFill>
+                  <a:srgbClr val="C9A227"/>
+                </a:solidFill>
+                <a:latin typeface="Playfair Display"/>
+                <a:ea typeface="Playfair Display"/>
+                <a:cs typeface="Playfair Display"/>
+                <a:sym typeface="Playfair Display"/>
+              </a:rPr>
+              <a:t>A second project</a:t>
+            </a:r>
+          </a:p>
+        </p:txBody>
+      </p:sp>
+      <p:sp>
+        <p:nvSpPr>
+          <p:cNvPr id="74" name="Google Shape;74;p7"/>
+          <p:cNvSpPr/>
+          <p:nvPr/>
+        </p:nvSpPr>
+        <p:spPr>
+          <a:xfrm>
+            <a:off x="6613855" y="4526280"/>
+            <a:ext cx="1993392" cy="502920"/>
+          </a:xfrm>
+          <a:prstGeom prst="rect">
+            <a:avLst/>
+          </a:prstGeom>
+          <a:noFill/>
+          <a:ln>
+            <a:noFill/>
+          </a:ln>
+        </p:spPr>
+        <p:txBody>
+          <a:bodyPr anchorCtr="0" anchor="ctr" bIns="0" lIns="0" spcFirstLastPara="1" rIns="0" wrap="square" tIns="0">
+            <a:noAutofit/>
+          </a:bodyPr>
+          <a:lstStyle/>
+          <a:p>
+            <a:pPr indent="0" lvl="0" marL="0" marR="0" rtl="0" algn="l">
+              <a:spcBef>
+                <a:spcPts val="0"/>
+              </a:spcBef>
+              <a:spcAft>
+                <a:spcPts val="0"/>
+              </a:spcAft>
+              <a:buClr>
+                <a:srgbClr val="C9A227"/>
+              </a:buClr>
+              <a:buSzPts val="1600"/>
+              <a:buFont typeface="Playfair Display"/>
+              <a:buNone/>
+            </a:pPr>
+            <a:r>
+              <a:rPr b="1" lang="en-US" sz="1600">
+                <a:solidFill>
+                  <a:srgbClr val="C9A227"/>
+                </a:solidFill>
+                <a:latin typeface="Playfair Display"/>
+                <a:ea typeface="Playfair Display"/>
+                <a:cs typeface="Playfair Display"/>
+                <a:sym typeface="Playfair Display"/>
+              </a:rPr>
+              <a:t>One new skill</a:t>
+            </a:r>
+          </a:p>
+        </p:txBody>
+      </p:sp>
+      <p:sp>
+        <p:nvSpPr>
+          <p:cNvPr id="75" name="Google Shape;75;p7"/>
+          <p:cNvSpPr/>
+          <p:nvPr/>
+        </p:nvSpPr>
+        <p:spPr>
+          <a:xfrm>
+            <a:off x="9375343" y="4526280"/>
+            <a:ext cx="1993392" cy="502920"/>
+          </a:xfrm>
+          <a:prstGeom prst="rect">
+            <a:avLst/>
+          </a:prstGeom>
+          <a:noFill/>
+          <a:ln>
+            <a:noFill/>
+          </a:ln>
+        </p:spPr>
+        <p:txBody>
+          <a:bodyPr anchorCtr="0" anchor="ctr" bIns="0" lIns="0" spcFirstLastPara="1" rIns="0" wrap="square" tIns="0">
+            <a:noAutofit/>
+          </a:bodyPr>
+          <a:lstStyle/>
+          <a:p>
+            <a:pPr indent="0" lvl="0" marL="0" marR="0" rtl="0" algn="l">
+              <a:spcBef>
+                <a:spcPts val="0"/>
+              </a:spcBef>
+              <a:spcAft>
+                <a:spcPts val="0"/>
+              </a:spcAft>
+              <a:buClr>
+                <a:srgbClr val="C9A227"/>
+              </a:buClr>
+              <a:buSzPts val="1600"/>
+              <a:buFont typeface="Playfair Display"/>
+              <a:buNone/>
+            </a:pPr>
+            <a:r>
+              <a:rPr b="1" lang="en-US" sz="1600">
+                <a:solidFill>
+                  <a:srgbClr val="C9A227"/>
+                </a:solidFill>
+                <a:latin typeface="Playfair Display"/>
+                <a:ea typeface="Playfair Display"/>
+                <a:cs typeface="Playfair Display"/>
+                <a:sym typeface="Playfair Display"/>
+              </a:rPr>
+              <a:t>A weekly schedule</a:t>
+            </a:r>
           </a:p>
         </p:txBody>
       </p:sp>
@@ -9500,6 +13513,930 @@
 </p:sld>
 </file>
 
+<file path=ppt/slides/slide20.xml><?xml version="1.0" encoding="utf-8"?>
+<p:sld xmlns:a="http://schemas.openxmlformats.org/drawingml/2006/main" xmlns:r="http://schemas.openxmlformats.org/officeDocument/2006/relationships" xmlns:mc="http://schemas.openxmlformats.org/markup-compatibility/2006" xmlns:mv="urn:schemas-microsoft-com:mac:vml" xmlns:p="http://schemas.openxmlformats.org/presentationml/2006/main" xmlns:c="http://schemas.openxmlformats.org/drawingml/2006/chart" xmlns:dgm="http://schemas.openxmlformats.org/drawingml/2006/diagram" xmlns:o="urn:schemas-microsoft-com:office:office" xmlns:v="urn:schemas-microsoft-com:vml" xmlns:pvml="urn:schemas-microsoft-com:office:powerpoint" xmlns:com="http://schemas.openxmlformats.org/drawingml/2006/compatibility" xmlns:p14="http://schemas.microsoft.com/office/powerpoint/2010/main" xmlns:p15="http://schemas.microsoft.com/office/powerpoint/2012/main" xmlns:ahyp="http://schemas.microsoft.com/office/drawing/2018/hyperlinkcolor">
+  <p:cSld>
+    <p:bg>
+      <p:bgPr>
+        <a:solidFill>
+          <a:srgbClr val="A31621"/>
+        </a:solidFill>
+      </p:bgPr>
+    </p:bg>
+    <p:spTree>
+      <p:nvGrpSpPr>
+        <p:cNvPr id="167" name="Shape 167"/>
+        <p:cNvGrpSpPr/>
+        <p:nvPr/>
+      </p:nvGrpSpPr>
+      <p:grpSpPr>
+        <a:xfrm>
+          <a:off x="0" y="0"/>
+          <a:ext cx="0" cy="0"/>
+          <a:chOff x="0" y="0"/>
+          <a:chExt cx="0" cy="0"/>
+        </a:xfrm>
+      </p:grpSpPr>
+      <p:sp>
+        <p:nvSpPr>
+          <p:cNvPr id="168" name="Google Shape;168;p15"/>
+          <p:cNvSpPr/>
+          <p:nvPr/>
+        </p:nvSpPr>
+        <p:spPr>
+          <a:xfrm>
+            <a:off x="822960" y="1092200"/>
+            <a:ext cx="10545775" cy="2159000"/>
+          </a:xfrm>
+          <a:prstGeom prst="rect">
+            <a:avLst/>
+          </a:prstGeom>
+          <a:noFill/>
+          <a:ln>
+            <a:noFill/>
+          </a:ln>
+        </p:spPr>
+        <p:txBody>
+          <a:bodyPr anchorCtr="0" anchor="ctr" bIns="0" lIns="0" spcFirstLastPara="1" rIns="0" wrap="square" tIns="0">
+            <a:noAutofit/>
+          </a:bodyPr>
+          <a:lstStyle/>
+          <a:p>
+            <a:pPr indent="0" lvl="0" marL="0" marR="0" rtl="0" algn="ctr">
+              <a:lnSpc>
+                <a:spcPct val="105000"/>
+              </a:lnSpc>
+              <a:spcBef>
+                <a:spcPts val="0"/>
+              </a:spcBef>
+              <a:spcAft>
+                <a:spcPts val="0"/>
+              </a:spcAft>
+              <a:buClr>
+                <a:srgbClr val="FFFFFF"/>
+              </a:buClr>
+              <a:buSzPts val="6600"/>
+              <a:buFont typeface="Playfair Display"/>
+              <a:buNone/>
+            </a:pPr>
+            <a:r>
+              <a:rPr b="1" lang="en-US" sz="6600">
+                <a:solidFill>
+                  <a:srgbClr val="FFFFFF"/>
+                </a:solidFill>
+                <a:latin typeface="Playfair Display"/>
+                <a:ea typeface="Playfair Display"/>
+                <a:cs typeface="Playfair Display"/>
+                <a:sym typeface="Playfair Display"/>
+              </a:rPr>
+              <a:t>House rules.</a:t>
+            </a:r>
+          </a:p>
+          <a:p>
+            <a:pPr indent="0" lvl="0" marL="0" marR="0" rtl="0" algn="ctr">
+              <a:lnSpc>
+                <a:spcPct val="105000"/>
+              </a:lnSpc>
+              <a:spcBef>
+                <a:spcPts val="0"/>
+              </a:spcBef>
+              <a:spcAft>
+                <a:spcPts val="0"/>
+              </a:spcAft>
+              <a:buClr>
+                <a:srgbClr val="FFFFFF"/>
+              </a:buClr>
+              <a:buSzPts val="6600"/>
+              <a:buFont typeface="Playfair Display"/>
+              <a:buNone/>
+            </a:pPr>
+            <a:r>
+              <a:rPr b="1" lang="en-US" sz="6600">
+                <a:solidFill>
+                  <a:srgbClr val="FFFFFF"/>
+                </a:solidFill>
+                <a:latin typeface="Playfair Display"/>
+                <a:ea typeface="Playfair Display"/>
+                <a:cs typeface="Playfair Display"/>
+                <a:sym typeface="Playfair Display"/>
+              </a:rPr>
+              <a:t>Five of them.</a:t>
+            </a:r>
+          </a:p>
+        </p:txBody>
+      </p:sp>
+      <p:sp>
+        <p:nvSpPr>
+          <p:cNvPr id="169" name="Google Shape;169;p15"/>
+          <p:cNvSpPr/>
+          <p:nvPr/>
+        </p:nvSpPr>
+        <p:spPr>
+          <a:xfrm>
+            <a:off x="1778000" y="3581400"/>
+            <a:ext cx="8636000" cy="2667000"/>
+          </a:xfrm>
+          <a:prstGeom prst="rect">
+            <a:avLst/>
+          </a:prstGeom>
+          <a:noFill/>
+          <a:ln>
+            <a:noFill/>
+          </a:ln>
+        </p:spPr>
+        <p:txBody>
+          <a:bodyPr anchorCtr="0" anchor="ctr" bIns="0" lIns="0" spcFirstLastPara="1" rIns="0" wrap="square" tIns="0">
+            <a:noAutofit/>
+          </a:bodyPr>
+          <a:lstStyle/>
+          <a:p>
+            <a:pPr indent="0" lvl="0" marL="0" marR="0" rtl="0" algn="ctr">
+              <a:lnSpc>
+                <a:spcPct val="130000"/>
+              </a:lnSpc>
+              <a:spcBef>
+                <a:spcPts val="0"/>
+              </a:spcBef>
+              <a:spcAft>
+                <a:spcPts val="0"/>
+              </a:spcAft>
+              <a:buClr>
+                <a:srgbClr val="F7F3E9"/>
+              </a:buClr>
+              <a:buSzPts val="1600"/>
+              <a:buFont typeface="Inter"/>
+              <a:buNone/>
+            </a:pPr>
+            <a:r>
+              <a:rPr lang="en-US" sz="1600">
+                <a:solidFill>
+                  <a:srgbClr val="F7F3E9"/>
+                </a:solidFill>
+                <a:latin typeface="Inter"/>
+                <a:ea typeface="Inter"/>
+                <a:cs typeface="Inter"/>
+                <a:sym typeface="Inter"/>
+              </a:rPr>
+              <a:t>1 · She never sends. Drafts only: you are the send button.</a:t>
+            </a:r>
+          </a:p>
+          <a:p>
+            <a:pPr indent="0" lvl="0" marL="0" marR="0" rtl="0" algn="ctr">
+              <a:lnSpc>
+                <a:spcPct val="130000"/>
+              </a:lnSpc>
+              <a:spcBef>
+                <a:spcPts val="0"/>
+              </a:spcBef>
+              <a:spcAft>
+                <a:spcPts val="0"/>
+              </a:spcAft>
+              <a:buClr>
+                <a:srgbClr val="F7F3E9"/>
+              </a:buClr>
+              <a:buSzPts val="1600"/>
+              <a:buFont typeface="Inter"/>
+              <a:buNone/>
+            </a:pPr>
+            <a:r>
+              <a:rPr lang="en-US" sz="1600">
+                <a:solidFill>
+                  <a:srgbClr val="F7F3E9"/>
+                </a:solidFill>
+                <a:latin typeface="Inter"/>
+                <a:ea typeface="Inter"/>
+                <a:cs typeface="Inter"/>
+                <a:sym typeface="Inter"/>
+              </a:rPr>
+              <a:t>2 · She never deletes. Nothing we do today is destructive.</a:t>
+            </a:r>
+          </a:p>
+          <a:p>
+            <a:pPr indent="0" lvl="0" marL="0" marR="0" rtl="0" algn="ctr">
+              <a:lnSpc>
+                <a:spcPct val="130000"/>
+              </a:lnSpc>
+              <a:spcBef>
+                <a:spcPts val="0"/>
+              </a:spcBef>
+              <a:spcAft>
+                <a:spcPts val="0"/>
+              </a:spcAft>
+              <a:buClr>
+                <a:srgbClr val="F7F3E9"/>
+              </a:buClr>
+              <a:buSzPts val="1600"/>
+              <a:buFont typeface="Inter"/>
+              <a:buNone/>
+            </a:pPr>
+            <a:r>
+              <a:rPr lang="en-US" sz="1600">
+                <a:solidFill>
+                  <a:srgbClr val="F7F3E9"/>
+                </a:solidFill>
+                <a:latin typeface="Inter"/>
+                <a:ea typeface="Inter"/>
+                <a:cs typeface="Inter"/>
+                <a:sym typeface="Inter"/>
+              </a:rPr>
+              <a:t>3 · We move together. Every case file ends at a red STOP sign.</a:t>
+            </a:r>
+          </a:p>
+          <a:p>
+            <a:pPr indent="0" lvl="0" marL="0" marR="0" rtl="0" algn="ctr">
+              <a:lnSpc>
+                <a:spcPct val="130000"/>
+              </a:lnSpc>
+              <a:spcBef>
+                <a:spcPts val="0"/>
+              </a:spcBef>
+              <a:spcAft>
+                <a:spcPts val="0"/>
+              </a:spcAft>
+              <a:buClr>
+                <a:srgbClr val="F7F3E9"/>
+              </a:buClr>
+              <a:buSzPts val="1600"/>
+              <a:buFont typeface="Inter"/>
+              <a:buNone/>
+            </a:pPr>
+            <a:r>
+              <a:rPr lang="en-US" sz="1600">
+                <a:solidFill>
+                  <a:srgbClr val="F7F3E9"/>
+                </a:solidFill>
+                <a:latin typeface="Inter"/>
+                <a:ea typeface="Inter"/>
+                <a:cs typeface="Inter"/>
+                <a:sym typeface="Inter"/>
+              </a:rPr>
+              <a:t>4 · Copy buttons everywhere. Nobody types more than a sentence.</a:t>
+            </a:r>
+          </a:p>
+          <a:p>
+            <a:pPr indent="0" lvl="0" marL="0" marR="0" rtl="0" algn="ctr">
+              <a:lnSpc>
+                <a:spcPct val="130000"/>
+              </a:lnSpc>
+              <a:spcBef>
+                <a:spcPts val="0"/>
+              </a:spcBef>
+              <a:spcAft>
+                <a:spcPts val="0"/>
+              </a:spcAft>
+              <a:buClr>
+                <a:srgbClr val="F7F3E9"/>
+              </a:buClr>
+              <a:buSzPts val="1600"/>
+              <a:buFont typeface="Inter"/>
+              <a:buNone/>
+            </a:pPr>
+            <a:r>
+              <a:rPr lang="en-US" sz="1600">
+                <a:solidFill>
+                  <a:srgbClr val="F7F3E9"/>
+                </a:solidFill>
+                <a:latin typeface="Inter"/>
+                <a:ea typeface="Inter"/>
+                <a:cs typeface="Inter"/>
+                <a:sym typeface="Inter"/>
+              </a:rPr>
+              <a:t>5 · No question is too small. Stuck for 60 seconds? Hand up.</a:t>
+            </a:r>
+          </a:p>
+        </p:txBody>
+      </p:sp>
+      <p:sp>
+        <p:nvSpPr>
+          <p:cNvPr id="170" name="Google Shape;170;p15"/>
+          <p:cNvSpPr/>
+          <p:nvPr/>
+        </p:nvSpPr>
+        <p:spPr>
+          <a:xfrm>
+            <a:off x="6013552" y="1051560"/>
+            <a:ext cx="164592" cy="164592"/>
+          </a:xfrm>
+          <a:prstGeom prst="diamond">
+            <a:avLst/>
+          </a:prstGeom>
+          <a:solidFill>
+            <a:srgbClr val="F7F3E9"/>
+          </a:solidFill>
+          <a:ln>
+            <a:noFill/>
+          </a:ln>
+        </p:spPr>
+        <p:txBody>
+          <a:bodyPr anchorCtr="0" anchor="t" bIns="45700" lIns="91425" spcFirstLastPara="1" rIns="91425" wrap="square" tIns="45700">
+            <a:noAutofit/>
+          </a:bodyPr>
+          <a:lstStyle/>
+          <a:p>
+            <a:pPr indent="0" lvl="0" marL="0" marR="0" rtl="0" algn="l">
+              <a:spcBef>
+                <a:spcPts val="0"/>
+              </a:spcBef>
+              <a:spcAft>
+                <a:spcPts val="0"/>
+              </a:spcAft>
+              <a:buNone/>
+            </a:pPr>
+            <a:r>
+              <a:t/>
+            </a:r>
+            <a:endParaRPr sz="1800">
+              <a:solidFill>
+                <a:schemeClr val="dk1"/>
+              </a:solidFill>
+              <a:latin typeface="Calibri"/>
+              <a:ea typeface="Calibri"/>
+              <a:cs typeface="Calibri"/>
+              <a:sym typeface="Calibri"/>
+            </a:endParaRPr>
+          </a:p>
+        </p:txBody>
+      </p:sp>
+    </p:spTree>
+  </p:cSld>
+  <p:clrMapOvr>
+    <a:masterClrMapping/>
+  </p:clrMapOvr>
+</p:sld>
+</file>
+
+<file path=ppt/slides/slide21.xml><?xml version="1.0" encoding="utf-8"?>
+<p:sld xmlns:a="http://schemas.openxmlformats.org/drawingml/2006/main" xmlns:r="http://schemas.openxmlformats.org/officeDocument/2006/relationships" xmlns:mc="http://schemas.openxmlformats.org/markup-compatibility/2006" xmlns:mv="urn:schemas-microsoft-com:mac:vml" xmlns:p="http://schemas.openxmlformats.org/presentationml/2006/main" xmlns:c="http://schemas.openxmlformats.org/drawingml/2006/chart" xmlns:dgm="http://schemas.openxmlformats.org/drawingml/2006/diagram" xmlns:o="urn:schemas-microsoft-com:office:office" xmlns:v="urn:schemas-microsoft-com:vml" xmlns:pvml="urn:schemas-microsoft-com:office:powerpoint" xmlns:com="http://schemas.openxmlformats.org/drawingml/2006/compatibility" xmlns:p14="http://schemas.microsoft.com/office/powerpoint/2010/main" xmlns:p15="http://schemas.microsoft.com/office/powerpoint/2012/main" xmlns:ahyp="http://schemas.microsoft.com/office/drawing/2018/hyperlinkcolor">
+  <p:cSld>
+    <p:bg>
+      <p:bgPr>
+        <a:solidFill>
+          <a:srgbClr val="A31621"/>
+        </a:solidFill>
+      </p:bgPr>
+    </p:bg>
+    <p:spTree>
+      <p:nvGrpSpPr>
+        <p:cNvPr id="167" name="Shape 167"/>
+        <p:cNvGrpSpPr/>
+        <p:nvPr/>
+      </p:nvGrpSpPr>
+      <p:grpSpPr>
+        <a:xfrm>
+          <a:off x="0" y="0"/>
+          <a:ext cx="0" cy="0"/>
+          <a:chOff x="0" y="0"/>
+          <a:chExt cx="0" cy="0"/>
+        </a:xfrm>
+      </p:grpSpPr>
+      <p:sp>
+        <p:nvSpPr>
+          <p:cNvPr id="168" name="Google Shape;168;p15"/>
+          <p:cNvSpPr/>
+          <p:nvPr/>
+        </p:nvSpPr>
+        <p:spPr>
+          <a:xfrm>
+            <a:off x="822960" y="1554480"/>
+            <a:ext cx="10545775" cy="2651760"/>
+          </a:xfrm>
+          <a:prstGeom prst="rect">
+            <a:avLst/>
+          </a:prstGeom>
+          <a:noFill/>
+          <a:ln>
+            <a:noFill/>
+          </a:ln>
+        </p:spPr>
+        <p:txBody>
+          <a:bodyPr anchorCtr="0" anchor="ctr" bIns="0" lIns="0" spcFirstLastPara="1" rIns="0" wrap="square" tIns="0">
+            <a:noAutofit/>
+          </a:bodyPr>
+          <a:lstStyle/>
+          <a:p>
+            <a:pPr indent="0" lvl="0" marL="0" marR="0" rtl="0" algn="ctr">
+              <a:lnSpc>
+                <a:spcPct val="105000"/>
+              </a:lnSpc>
+              <a:spcBef>
+                <a:spcPts val="0"/>
+              </a:spcBef>
+              <a:spcAft>
+                <a:spcPts val="0"/>
+              </a:spcAft>
+              <a:buClr>
+                <a:srgbClr val="FFFFFF"/>
+              </a:buClr>
+              <a:buSzPts val="6600"/>
+              <a:buFont typeface="Playfair Display"/>
+              <a:buNone/>
+            </a:pPr>
+            <a:r>
+              <a:rPr b="1" lang="en-US" sz="6600">
+                <a:solidFill>
+                  <a:srgbClr val="FFFFFF"/>
+                </a:solidFill>
+                <a:latin typeface="Playfair Display"/>
+                <a:ea typeface="Playfair Display"/>
+                <a:cs typeface="Playfair Display"/>
+                <a:sym typeface="Playfair Display"/>
+              </a:rPr>
+              <a:t>This was never</a:t>
+            </a:r>
+          </a:p>
+          <a:p>
+            <a:pPr indent="0" lvl="0" marL="0" marR="0" rtl="0" algn="ctr">
+              <a:lnSpc>
+                <a:spcPct val="105000"/>
+              </a:lnSpc>
+              <a:spcBef>
+                <a:spcPts val="0"/>
+              </a:spcBef>
+              <a:spcAft>
+                <a:spcPts val="0"/>
+              </a:spcAft>
+              <a:buClr>
+                <a:srgbClr val="FFFFFF"/>
+              </a:buClr>
+              <a:buSzPts val="6600"/>
+              <a:buFont typeface="Playfair Display"/>
+              <a:buNone/>
+            </a:pPr>
+            <a:r>
+              <a:rPr b="1" lang="en-US" sz="6600">
+                <a:solidFill>
+                  <a:srgbClr val="FFFFFF"/>
+                </a:solidFill>
+                <a:latin typeface="Playfair Display"/>
+                <a:ea typeface="Playfair Display"/>
+                <a:cs typeface="Playfair Display"/>
+                <a:sym typeface="Playfair Display"/>
+              </a:rPr>
+              <a:t>about email.</a:t>
+            </a:r>
+          </a:p>
+        </p:txBody>
+      </p:sp>
+      <p:sp>
+        <p:nvSpPr>
+          <p:cNvPr id="169" name="Google Shape;169;p15"/>
+          <p:cNvSpPr/>
+          <p:nvPr/>
+        </p:nvSpPr>
+        <p:spPr>
+          <a:xfrm>
+            <a:off x="1463040" y="4389120"/>
+            <a:ext cx="9265615" cy="1188720"/>
+          </a:xfrm>
+          <a:prstGeom prst="rect">
+            <a:avLst/>
+          </a:prstGeom>
+          <a:noFill/>
+          <a:ln>
+            <a:noFill/>
+          </a:ln>
+        </p:spPr>
+        <p:txBody>
+          <a:bodyPr anchorCtr="0" anchor="ctr" bIns="0" lIns="0" spcFirstLastPara="1" rIns="0" wrap="square" tIns="0">
+            <a:noAutofit/>
+          </a:bodyPr>
+          <a:lstStyle/>
+          <a:p>
+            <a:pPr indent="0" lvl="0" marL="0" marR="0" rtl="0" algn="ctr">
+              <a:lnSpc>
+                <a:spcPct val="130000"/>
+              </a:lnSpc>
+              <a:spcBef>
+                <a:spcPts val="0"/>
+              </a:spcBef>
+              <a:spcAft>
+                <a:spcPts val="0"/>
+              </a:spcAft>
+              <a:buClr>
+                <a:srgbClr val="F7F3E9"/>
+              </a:buClr>
+              <a:buSzPts val="1600"/>
+              <a:buFont typeface="Inter"/>
+              <a:buNone/>
+            </a:pPr>
+            <a:r>
+              <a:rPr lang="en-US" sz="1600">
+                <a:solidFill>
+                  <a:srgbClr val="F7F3E9"/>
+                </a:solidFill>
+                <a:latin typeface="Inter"/>
+                <a:ea typeface="Inter"/>
+                <a:cs typeface="Inter"/>
+                <a:sym typeface="Inter"/>
+              </a:rPr>
+              <a:t>You automated a workflow today by writing plain English: rules became a project, the project became a skill, the skill got a schedule.</a:t>
+            </a:r>
+          </a:p>
+          <a:p>
+            <a:pPr indent="0" lvl="0" marL="0" marR="0" rtl="0" algn="ctr">
+              <a:lnSpc>
+                <a:spcPct val="130000"/>
+              </a:lnSpc>
+              <a:spcBef>
+                <a:spcPts val="0"/>
+              </a:spcBef>
+              <a:spcAft>
+                <a:spcPts val="0"/>
+              </a:spcAft>
+              <a:buClr>
+                <a:srgbClr val="F7F3E9"/>
+              </a:buClr>
+              <a:buSzPts val="1600"/>
+              <a:buFont typeface="Inter"/>
+              <a:buNone/>
+            </a:pPr>
+            <a:r>
+              <a:rPr lang="en-US" sz="1600">
+                <a:solidFill>
+                  <a:srgbClr val="F7F3E9"/>
+                </a:solidFill>
+                <a:latin typeface="Inter"/>
+                <a:ea typeface="Inter"/>
+                <a:cs typeface="Inter"/>
+                <a:sym typeface="Inter"/>
+              </a:rPr>
+              <a:t>Email was the rehearsal. The same ladder runs any workflow you can describe in words.</a:t>
+            </a:r>
+          </a:p>
+        </p:txBody>
+      </p:sp>
+      <p:sp>
+        <p:nvSpPr>
+          <p:cNvPr id="170" name="Google Shape;170;p15"/>
+          <p:cNvSpPr/>
+          <p:nvPr/>
+        </p:nvSpPr>
+        <p:spPr>
+          <a:xfrm>
+            <a:off x="6013552" y="1051560"/>
+            <a:ext cx="164592" cy="164592"/>
+          </a:xfrm>
+          <a:prstGeom prst="diamond">
+            <a:avLst/>
+          </a:prstGeom>
+          <a:solidFill>
+            <a:srgbClr val="F7F3E9"/>
+          </a:solidFill>
+          <a:ln>
+            <a:noFill/>
+          </a:ln>
+        </p:spPr>
+        <p:txBody>
+          <a:bodyPr anchorCtr="0" anchor="t" bIns="45700" lIns="91425" spcFirstLastPara="1" rIns="91425" wrap="square" tIns="45700">
+            <a:noAutofit/>
+          </a:bodyPr>
+          <a:lstStyle/>
+          <a:p>
+            <a:pPr indent="0" lvl="0" marL="0" marR="0" rtl="0" algn="l">
+              <a:spcBef>
+                <a:spcPts val="0"/>
+              </a:spcBef>
+              <a:spcAft>
+                <a:spcPts val="0"/>
+              </a:spcAft>
+              <a:buNone/>
+            </a:pPr>
+            <a:r>
+              <a:t/>
+            </a:r>
+            <a:endParaRPr sz="1800">
+              <a:solidFill>
+                <a:schemeClr val="dk1"/>
+              </a:solidFill>
+              <a:latin typeface="Calibri"/>
+              <a:ea typeface="Calibri"/>
+              <a:cs typeface="Calibri"/>
+              <a:sym typeface="Calibri"/>
+            </a:endParaRPr>
+          </a:p>
+        </p:txBody>
+      </p:sp>
+    </p:spTree>
+  </p:cSld>
+  <p:clrMapOvr>
+    <a:masterClrMapping/>
+  </p:clrMapOvr>
+</p:sld>
+</file>
+
+<file path=ppt/slides/slide22.xml><?xml version="1.0" encoding="utf-8"?>
+<p:sld xmlns:a="http://schemas.openxmlformats.org/drawingml/2006/main" xmlns:r="http://schemas.openxmlformats.org/officeDocument/2006/relationships" xmlns:mc="http://schemas.openxmlformats.org/markup-compatibility/2006" xmlns:mv="urn:schemas-microsoft-com:mac:vml" xmlns:p="http://schemas.openxmlformats.org/presentationml/2006/main" xmlns:c="http://schemas.openxmlformats.org/drawingml/2006/chart" xmlns:dgm="http://schemas.openxmlformats.org/drawingml/2006/diagram" xmlns:o="urn:schemas-microsoft-com:office:office" xmlns:v="urn:schemas-microsoft-com:vml" xmlns:pvml="urn:schemas-microsoft-com:office:powerpoint" xmlns:com="http://schemas.openxmlformats.org/drawingml/2006/compatibility" xmlns:p14="http://schemas.microsoft.com/office/powerpoint/2010/main" xmlns:p15="http://schemas.microsoft.com/office/powerpoint/2012/main" xmlns:ahyp="http://schemas.microsoft.com/office/drawing/2018/hyperlinkcolor">
+  <p:cSld>
+    <p:bg>
+      <p:bgPr>
+        <a:solidFill>
+          <a:srgbClr val="14213D"/>
+        </a:solidFill>
+      </p:bgPr>
+    </p:bg>
+    <p:spTree>
+      <p:nvGrpSpPr>
+        <p:cNvPr id="188" name="Shape 188"/>
+        <p:cNvGrpSpPr/>
+        <p:nvPr/>
+      </p:nvGrpSpPr>
+      <p:grpSpPr>
+        <a:xfrm>
+          <a:off x="0" y="0"/>
+          <a:ext cx="0" cy="0"/>
+          <a:chOff x="0" y="0"/>
+          <a:chExt cx="0" cy="0"/>
+        </a:xfrm>
+      </p:grpSpPr>
+      <p:sp>
+        <p:nvSpPr>
+          <p:cNvPr id="189" name="Google Shape;189;p17"/>
+          <p:cNvSpPr/>
+          <p:nvPr/>
+        </p:nvSpPr>
+        <p:spPr>
+          <a:xfrm>
+            <a:off x="822960" y="502920"/>
+            <a:ext cx="10545775" cy="365760"/>
+          </a:xfrm>
+          <a:prstGeom prst="rect">
+            <a:avLst/>
+          </a:prstGeom>
+          <a:noFill/>
+          <a:ln>
+            <a:noFill/>
+          </a:ln>
+        </p:spPr>
+        <p:txBody>
+          <a:bodyPr anchorCtr="0" anchor="ctr" bIns="0" lIns="0" spcFirstLastPara="1" rIns="0" wrap="square" tIns="0">
+            <a:noAutofit/>
+          </a:bodyPr>
+          <a:lstStyle/>
+          <a:p>
+            <a:pPr indent="0" lvl="0" marL="0" marR="0" rtl="0" algn="l">
+              <a:spcBef>
+                <a:spcPts val="0"/>
+              </a:spcBef>
+              <a:spcAft>
+                <a:spcPts val="0"/>
+              </a:spcAft>
+              <a:buClr>
+                <a:srgbClr val="DDB94A"/>
+              </a:buClr>
+              <a:buSzPts val="1200"/>
+              <a:buFont typeface="Inter"/>
+              <a:buNone/>
+            </a:pPr>
+            <a:r>
+              <a:rPr b="1" lang="en-US" sz="1200">
+                <a:solidFill>
+                  <a:srgbClr val="DDB94A"/>
+                </a:solidFill>
+                <a:latin typeface="Inter"/>
+                <a:ea typeface="Inter"/>
+                <a:cs typeface="Inter"/>
+                <a:sym typeface="Inter"/>
+              </a:rPr>
+              <a:t>THE DISCUSSION — UNTIL 4:00</a:t>
+            </a:r>
+          </a:p>
+        </p:txBody>
+      </p:sp>
+      <p:sp>
+        <p:nvSpPr>
+          <p:cNvPr id="190" name="Google Shape;190;p17"/>
+          <p:cNvSpPr/>
+          <p:nvPr/>
+        </p:nvSpPr>
+        <p:spPr>
+          <a:xfrm>
+            <a:off x="822960" y="1417320"/>
+            <a:ext cx="10545775" cy="2286000"/>
+          </a:xfrm>
+          <a:prstGeom prst="rect">
+            <a:avLst/>
+          </a:prstGeom>
+          <a:noFill/>
+          <a:ln>
+            <a:noFill/>
+          </a:ln>
+        </p:spPr>
+        <p:txBody>
+          <a:bodyPr anchorCtr="0" anchor="ctr" bIns="0" lIns="0" spcFirstLastPara="1" rIns="0" wrap="square" tIns="0">
+            <a:noAutofit/>
+          </a:bodyPr>
+          <a:lstStyle/>
+          <a:p>
+            <a:pPr indent="0" lvl="0" marL="0" marR="0" rtl="0" algn="ctr">
+              <a:spcBef>
+                <a:spcPts val="0"/>
+              </a:spcBef>
+              <a:spcAft>
+                <a:spcPts val="0"/>
+              </a:spcAft>
+              <a:buClr>
+                <a:srgbClr val="C9A227"/>
+              </a:buClr>
+              <a:buSzPts val="13000"/>
+              <a:buFont typeface="Playfair Display"/>
+              <a:buNone/>
+            </a:pPr>
+            <a:r>
+              <a:rPr b="1" lang="en-US" sz="13000">
+                <a:solidFill>
+                  <a:srgbClr val="C9A227"/>
+                </a:solidFill>
+                <a:latin typeface="Playfair Display"/>
+                <a:ea typeface="Playfair Display"/>
+                <a:cs typeface="Playfair Display"/>
+                <a:sym typeface="Playfair Display"/>
+              </a:rPr>
+              <a:t>Over to you.</a:t>
+            </a:r>
+          </a:p>
+        </p:txBody>
+      </p:sp>
+      <p:sp>
+        <p:nvSpPr>
+          <p:cNvPr id="191" name="Google Shape;191;p17"/>
+          <p:cNvSpPr/>
+          <p:nvPr/>
+        </p:nvSpPr>
+        <p:spPr>
+          <a:xfrm>
+            <a:off x="914400" y="3810000"/>
+            <a:ext cx="10362895" cy="640080"/>
+          </a:xfrm>
+          <a:prstGeom prst="rect">
+            <a:avLst/>
+          </a:prstGeom>
+          <a:noFill/>
+          <a:ln>
+            <a:noFill/>
+          </a:ln>
+        </p:spPr>
+        <p:txBody>
+          <a:bodyPr anchorCtr="0" anchor="ctr" bIns="0" lIns="0" spcFirstLastPara="1" rIns="0" wrap="square" tIns="0">
+            <a:noAutofit/>
+          </a:bodyPr>
+          <a:lstStyle/>
+          <a:p>
+            <a:pPr indent="0" lvl="0" marL="0" marR="0" rtl="0" algn="ctr">
+              <a:spcBef>
+                <a:spcPts val="0"/>
+              </a:spcBef>
+              <a:spcAft>
+                <a:spcPts val="0"/>
+              </a:spcAft>
+              <a:buClr>
+                <a:srgbClr val="F7F3E9"/>
+              </a:buClr>
+              <a:buSzPts val="2400"/>
+              <a:buFont typeface="Playfair Display"/>
+              <a:buNone/>
+            </a:pPr>
+            <a:r>
+              <a:rPr lang="en-US" sz="2400">
+                <a:solidFill>
+                  <a:srgbClr val="F7F3E9"/>
+                </a:solidFill>
+                <a:latin typeface="Playfair Display"/>
+                <a:ea typeface="Playfair Display"/>
+                <a:cs typeface="Playfair Display"/>
+                <a:sym typeface="Playfair Display"/>
+              </a:rPr>
+              <a:t>Three questions to open the floor:</a:t>
+            </a:r>
+          </a:p>
+        </p:txBody>
+      </p:sp>
+      <p:sp>
+        <p:nvSpPr>
+          <p:cNvPr id="192" name="Google Shape;192;p17"/>
+          <p:cNvSpPr/>
+          <p:nvPr/>
+        </p:nvSpPr>
+        <p:spPr>
+          <a:xfrm>
+            <a:off x="1463040" y="4470400"/>
+            <a:ext cx="9265615" cy="1524000"/>
+          </a:xfrm>
+          <a:prstGeom prst="rect">
+            <a:avLst/>
+          </a:prstGeom>
+          <a:noFill/>
+          <a:ln>
+            <a:noFill/>
+          </a:ln>
+        </p:spPr>
+        <p:txBody>
+          <a:bodyPr anchorCtr="0" anchor="ctr" bIns="0" lIns="0" spcFirstLastPara="1" rIns="0" wrap="square" tIns="0">
+            <a:noAutofit/>
+          </a:bodyPr>
+          <a:lstStyle/>
+          <a:p>
+            <a:pPr indent="0" lvl="0" marL="0" marR="0" rtl="0" algn="ctr">
+              <a:lnSpc>
+                <a:spcPct val="125000"/>
+              </a:lnSpc>
+              <a:spcBef>
+                <a:spcPts val="0"/>
+              </a:spcBef>
+              <a:spcAft>
+                <a:spcPts val="0"/>
+              </a:spcAft>
+              <a:buClr>
+                <a:srgbClr val="AFA893"/>
+              </a:buClr>
+              <a:buSzPts val="1450"/>
+              <a:buFont typeface="Inter"/>
+              <a:buNone/>
+            </a:pPr>
+            <a:r>
+              <a:rPr i="1" lang="en-US" sz="1950">
+                <a:solidFill>
+                  <a:srgbClr val="AFA893"/>
+                </a:solidFill>
+                <a:latin typeface="Inter"/>
+                <a:ea typeface="Inter"/>
+                <a:cs typeface="Inter"/>
+                <a:sym typeface="Inter"/>
+              </a:rPr>
+              <a:t>1 · What do you re-explain to someone every single week?</a:t>
+            </a:r>
+          </a:p>
+          <a:p>
+            <a:pPr indent="0" lvl="0" marL="0" marR="0" rtl="0" algn="ctr">
+              <a:lnSpc>
+                <a:spcPct val="125000"/>
+              </a:lnSpc>
+              <a:spcBef>
+                <a:spcPts val="0"/>
+              </a:spcBef>
+              <a:spcAft>
+                <a:spcPts val="0"/>
+              </a:spcAft>
+              <a:buClr>
+                <a:srgbClr val="AFA893"/>
+              </a:buClr>
+              <a:buSzPts val="1450"/>
+              <a:buFont typeface="Inter"/>
+              <a:buNone/>
+            </a:pPr>
+            <a:r>
+              <a:rPr i="1" lang="en-US" sz="1950">
+                <a:solidFill>
+                  <a:srgbClr val="AFA893"/>
+                </a:solidFill>
+                <a:latin typeface="Inter"/>
+                <a:ea typeface="Inter"/>
+                <a:cs typeface="Inter"/>
+                <a:sym typeface="Inter"/>
+              </a:rPr>
+              <a:t>2 · What arrives daily that someone else summarizes for you?</a:t>
+            </a:r>
+          </a:p>
+          <a:p>
+            <a:pPr indent="0" lvl="0" marL="0" marR="0" rtl="0" algn="ctr">
+              <a:lnSpc>
+                <a:spcPct val="125000"/>
+              </a:lnSpc>
+              <a:spcBef>
+                <a:spcPts val="0"/>
+              </a:spcBef>
+              <a:spcAft>
+                <a:spcPts val="0"/>
+              </a:spcAft>
+              <a:buClr>
+                <a:srgbClr val="AFA893"/>
+              </a:buClr>
+              <a:buSzPts val="1450"/>
+              <a:buFont typeface="Inter"/>
+              <a:buNone/>
+            </a:pPr>
+            <a:r>
+              <a:rPr i="1" lang="en-US" sz="1950">
+                <a:solidFill>
+                  <a:srgbClr val="AFA893"/>
+                </a:solidFill>
+                <a:latin typeface="Inter"/>
+                <a:ea typeface="Inter"/>
+                <a:cs typeface="Inter"/>
+                <a:sym typeface="Inter"/>
+              </a:rPr>
+              <a:t>3 · Which decision waits on you only because the data is scattered?</a:t>
+            </a:r>
+          </a:p>
+        </p:txBody>
+      </p:sp>
+    </p:spTree>
+  </p:cSld>
+  <p:clrMapOvr>
+    <a:masterClrMapping/>
+  </p:clrMapOvr>
+</p:sld>
+</file>
+
 <file path=ppt/slides/slide3.xml><?xml version="1.0" encoding="utf-8"?>
 <p:sld xmlns:a="http://schemas.openxmlformats.org/drawingml/2006/main" xmlns:r="http://schemas.openxmlformats.org/officeDocument/2006/relationships" xmlns:mc="http://schemas.openxmlformats.org/markup-compatibility/2006" xmlns:mv="urn:schemas-microsoft-com:mac:vml" xmlns:p="http://schemas.openxmlformats.org/presentationml/2006/main" xmlns:c="http://schemas.openxmlformats.org/drawingml/2006/chart" xmlns:dgm="http://schemas.openxmlformats.org/drawingml/2006/diagram" xmlns:o="urn:schemas-microsoft-com:office:office" xmlns:v="urn:schemas-microsoft-com:vml" xmlns:pvml="urn:schemas-microsoft-com:office:powerpoint" xmlns:com="http://schemas.openxmlformats.org/drawingml/2006/compatibility" xmlns:p14="http://schemas.microsoft.com/office/powerpoint/2010/main" xmlns:p15="http://schemas.microsoft.com/office/powerpoint/2012/main" xmlns:ahyp="http://schemas.microsoft.com/office/drawing/2018/hyperlinkcolor">
   <p:cSld>
@@ -10301,17 +15238,8 @@
                 <a:cs typeface="Inter"/>
                 <a:sym typeface="Inter"/>
               </a:rPr>
-              <a:t>THE PLAN </a:t>
-            </a:r>
-            <a:endParaRPr sz="1200">
-              <a:solidFill>
-                <a:schemeClr val="dk1"/>
-              </a:solidFill>
-              <a:latin typeface="Calibri"/>
-              <a:ea typeface="Calibri"/>
-              <a:cs typeface="Calibri"/>
-              <a:sym typeface="Calibri"/>
-            </a:endParaRPr>
+              <a:t>THE PLAN · 2:30 CONTEXT → 2:50 BUILD → 3:30 DISCUSSION → 4:00 DONE</a:t>
+            </a:r>
           </a:p>
         </p:txBody>
       </p:sp>
@@ -10551,17 +15479,8 @@
                 <a:cs typeface="Inter"/>
                 <a:sym typeface="Inter"/>
               </a:rPr>
-              <a:t>THE INTERVIEW</a:t>
-            </a:r>
-            <a:endParaRPr sz="1250">
-              <a:solidFill>
-                <a:schemeClr val="dk1"/>
-              </a:solidFill>
-              <a:latin typeface="Calibri"/>
-              <a:ea typeface="Calibri"/>
-              <a:cs typeface="Calibri"/>
-              <a:sym typeface="Calibri"/>
-            </a:endParaRPr>
+              <a:t>FIRST IMPRESSIONS</a:t>
+            </a:r>
           </a:p>
           <a:p>
             <a:pPr indent="0" lvl="0" marL="0" marR="0" rtl="0" algn="l">
@@ -10588,17 +15507,8 @@
                 <a:cs typeface="Inter"/>
                 <a:sym typeface="Inter"/>
               </a:rPr>
-              <a:t>CHAT · ~10 MIN</a:t>
-            </a:r>
-            <a:endParaRPr sz="1250">
-              <a:solidFill>
-                <a:schemeClr val="dk1"/>
-              </a:solidFill>
-              <a:latin typeface="Calibri"/>
-              <a:ea typeface="Calibri"/>
-              <a:cs typeface="Calibri"/>
-              <a:sym typeface="Calibri"/>
-            </a:endParaRPr>
+              <a:t>PROJECT · ~15 MIN</a:t>
+            </a:r>
           </a:p>
         </p:txBody>
       </p:sp>
@@ -10654,17 +15564,8 @@
                 <a:cs typeface="Inter"/>
                 <a:sym typeface="Inter"/>
               </a:rPr>
-              <a:t>She reads your inbox and drafts her first reply. You decide if she’s hired.</a:t>
-            </a:r>
-            <a:endParaRPr>
-              <a:solidFill>
-                <a:schemeClr val="dk1"/>
-              </a:solidFill>
-              <a:latin typeface="Calibri"/>
-              <a:ea typeface="Calibri"/>
-              <a:cs typeface="Calibri"/>
-              <a:sym typeface="Calibri"/>
-            </a:endParaRPr>
+              <a:t>One desk for everything: connect Gmail + Calendar, and she drafts her first reply.</a:t>
+            </a:r>
           </a:p>
         </p:txBody>
       </p:sp>
@@ -10676,7 +15577,7 @@
         </p:nvSpPr>
         <p:spPr>
           <a:xfrm>
-            <a:off x="3584448" y="2011680"/>
+            <a:off x="4813300" y="2011680"/>
             <a:ext cx="2542032" cy="3108960"/>
           </a:xfrm>
           <a:prstGeom prst="roundRect">
@@ -10737,7 +15638,7 @@
         </p:nvSpPr>
         <p:spPr>
           <a:xfrm>
-            <a:off x="3858768" y="2108343"/>
+            <a:off x="5092700" y="2108343"/>
             <a:ext cx="1993392" cy="502920"/>
           </a:xfrm>
           <a:prstGeom prst="rect">
@@ -10800,7 +15701,7 @@
         </p:nvSpPr>
         <p:spPr>
           <a:xfrm>
-            <a:off x="3858768" y="2526355"/>
+            <a:off x="5092700" y="2526355"/>
             <a:ext cx="1993392" cy="594360"/>
           </a:xfrm>
           <a:prstGeom prst="rect">
@@ -10841,20 +15742,24 @@
                 <a:cs typeface="Inter"/>
                 <a:sym typeface="Inter"/>
               </a:rPr>
-              <a:t>FIRST</a:t>
-            </a:r>
-            <a:r>
-              <a:rPr lang="en-US" sz="1250">
-                <a:solidFill>
-                  <a:schemeClr val="dk1"/>
-                </a:solidFill>
-                <a:latin typeface="Calibri"/>
-                <a:ea typeface="Calibri"/>
-                <a:cs typeface="Calibri"/>
-                <a:sym typeface="Calibri"/>
-              </a:rPr>
-              <a:t> </a:t>
-            </a:r>
+              <a:t>THE TRIAGE DESK</a:t>
+            </a:r>
+          </a:p>
+          <a:p>
+            <a:pPr indent="0" lvl="0" marL="0" marR="0" rtl="0" algn="l">
+              <a:spcBef>
+                <a:spcPts val="0"/>
+              </a:spcBef>
+              <a:spcAft>
+                <a:spcPts val="0"/>
+              </a:spcAft>
+              <a:buClr>
+                <a:srgbClr val="F7F3E9"/>
+              </a:buClr>
+              <a:buSzPts val="1250"/>
+              <a:buFont typeface="Inter"/>
+              <a:buNone/>
+            </a:pPr>
             <a:r>
               <a:rPr b="1" lang="en-US" sz="1250">
                 <a:solidFill>
@@ -10865,112 +15770,65 @@
                 <a:cs typeface="Inter"/>
                 <a:sym typeface="Inter"/>
               </a:rPr>
-              <a:t>PROJECT · </a:t>
-            </a:r>
-            <a:endParaRPr/>
-          </a:p>
-          <a:p>
-            <a:pPr indent="0" lvl="0" marL="0" marR="0" rtl="0" algn="l">
-              <a:spcBef>
-                <a:spcPts val="0"/>
-              </a:spcBef>
-              <a:spcAft>
-                <a:spcPts val="0"/>
-              </a:spcAft>
-              <a:buClr>
-                <a:srgbClr val="F7F3E9"/>
-              </a:buClr>
-              <a:buSzPts val="1250"/>
+              <a:t>INSTRUCTIONS · ~15 MIN</a:t>
+            </a:r>
+          </a:p>
+        </p:txBody>
+      </p:sp>
+      <p:sp>
+        <p:nvSpPr>
+          <p:cNvPr id="62" name="Google Shape;62;p7"/>
+          <p:cNvSpPr/>
+          <p:nvPr/>
+        </p:nvSpPr>
+        <p:spPr>
+          <a:xfrm>
+            <a:off x="5092700" y="3310128"/>
+            <a:ext cx="1993392" cy="1235746"/>
+          </a:xfrm>
+          <a:prstGeom prst="rect">
+            <a:avLst/>
+          </a:prstGeom>
+          <a:noFill/>
+          <a:ln>
+            <a:noFill/>
+          </a:ln>
+        </p:spPr>
+        <p:txBody>
+          <a:bodyPr anchorCtr="0" anchor="ctr" bIns="0" lIns="0" spcFirstLastPara="1" rIns="0" wrap="square" tIns="0">
+            <a:noAutofit/>
+          </a:bodyPr>
+          <a:lstStyle/>
+          <a:p>
+            <a:pPr indent="0" lvl="0" marL="0" marR="0" rtl="0" algn="l">
+              <a:lnSpc>
+                <a:spcPct val="110000"/>
+              </a:lnSpc>
+              <a:spcBef>
+                <a:spcPts val="0"/>
+              </a:spcBef>
+              <a:spcAft>
+                <a:spcPts val="0"/>
+              </a:spcAft>
+              <a:buClr>
+                <a:srgbClr val="AFA893"/>
+              </a:buClr>
+              <a:buSzPts val="1600"/>
               <a:buFont typeface="Inter"/>
               <a:buNone/>
             </a:pPr>
             <a:r>
-              <a:rPr b="1" lang="en-US" sz="1250">
-                <a:solidFill>
-                  <a:srgbClr val="F7F3E9"/>
+              <a:rPr i="1" lang="en-US">
+                <a:solidFill>
+                  <a:srgbClr val="AFA893"/>
                 </a:solidFill>
                 <a:latin typeface="Inter"/>
                 <a:ea typeface="Inter"/>
                 <a:cs typeface="Inter"/>
                 <a:sym typeface="Inter"/>
               </a:rPr>
-              <a:t>~15 MIN</a:t>
-            </a:r>
-            <a:endParaRPr sz="1250">
-              <a:solidFill>
-                <a:schemeClr val="dk1"/>
-              </a:solidFill>
-              <a:latin typeface="Calibri"/>
-              <a:ea typeface="Calibri"/>
-              <a:cs typeface="Calibri"/>
-              <a:sym typeface="Calibri"/>
-            </a:endParaRPr>
-          </a:p>
-        </p:txBody>
-      </p:sp>
-      <p:sp>
-        <p:nvSpPr>
-          <p:cNvPr id="62" name="Google Shape;62;p7"/>
-          <p:cNvSpPr/>
-          <p:nvPr/>
-        </p:nvSpPr>
-        <p:spPr>
-          <a:xfrm>
-            <a:off x="3858768" y="3310128"/>
-            <a:ext cx="1993392" cy="1235746"/>
-          </a:xfrm>
-          <a:prstGeom prst="rect">
-            <a:avLst/>
-          </a:prstGeom>
-          <a:noFill/>
-          <a:ln>
-            <a:noFill/>
-          </a:ln>
-        </p:spPr>
-        <p:txBody>
-          <a:bodyPr anchorCtr="0" anchor="ctr" bIns="0" lIns="0" spcFirstLastPara="1" rIns="0" wrap="square" tIns="0">
-            <a:noAutofit/>
-          </a:bodyPr>
-          <a:lstStyle/>
-          <a:p>
-            <a:pPr indent="0" lvl="0" marL="0" marR="0" rtl="0" algn="l">
-              <a:lnSpc>
-                <a:spcPct val="110000"/>
-              </a:lnSpc>
-              <a:spcBef>
-                <a:spcPts val="0"/>
-              </a:spcBef>
-              <a:spcAft>
-                <a:spcPts val="0"/>
-              </a:spcAft>
-              <a:buClr>
-                <a:srgbClr val="AFA893"/>
-              </a:buClr>
-              <a:buSzPts val="1600"/>
-              <a:buFont typeface="Inter"/>
-              <a:buNone/>
-            </a:pPr>
-            <a:r>
-              <a:rPr i="1" lang="en-US">
-                <a:solidFill>
-                  <a:srgbClr val="AFA893"/>
-                </a:solidFill>
-                <a:latin typeface="Inter"/>
-                <a:ea typeface="Inter"/>
-                <a:cs typeface="Inter"/>
-                <a:sym typeface="Inter"/>
-              </a:rPr>
-              <a:t>You brief her once: your people, your priorities, your voice. She remembers.</a:t>
-            </a:r>
-            <a:endParaRPr>
-              <a:solidFill>
-                <a:schemeClr val="dk1"/>
-              </a:solidFill>
-              <a:latin typeface="Calibri"/>
-              <a:ea typeface="Calibri"/>
-              <a:cs typeface="Calibri"/>
-              <a:sym typeface="Calibri"/>
-            </a:endParaRPr>
+              <a:t>You brief her once: red, yellow, gray. Your people, your priorities, your voice.</a:t>
+            </a:r>
           </a:p>
         </p:txBody>
       </p:sp>
@@ -10982,7 +15840,7 @@
         </p:nvSpPr>
         <p:spPr>
           <a:xfrm>
-            <a:off x="6345936" y="2011680"/>
+            <a:off x="8813800" y="2011680"/>
             <a:ext cx="2542032" cy="3108960"/>
           </a:xfrm>
           <a:prstGeom prst="roundRect">
@@ -11043,7 +15901,7 @@
         </p:nvSpPr>
         <p:spPr>
           <a:xfrm>
-            <a:off x="6620256" y="2108343"/>
+            <a:off x="9093200" y="2108343"/>
             <a:ext cx="1993392" cy="502920"/>
           </a:xfrm>
           <a:prstGeom prst="rect">
@@ -11106,7 +15964,7 @@
         </p:nvSpPr>
         <p:spPr>
           <a:xfrm>
-            <a:off x="6620256" y="2526355"/>
+            <a:off x="9093200" y="2526355"/>
             <a:ext cx="1993392" cy="594360"/>
           </a:xfrm>
           <a:prstGeom prst="rect">
@@ -11147,20 +16005,24 @@
                 <a:cs typeface="Inter"/>
                 <a:sym typeface="Inter"/>
               </a:rPr>
-              <a:t>HER PLAYBOOK</a:t>
-            </a:r>
-            <a:r>
-              <a:rPr lang="en-US" sz="1250">
-                <a:solidFill>
-                  <a:schemeClr val="dk1"/>
-                </a:solidFill>
-                <a:latin typeface="Calibri"/>
-                <a:ea typeface="Calibri"/>
-                <a:cs typeface="Calibri"/>
-                <a:sym typeface="Calibri"/>
-              </a:rPr>
-              <a:t> </a:t>
-            </a:r>
+              <a:t>DONNA, FULL TIME</a:t>
+            </a:r>
+          </a:p>
+          <a:p>
+            <a:pPr indent="0" lvl="0" marL="0" marR="0" rtl="0" algn="l">
+              <a:spcBef>
+                <a:spcPts val="0"/>
+              </a:spcBef>
+              <a:spcAft>
+                <a:spcPts val="0"/>
+              </a:spcAft>
+              <a:buClr>
+                <a:srgbClr val="F7F3E9"/>
+              </a:buClr>
+              <a:buSzPts val="1250"/>
+              <a:buFont typeface="Inter"/>
+              <a:buNone/>
+            </a:pPr>
             <a:r>
               <a:rPr b="1" lang="en-US" sz="1250">
                 <a:solidFill>
@@ -11171,59 +16033,78 @@
                 <a:cs typeface="Inter"/>
                 <a:sym typeface="Inter"/>
               </a:rPr>
-              <a:t>· </a:t>
-            </a:r>
-            <a:endParaRPr/>
-          </a:p>
-          <a:p>
-            <a:pPr indent="0" lvl="0" marL="0" marR="0" rtl="0" algn="l">
-              <a:spcBef>
-                <a:spcPts val="0"/>
-              </a:spcBef>
-              <a:spcAft>
-                <a:spcPts val="0"/>
-              </a:spcAft>
-              <a:buClr>
-                <a:srgbClr val="F7F3E9"/>
-              </a:buClr>
-              <a:buSzPts val="1250"/>
+              <a:t>SKILL + SCHEDULE · ~15 MIN</a:t>
+            </a:r>
+          </a:p>
+        </p:txBody>
+      </p:sp>
+      <p:sp>
+        <p:nvSpPr>
+          <p:cNvPr id="66" name="Google Shape;66;p7"/>
+          <p:cNvSpPr/>
+          <p:nvPr/>
+        </p:nvSpPr>
+        <p:spPr>
+          <a:xfrm>
+            <a:off x="9093200" y="3310128"/>
+            <a:ext cx="1993392" cy="1235746"/>
+          </a:xfrm>
+          <a:prstGeom prst="rect">
+            <a:avLst/>
+          </a:prstGeom>
+          <a:noFill/>
+          <a:ln>
+            <a:noFill/>
+          </a:ln>
+        </p:spPr>
+        <p:txBody>
+          <a:bodyPr anchorCtr="0" anchor="ctr" bIns="0" lIns="0" spcFirstLastPara="1" rIns="0" wrap="square" tIns="0">
+            <a:noAutofit/>
+          </a:bodyPr>
+          <a:lstStyle/>
+          <a:p>
+            <a:pPr indent="0" lvl="0" marL="0" marR="0" rtl="0" algn="l">
+              <a:lnSpc>
+                <a:spcPct val="110000"/>
+              </a:lnSpc>
+              <a:spcBef>
+                <a:spcPts val="0"/>
+              </a:spcBef>
+              <a:spcAft>
+                <a:spcPts val="0"/>
+              </a:spcAft>
+              <a:buClr>
+                <a:srgbClr val="AFA893"/>
+              </a:buClr>
+              <a:buSzPts val="1600"/>
               <a:buFont typeface="Inter"/>
               <a:buNone/>
             </a:pPr>
             <a:r>
-              <a:rPr b="1" lang="en-US" sz="1250">
-                <a:solidFill>
-                  <a:srgbClr val="F7F3E9"/>
+              <a:rPr i="1" lang="en-US">
+                <a:solidFill>
+                  <a:srgbClr val="AFA893"/>
                 </a:solidFill>
                 <a:latin typeface="Inter"/>
                 <a:ea typeface="Inter"/>
                 <a:cs typeface="Inter"/>
                 <a:sym typeface="Inter"/>
               </a:rPr>
-              <a:t>~20 MIN</a:t>
-            </a:r>
-            <a:endParaRPr sz="1250">
-              <a:solidFill>
-                <a:schemeClr val="dk1"/>
-              </a:solidFill>
-              <a:latin typeface="Calibri"/>
-              <a:ea typeface="Calibri"/>
-              <a:cs typeface="Calibri"/>
-              <a:sym typeface="Calibri"/>
-            </a:endParaRPr>
-          </a:p>
-        </p:txBody>
-      </p:sp>
-      <p:sp>
-        <p:nvSpPr>
-          <p:cNvPr id="66" name="Google Shape;66;p7"/>
+              <a:t>Her playbook becomes a skill she keeps, and she takes the 4:30 evening shift.</a:t>
+            </a:r>
+          </a:p>
+        </p:txBody>
+      </p:sp>
+      <p:sp>
+        <p:nvSpPr>
+          <p:cNvPr id="71" name="Google Shape;71;p7"/>
           <p:cNvSpPr/>
           <p:nvPr/>
         </p:nvSpPr>
         <p:spPr>
           <a:xfrm>
-            <a:off x="6620256" y="3310128"/>
-            <a:ext cx="1993392" cy="1235746"/>
+            <a:off x="822960" y="5440680"/>
+            <a:ext cx="10545775" cy="457200"/>
           </a:xfrm>
           <a:prstGeom prst="rect">
             <a:avLst/>
@@ -11240,9 +16121,6 @@
           <a:lstStyle/>
           <a:p>
             <a:pPr indent="0" lvl="0" marL="0" marR="0" rtl="0" algn="l">
-              <a:lnSpc>
-                <a:spcPct val="110000"/>
-              </a:lnSpc>
               <a:spcBef>
                 <a:spcPts val="0"/>
               </a:spcBef>
@@ -11252,12 +16130,12 @@
               <a:buClr>
                 <a:srgbClr val="AFA893"/>
               </a:buClr>
-              <a:buSzPts val="1600"/>
+              <a:buSzPts val="2400"/>
               <a:buFont typeface="Inter"/>
               <a:buNone/>
             </a:pPr>
             <a:r>
-              <a:rPr i="1" lang="en-US">
+              <a:rPr i="1" lang="en-US" sz="2400">
                 <a:solidFill>
                   <a:srgbClr val="AFA893"/>
                 </a:solidFill>
@@ -11266,90 +16144,20 @@
                 <a:cs typeface="Inter"/>
                 <a:sym typeface="Inter"/>
               </a:rPr>
-              <a:t>Your reply rules become a skill she carries everywhere. Drafts only, never sends.</a:t>
-            </a:r>
-            <a:endParaRPr>
-              <a:solidFill>
-                <a:schemeClr val="dk1"/>
-              </a:solidFill>
-              <a:latin typeface="Calibri"/>
-              <a:ea typeface="Calibri"/>
-              <a:cs typeface="Calibri"/>
-              <a:sym typeface="Calibri"/>
-            </a:endParaRPr>
-          </a:p>
-        </p:txBody>
-      </p:sp>
-      <p:sp>
-        <p:nvSpPr>
-          <p:cNvPr id="67" name="Google Shape;67;p7"/>
+              <a:t>Each case file is on the site. Every prompt has a copy button. You paste, she works.</a:t>
+            </a:r>
+          </a:p>
+        </p:txBody>
+      </p:sp>
+      <p:sp>
+        <p:nvSpPr>
+          <p:cNvPr id="72" name="Google Shape;72;p7"/>
           <p:cNvSpPr/>
           <p:nvPr/>
         </p:nvSpPr>
         <p:spPr>
           <a:xfrm>
-            <a:off x="9107424" y="2011680"/>
-            <a:ext cx="2542032" cy="3108960"/>
-          </a:xfrm>
-          <a:prstGeom prst="roundRect">
-            <a:avLst>
-              <a:gd fmla="val 2158" name="adj"/>
-            </a:avLst>
-          </a:prstGeom>
-          <a:solidFill>
-            <a:srgbClr val="1B2A4A"/>
-          </a:solidFill>
-          <a:ln cap="flat" cmpd="sng" w="9525">
-            <a:solidFill>
-              <a:srgbClr val="C9A227">
-                <a:alpha val="65098"/>
-              </a:srgbClr>
-            </a:solidFill>
-            <a:prstDash val="solid"/>
-            <a:round/>
-            <a:headEnd len="sm" w="sm" type="none"/>
-            <a:tailEnd len="sm" w="sm" type="none"/>
-          </a:ln>
-        </p:spPr>
-        <p:txBody>
-          <a:bodyPr anchorCtr="0" anchor="t" bIns="45700" lIns="91425" spcFirstLastPara="1" rIns="91425" wrap="square" tIns="45700">
-            <a:noAutofit/>
-          </a:bodyPr>
-          <a:lstStyle/>
-          <a:p>
-            <a:pPr indent="0" lvl="0" marL="0" marR="0" rtl="0" algn="l">
-              <a:spcBef>
-                <a:spcPts val="0"/>
-              </a:spcBef>
-              <a:spcAft>
-                <a:spcPts val="0"/>
-              </a:spcAft>
-              <a:buNone/>
-            </a:pPr>
-            <a:r>
-              <a:t/>
-            </a:r>
-            <a:endParaRPr sz="1800">
-              <a:solidFill>
-                <a:schemeClr val="dk1"/>
-              </a:solidFill>
-              <a:latin typeface="Calibri"/>
-              <a:ea typeface="Calibri"/>
-              <a:cs typeface="Calibri"/>
-              <a:sym typeface="Calibri"/>
-            </a:endParaRPr>
-          </a:p>
-        </p:txBody>
-      </p:sp>
-      <p:sp>
-        <p:nvSpPr>
-          <p:cNvPr id="68" name="Google Shape;68;p7"/>
-          <p:cNvSpPr/>
-          <p:nvPr/>
-        </p:nvSpPr>
-        <p:spPr>
-          <a:xfrm>
-            <a:off x="9381744" y="2108343"/>
+            <a:off x="1090879" y="4526280"/>
             <a:ext cx="1993392" cy="502920"/>
           </a:xfrm>
           <a:prstGeom prst="rect">
@@ -11376,12 +16184,12 @@
               <a:buClr>
                 <a:srgbClr val="C9A227"/>
               </a:buClr>
-              <a:buSzPts val="2600"/>
+              <a:buSzPts val="1600"/>
               <a:buFont typeface="Playfair Display"/>
               <a:buNone/>
             </a:pPr>
             <a:r>
-              <a:rPr b="1" lang="en-US" sz="2600">
+              <a:rPr b="1" lang="en-US" sz="1600">
                 <a:solidFill>
                   <a:srgbClr val="C9A227"/>
                 </a:solidFill>
@@ -11390,274 +16198,20 @@
                 <a:cs typeface="Playfair Display"/>
                 <a:sym typeface="Playfair Display"/>
               </a:rPr>
-              <a:t>04</a:t>
-            </a:r>
-            <a:endParaRPr sz="2600">
-              <a:solidFill>
-                <a:schemeClr val="dk1"/>
-              </a:solidFill>
-              <a:latin typeface="Calibri"/>
-              <a:ea typeface="Calibri"/>
-              <a:cs typeface="Calibri"/>
-              <a:sym typeface="Calibri"/>
-            </a:endParaRPr>
-          </a:p>
-        </p:txBody>
-      </p:sp>
-      <p:sp>
-        <p:nvSpPr>
-          <p:cNvPr id="69" name="Google Shape;69;p7"/>
+              <a:t>Topic: Projects + Connectors</a:t>
+            </a:r>
+          </a:p>
+        </p:txBody>
+      </p:sp>
+      <p:sp>
+        <p:nvSpPr>
+          <p:cNvPr id="73" name="Google Shape;73;p7"/>
           <p:cNvSpPr/>
           <p:nvPr/>
         </p:nvSpPr>
         <p:spPr>
           <a:xfrm>
-            <a:off x="9381744" y="2526355"/>
-            <a:ext cx="1993392" cy="594360"/>
-          </a:xfrm>
-          <a:prstGeom prst="rect">
-            <a:avLst/>
-          </a:prstGeom>
-          <a:noFill/>
-          <a:ln>
-            <a:noFill/>
-          </a:ln>
-        </p:spPr>
-        <p:txBody>
-          <a:bodyPr anchorCtr="0" anchor="ctr" bIns="0" lIns="0" spcFirstLastPara="1" rIns="0" wrap="square" tIns="0">
-            <a:noAutofit/>
-          </a:bodyPr>
-          <a:lstStyle/>
-          <a:p>
-            <a:pPr indent="0" lvl="0" marL="0" marR="0" rtl="0" algn="l">
-              <a:spcBef>
-                <a:spcPts val="0"/>
-              </a:spcBef>
-              <a:spcAft>
-                <a:spcPts val="0"/>
-              </a:spcAft>
-              <a:buClr>
-                <a:srgbClr val="F7F3E9"/>
-              </a:buClr>
-              <a:buSzPts val="1250"/>
-              <a:buFont typeface="Inter"/>
-              <a:buNone/>
-            </a:pPr>
-            <a:r>
-              <a:rPr b="1" lang="en-US" sz="1250">
-                <a:solidFill>
-                  <a:srgbClr val="F7F3E9"/>
-                </a:solidFill>
-                <a:latin typeface="Inter"/>
-                <a:ea typeface="Inter"/>
-                <a:cs typeface="Inter"/>
-                <a:sym typeface="Inter"/>
-              </a:rPr>
-              <a:t>THE KEYS</a:t>
-            </a:r>
-            <a:r>
-              <a:rPr lang="en-US" sz="1250">
-                <a:solidFill>
-                  <a:schemeClr val="dk1"/>
-                </a:solidFill>
-                <a:latin typeface="Calibri"/>
-                <a:ea typeface="Calibri"/>
-                <a:cs typeface="Calibri"/>
-                <a:sym typeface="Calibri"/>
-              </a:rPr>
-              <a:t> </a:t>
-            </a:r>
-            <a:r>
-              <a:rPr b="1" lang="en-US" sz="1250">
-                <a:solidFill>
-                  <a:srgbClr val="F7F3E9"/>
-                </a:solidFill>
-                <a:latin typeface="Inter"/>
-                <a:ea typeface="Inter"/>
-                <a:cs typeface="Inter"/>
-                <a:sym typeface="Inter"/>
-              </a:rPr>
-              <a:t>AGENT · </a:t>
-            </a:r>
-            <a:endParaRPr/>
-          </a:p>
-          <a:p>
-            <a:pPr indent="0" lvl="0" marL="0" marR="0" rtl="0" algn="l">
-              <a:spcBef>
-                <a:spcPts val="0"/>
-              </a:spcBef>
-              <a:spcAft>
-                <a:spcPts val="0"/>
-              </a:spcAft>
-              <a:buClr>
-                <a:srgbClr val="F7F3E9"/>
-              </a:buClr>
-              <a:buSzPts val="1250"/>
-              <a:buFont typeface="Inter"/>
-              <a:buNone/>
-            </a:pPr>
-            <a:r>
-              <a:rPr b="1" lang="en-US" sz="1250">
-                <a:solidFill>
-                  <a:srgbClr val="F7F3E9"/>
-                </a:solidFill>
-                <a:latin typeface="Inter"/>
-                <a:ea typeface="Inter"/>
-                <a:cs typeface="Inter"/>
-                <a:sym typeface="Inter"/>
-              </a:rPr>
-              <a:t>~20 MIN</a:t>
-            </a:r>
-            <a:endParaRPr sz="1250">
-              <a:solidFill>
-                <a:schemeClr val="dk1"/>
-              </a:solidFill>
-              <a:latin typeface="Calibri"/>
-              <a:ea typeface="Calibri"/>
-              <a:cs typeface="Calibri"/>
-              <a:sym typeface="Calibri"/>
-            </a:endParaRPr>
-          </a:p>
-        </p:txBody>
-      </p:sp>
-      <p:sp>
-        <p:nvSpPr>
-          <p:cNvPr id="70" name="Google Shape;70;p7"/>
-          <p:cNvSpPr/>
-          <p:nvPr/>
-        </p:nvSpPr>
-        <p:spPr>
-          <a:xfrm>
-            <a:off x="9381744" y="3310128"/>
-            <a:ext cx="1993392" cy="1235746"/>
-          </a:xfrm>
-          <a:prstGeom prst="rect">
-            <a:avLst/>
-          </a:prstGeom>
-          <a:noFill/>
-          <a:ln>
-            <a:noFill/>
-          </a:ln>
-        </p:spPr>
-        <p:txBody>
-          <a:bodyPr anchorCtr="0" anchor="ctr" bIns="0" lIns="0" spcFirstLastPara="1" rIns="0" wrap="square" tIns="0">
-            <a:noAutofit/>
-          </a:bodyPr>
-          <a:lstStyle/>
-          <a:p>
-            <a:pPr indent="0" lvl="0" marL="0" marR="0" rtl="0" algn="l">
-              <a:lnSpc>
-                <a:spcPct val="110000"/>
-              </a:lnSpc>
-              <a:spcBef>
-                <a:spcPts val="0"/>
-              </a:spcBef>
-              <a:spcAft>
-                <a:spcPts val="0"/>
-              </a:spcAft>
-              <a:buClr>
-                <a:srgbClr val="AFA893"/>
-              </a:buClr>
-              <a:buSzPts val="1600"/>
-              <a:buFont typeface="Inter"/>
-              <a:buNone/>
-            </a:pPr>
-            <a:r>
-              <a:rPr i="1" lang="en-US">
-                <a:solidFill>
-                  <a:srgbClr val="AFA893"/>
-                </a:solidFill>
-                <a:latin typeface="Inter"/>
-                <a:ea typeface="Inter"/>
-                <a:cs typeface="Inter"/>
-                <a:sym typeface="Inter"/>
-              </a:rPr>
-              <a:t>She takes the evening shift: briefing written, calendar booked, 4:54 PM notification.</a:t>
-            </a:r>
-            <a:endParaRPr>
-              <a:solidFill>
-                <a:schemeClr val="dk1"/>
-              </a:solidFill>
-              <a:latin typeface="Calibri"/>
-              <a:ea typeface="Calibri"/>
-              <a:cs typeface="Calibri"/>
-              <a:sym typeface="Calibri"/>
-            </a:endParaRPr>
-          </a:p>
-        </p:txBody>
-      </p:sp>
-      <p:sp>
-        <p:nvSpPr>
-          <p:cNvPr id="71" name="Google Shape;71;p7"/>
-          <p:cNvSpPr/>
-          <p:nvPr/>
-        </p:nvSpPr>
-        <p:spPr>
-          <a:xfrm>
-            <a:off x="822960" y="5440680"/>
-            <a:ext cx="10545775" cy="457200"/>
-          </a:xfrm>
-          <a:prstGeom prst="rect">
-            <a:avLst/>
-          </a:prstGeom>
-          <a:noFill/>
-          <a:ln>
-            <a:noFill/>
-          </a:ln>
-        </p:spPr>
-        <p:txBody>
-          <a:bodyPr anchorCtr="0" anchor="ctr" bIns="0" lIns="0" spcFirstLastPara="1" rIns="0" wrap="square" tIns="0">
-            <a:noAutofit/>
-          </a:bodyPr>
-          <a:lstStyle/>
-          <a:p>
-            <a:pPr indent="0" lvl="0" marL="0" marR="0" rtl="0" algn="l">
-              <a:spcBef>
-                <a:spcPts val="0"/>
-              </a:spcBef>
-              <a:spcAft>
-                <a:spcPts val="0"/>
-              </a:spcAft>
-              <a:buClr>
-                <a:srgbClr val="AFA893"/>
-              </a:buClr>
-              <a:buSzPts val="2400"/>
-              <a:buFont typeface="Inter"/>
-              <a:buNone/>
-            </a:pPr>
-            <a:r>
-              <a:rPr i="1" lang="en-US" sz="2400">
-                <a:solidFill>
-                  <a:srgbClr val="AFA893"/>
-                </a:solidFill>
-                <a:latin typeface="Inter"/>
-                <a:ea typeface="Inter"/>
-                <a:cs typeface="Inter"/>
-                <a:sym typeface="Inter"/>
-              </a:rPr>
-              <a:t>Each case file is on the site . Every prompt has a copy button. You paste, She works.</a:t>
-            </a:r>
-            <a:endParaRPr sz="2400">
-              <a:solidFill>
-                <a:schemeClr val="dk1"/>
-              </a:solidFill>
-              <a:latin typeface="Calibri"/>
-              <a:ea typeface="Calibri"/>
-              <a:cs typeface="Calibri"/>
-              <a:sym typeface="Calibri"/>
-            </a:endParaRPr>
-          </a:p>
-        </p:txBody>
-      </p:sp>
-      <p:sp>
-        <p:nvSpPr>
-          <p:cNvPr id="72" name="Google Shape;72;p7"/>
-          <p:cNvSpPr/>
-          <p:nvPr/>
-        </p:nvSpPr>
-        <p:spPr>
-          <a:xfrm>
-            <a:off x="1090879" y="4526280"/>
+            <a:off x="5080000" y="4526280"/>
             <a:ext cx="1993392" cy="502920"/>
           </a:xfrm>
           <a:prstGeom prst="rect">
@@ -11698,29 +16252,20 @@
                 <a:cs typeface="Playfair Display"/>
                 <a:sym typeface="Playfair Display"/>
               </a:rPr>
-              <a:t>Topic: Integrations</a:t>
-            </a:r>
-            <a:endParaRPr sz="1600">
-              <a:solidFill>
-                <a:schemeClr val="dk1"/>
-              </a:solidFill>
-              <a:latin typeface="Calibri"/>
-              <a:ea typeface="Calibri"/>
-              <a:cs typeface="Calibri"/>
-              <a:sym typeface="Calibri"/>
-            </a:endParaRPr>
-          </a:p>
-        </p:txBody>
-      </p:sp>
-      <p:sp>
-        <p:nvSpPr>
-          <p:cNvPr id="73" name="Google Shape;73;p7"/>
+              <a:t>Topic: Instructions</a:t>
+            </a:r>
+          </a:p>
+        </p:txBody>
+      </p:sp>
+      <p:sp>
+        <p:nvSpPr>
+          <p:cNvPr id="74" name="Google Shape;74;p7"/>
           <p:cNvSpPr/>
           <p:nvPr/>
         </p:nvSpPr>
         <p:spPr>
           <a:xfrm>
-            <a:off x="3852367" y="4526280"/>
+            <a:off x="9080500" y="4526280"/>
             <a:ext cx="1993392" cy="502920"/>
           </a:xfrm>
           <a:prstGeom prst="rect">
@@ -11761,143 +16306,8 @@
                 <a:cs typeface="Playfair Display"/>
                 <a:sym typeface="Playfair Display"/>
               </a:rPr>
-              <a:t>Topic: Projects</a:t>
-            </a:r>
-            <a:endParaRPr sz="1600">
-              <a:solidFill>
-                <a:schemeClr val="dk1"/>
-              </a:solidFill>
-              <a:latin typeface="Calibri"/>
-              <a:ea typeface="Calibri"/>
-              <a:cs typeface="Calibri"/>
-              <a:sym typeface="Calibri"/>
-            </a:endParaRPr>
-          </a:p>
-        </p:txBody>
-      </p:sp>
-      <p:sp>
-        <p:nvSpPr>
-          <p:cNvPr id="74" name="Google Shape;74;p7"/>
-          <p:cNvSpPr/>
-          <p:nvPr/>
-        </p:nvSpPr>
-        <p:spPr>
-          <a:xfrm>
-            <a:off x="6613855" y="4526280"/>
-            <a:ext cx="1993392" cy="502920"/>
-          </a:xfrm>
-          <a:prstGeom prst="rect">
-            <a:avLst/>
-          </a:prstGeom>
-          <a:noFill/>
-          <a:ln>
-            <a:noFill/>
-          </a:ln>
-        </p:spPr>
-        <p:txBody>
-          <a:bodyPr anchorCtr="0" anchor="ctr" bIns="0" lIns="0" spcFirstLastPara="1" rIns="0" wrap="square" tIns="0">
-            <a:noAutofit/>
-          </a:bodyPr>
-          <a:lstStyle/>
-          <a:p>
-            <a:pPr indent="0" lvl="0" marL="0" marR="0" rtl="0" algn="l">
-              <a:spcBef>
-                <a:spcPts val="0"/>
-              </a:spcBef>
-              <a:spcAft>
-                <a:spcPts val="0"/>
-              </a:spcAft>
-              <a:buClr>
-                <a:srgbClr val="C9A227"/>
-              </a:buClr>
-              <a:buSzPts val="1600"/>
-              <a:buFont typeface="Playfair Display"/>
-              <a:buNone/>
-            </a:pPr>
-            <a:r>
-              <a:rPr b="1" lang="en-US" sz="1600">
-                <a:solidFill>
-                  <a:srgbClr val="C9A227"/>
-                </a:solidFill>
-                <a:latin typeface="Playfair Display"/>
-                <a:ea typeface="Playfair Display"/>
-                <a:cs typeface="Playfair Display"/>
-                <a:sym typeface="Playfair Display"/>
-              </a:rPr>
-              <a:t>Topic: Skills</a:t>
-            </a:r>
-            <a:endParaRPr sz="1600">
-              <a:solidFill>
-                <a:schemeClr val="dk1"/>
-              </a:solidFill>
-              <a:latin typeface="Calibri"/>
-              <a:ea typeface="Calibri"/>
-              <a:cs typeface="Calibri"/>
-              <a:sym typeface="Calibri"/>
-            </a:endParaRPr>
-          </a:p>
-        </p:txBody>
-      </p:sp>
-      <p:sp>
-        <p:nvSpPr>
-          <p:cNvPr id="75" name="Google Shape;75;p7"/>
-          <p:cNvSpPr/>
-          <p:nvPr/>
-        </p:nvSpPr>
-        <p:spPr>
-          <a:xfrm>
-            <a:off x="9375343" y="4526280"/>
-            <a:ext cx="1993392" cy="502920"/>
-          </a:xfrm>
-          <a:prstGeom prst="rect">
-            <a:avLst/>
-          </a:prstGeom>
-          <a:noFill/>
-          <a:ln>
-            <a:noFill/>
-          </a:ln>
-        </p:spPr>
-        <p:txBody>
-          <a:bodyPr anchorCtr="0" anchor="ctr" bIns="0" lIns="0" spcFirstLastPara="1" rIns="0" wrap="square" tIns="0">
-            <a:noAutofit/>
-          </a:bodyPr>
-          <a:lstStyle/>
-          <a:p>
-            <a:pPr indent="0" lvl="0" marL="0" marR="0" rtl="0" algn="l">
-              <a:spcBef>
-                <a:spcPts val="0"/>
-              </a:spcBef>
-              <a:spcAft>
-                <a:spcPts val="0"/>
-              </a:spcAft>
-              <a:buClr>
-                <a:srgbClr val="C9A227"/>
-              </a:buClr>
-              <a:buSzPts val="1600"/>
-              <a:buFont typeface="Playfair Display"/>
-              <a:buNone/>
-            </a:pPr>
-            <a:r>
-              <a:rPr b="1" lang="en-US" sz="1600">
-                <a:solidFill>
-                  <a:srgbClr val="C9A227"/>
-                </a:solidFill>
-                <a:latin typeface="Playfair Display"/>
-                <a:ea typeface="Playfair Display"/>
-                <a:cs typeface="Playfair Display"/>
-                <a:sym typeface="Playfair Display"/>
-              </a:rPr>
-              <a:t>Topic: Agents</a:t>
-            </a:r>
-            <a:endParaRPr sz="1600">
-              <a:solidFill>
-                <a:schemeClr val="dk1"/>
-              </a:solidFill>
-              <a:latin typeface="Calibri"/>
-              <a:ea typeface="Calibri"/>
-              <a:cs typeface="Calibri"/>
-              <a:sym typeface="Calibri"/>
-            </a:endParaRPr>
+              <a:t>Topic: Skills + Schedules</a:t>
+            </a:r>
           </a:p>
         </p:txBody>
       </p:sp>
@@ -12258,7 +16668,7 @@
                 <a:cs typeface="Inter"/>
                 <a:sym typeface="Inter"/>
               </a:rPr>
-              <a:t>CASE FILE 01 · CHAT — FIRST IMPRESSIONS</a:t>
+              <a:t>CASE FILE 01 · PROJECT — FIRST IMPRESSIONS</a:t>
             </a:r>
             <a:endParaRPr sz="1200">
               <a:solidFill>
@@ -12321,7 +16731,7 @@
                 <a:cs typeface="Playfair Display"/>
                 <a:sym typeface="Playfair Display"/>
               </a:rPr>
-              <a:t>Connect your email. Then ask the only question that matters.</a:t>
+              <a:t>One desk for everything. Create her project, then connect your Google accounts.</a:t>
             </a:r>
             <a:endParaRPr sz="2800">
               <a:solidFill>
@@ -12384,7 +16794,7 @@
                 <a:cs typeface="Inter"/>
                 <a:sym typeface="Inter"/>
               </a:rPr>
-              <a:t>Settings → Connectors → Connect Gmail or Microsoft 365 (one click, one sign-in)</a:t>
+              <a:t>Projects → New project → name it Donna. Then: Settings → Connectors → Connect Gmail + Calendar + Drive</a:t>
             </a:r>
             <a:endParaRPr sz="1800">
               <a:solidFill>
@@ -12507,7 +16917,7 @@
                 <a:cs typeface="Inter"/>
                 <a:sym typeface="Inter"/>
               </a:rPr>
-              <a:t>PROMPT 1 — THE SETUP </a:t>
+              <a:t>STUCK CONNECTING? — THE SETUP PROMPT</a:t>
             </a:r>
             <a:endParaRPr sz="1000">
               <a:solidFill>
@@ -12750,7 +17160,7 @@
                 <a:cs typeface="Inter"/>
                 <a:sym typeface="Inter"/>
               </a:rPr>
-              <a:t>CASE FILE 01 · CHAT — FIRST IMPRESSIONS</a:t>
+              <a:t>CASE FILE 01 · PROJECT — FIRST IMPRESSIONS</a:t>
             </a:r>
             <a:endParaRPr b="0" i="0" sz="1200" u="none" cap="none" strike="noStrike">
               <a:solidFill>
@@ -12816,7 +17226,7 @@
                 <a:cs typeface="Playfair Display"/>
                 <a:sym typeface="Playfair Display"/>
               </a:rPr>
-              <a:t>Connect your email. Then ask the only question that matters.</a:t>
+              <a:t>Inside the Donna project: ask the only question that matters.</a:t>
             </a:r>
             <a:endParaRPr b="0" i="0" sz="2800" u="none" cap="none" strike="noStrike">
               <a:solidFill>
@@ -12882,7 +17292,7 @@
                 <a:cs typeface="Inter"/>
                 <a:sym typeface="Inter"/>
               </a:rPr>
-              <a:t>Settings → Connectors → Connect Gmail or Microsoft 365 (they’re pre-enabled: one click, one sign-in)</a:t>
+              <a:t>Connected, but she can’t see your inbox? Quit Claude fully and reopen it. Fixes it nine times out of ten.</a:t>
             </a:r>
             <a:endParaRPr b="0" i="0" sz="1800" u="none" cap="none" strike="noStrike">
               <a:solidFill>
@@ -13016,7 +17426,7 @@
                 <a:cs typeface="Inter"/>
                 <a:sym typeface="Inter"/>
               </a:rPr>
-              <a:t>PROMPT 2 — THE QUESTION</a:t>
+              <a:t>PROMPT 1 — THE QUESTION</a:t>
             </a:r>
             <a:endParaRPr b="0" i="0" sz="1000" u="none" cap="none" strike="noStrike">
               <a:solidFill>
@@ -13296,7 +17706,7 @@
                 <a:cs typeface="Inter"/>
                 <a:sym typeface="Inter"/>
               </a:rPr>
-              <a:t>PROMPT 3 — THE FIRST DRAFT</a:t>
+              <a:t>PROMPT 2 — THE FIRST DRAFT</a:t>
             </a:r>
             <a:endParaRPr b="0" i="0" sz="1000" u="none" cap="none" strike="noStrike">
               <a:solidFill>
@@ -13364,15 +17774,6 @@
               </a:rPr>
               <a:t>Draft a reply to #1. Under 100 words, warm but decisive.</a:t>
             </a:r>
-            <a:endParaRPr b="0" i="0" sz="2000" u="none" cap="none" strike="noStrike">
-              <a:solidFill>
-                <a:srgbClr val="000000"/>
-              </a:solidFill>
-              <a:latin typeface="Calibri"/>
-              <a:ea typeface="Calibri"/>
-              <a:cs typeface="Calibri"/>
-              <a:sym typeface="Calibri"/>
-            </a:endParaRPr>
           </a:p>
           <a:p>
             <a:pPr indent="0" lvl="0" marL="0" marR="0" rtl="0" algn="l">
@@ -13402,17 +17803,39 @@
                 <a:cs typeface="Courier New"/>
                 <a:sym typeface="Courier New"/>
               </a:rPr>
-              <a:t>Don’t send it — just show me.</a:t>
-            </a:r>
-            <a:endParaRPr b="0" i="0" sz="2000" u="none" cap="none" strike="noStrike">
-              <a:solidFill>
-                <a:srgbClr val="000000"/>
-              </a:solidFill>
-              <a:latin typeface="Calibri"/>
-              <a:ea typeface="Calibri"/>
-              <a:cs typeface="Calibri"/>
-              <a:sym typeface="Calibri"/>
-            </a:endParaRPr>
+              <a:t>Save it as a draft in my Gmail so I can review it there.</a:t>
+            </a:r>
+          </a:p>
+          <a:p>
+            <a:pPr indent="0" lvl="0" marL="0" marR="0" rtl="0" algn="l">
+              <a:lnSpc>
+                <a:spcPct val="115000"/>
+              </a:lnSpc>
+              <a:spcBef>
+                <a:spcPts val="0"/>
+              </a:spcBef>
+              <a:spcAft>
+                <a:spcPts val="0"/>
+              </a:spcAft>
+              <a:buClr>
+                <a:srgbClr val="1C2333"/>
+              </a:buClr>
+              <a:buSzPts val="2000"/>
+              <a:buFont typeface="Courier New"/>
+              <a:buNone/>
+            </a:pPr>
+            <a:r>
+              <a:rPr b="0" i="0" lang="en-US" sz="2000" u="none" cap="none" strike="noStrike">
+                <a:solidFill>
+                  <a:srgbClr val="1C2333"/>
+                </a:solidFill>
+                <a:latin typeface="Courier New"/>
+                <a:ea typeface="Courier New"/>
+                <a:cs typeface="Courier New"/>
+                <a:sym typeface="Courier New"/>
+              </a:rPr>
+              <a:t>Do not send it.</a:t>
+            </a:r>
           </a:p>
         </p:txBody>
       </p:sp>
@@ -13684,7 +18107,7 @@
                 <a:cs typeface="Playfair Display"/>
                 <a:sym typeface="Playfair Display"/>
               </a:rPr>
-              <a:t>Claude shows a draft you’d actually send.</a:t>
+              <a:t>A draft you didn’t write is waiting in your Gmail Drafts.</a:t>
             </a:r>
             <a:endParaRPr sz="2400">
               <a:solidFill>
@@ -13747,7 +18170,7 @@
                 <a:cs typeface="Inter"/>
                 <a:sym typeface="Inter"/>
               </a:rPr>
-              <a:t>Chat is the job interview. Donna’s hired — now we train her.</a:t>
+              <a:t>The interview is over. Donna’s hired. Now we train her.</a:t>
             </a:r>
             <a:endParaRPr sz="2400">
               <a:solidFill>
